--- a/exports/pptx/lessons/middle-module-09-subtraction-nikhilam/day-09-speed-comparison.pptx
+++ b/exports/pptx/lessons/middle-module-09-subtraction-nikhilam/day-09-speed-comparison.pptx
@@ -4039,8 +4039,8 @@
         </p:nvSpPr>
         <p:spPr>
           <a:xfrm>
-            <a:off x="406301" y="4169122"/>
-            <a:ext cx="8498026" cy="426541"/>
+            <a:off x="406301" y="1160413"/>
+            <a:ext cx="8498026" cy="213271"/>
           </a:xfrm>
           <a:prstGeom prst="rect">
             <a:avLst/>
@@ -4065,61 +4065,15 @@
               <a:buNone/>
             </a:pPr>
             <a:r>
-              <a:rPr lang="en-US" sz="1200" dirty="0">
-                <a:solidFill>
-                  <a:srgbClr val="1C2833"/>
-                </a:solidFill>
-                <a:latin typeface="Arial" pitchFamily="34" charset="0"/>
-                <a:ea typeface="Arial" pitchFamily="34" charset="-122"/>
-                <a:cs typeface="Arial" pitchFamily="34" charset="-120"/>
-              </a:rPr>
-              <a:t>Students solve each problem </a:t>
-            </a:r>
-            <a:pPr algn="l" indent="0" marL="0">
-              <a:lnSpc>
-                <a:spcPts val="1680"/>
-              </a:lnSpc>
-              <a:spcBef>
-                <a:spcPts val="300"/>
-              </a:spcBef>
-              <a:spcAft>
-                <a:spcPts val="300"/>
-              </a:spcAft>
-              <a:buNone/>
-            </a:pPr>
-            <a:r>
-              <a:rPr lang="en-US" sz="1200" b="1" dirty="0">
-                <a:solidFill>
-                  <a:srgbClr val="1C2833"/>
-                </a:solidFill>
-                <a:latin typeface="Arial" pitchFamily="34" charset="0"/>
-                <a:ea typeface="Arial" pitchFamily="34" charset="-122"/>
-                <a:cs typeface="Arial" pitchFamily="34" charset="-120"/>
-              </a:rPr>
-              <a:t>once</a:t>
-            </a:r>
-            <a:pPr algn="l" indent="0" marL="0">
-              <a:lnSpc>
-                <a:spcPts val="1680"/>
-              </a:lnSpc>
-              <a:spcBef>
-                <a:spcPts val="300"/>
-              </a:spcBef>
-              <a:spcAft>
-                <a:spcPts val="300"/>
-              </a:spcAft>
-              <a:buNone/>
-            </a:pPr>
-            <a:r>
-              <a:rPr lang="en-US" sz="1200" dirty="0">
-                <a:solidFill>
-                  <a:srgbClr val="1C2833"/>
-                </a:solidFill>
-                <a:latin typeface="Arial" pitchFamily="34" charset="0"/>
-                <a:ea typeface="Arial" pitchFamily="34" charset="-122"/>
-                <a:cs typeface="Arial" pitchFamily="34" charset="-120"/>
-              </a:rPr>
-              <a:t> by their chosen method, then again by the other method. Time both. Mark which method was faster.</a:t>
+              <a:rPr lang="en-US" sz="1200" i="1" dirty="0">
+                <a:solidFill>
+                  <a:srgbClr val="1C2833"/>
+                </a:solidFill>
+                <a:latin typeface="Arial" pitchFamily="34" charset="0"/>
+                <a:ea typeface="Arial" pitchFamily="34" charset="-122"/>
+                <a:cs typeface="Arial" pitchFamily="34" charset="-120"/>
+              </a:rPr>
+              <a:t>Each row: # · Problem · Likely faster method · Why.</a:t>
             </a:r>
             <a:endParaRPr lang="en-US" sz="1200" dirty="0"/>
           </a:p>
@@ -4133,7 +4087,563 @@
         </p:nvSpPr>
         <p:spPr>
           <a:xfrm>
-            <a:off x="406301" y="4748064"/>
+            <a:off x="634901" y="1462534"/>
+            <a:ext cx="8102798" cy="2475905"/>
+          </a:xfrm>
+          <a:prstGeom prst="rect">
+            <a:avLst/>
+          </a:prstGeom>
+          <a:noFill/>
+          <a:ln/>
+        </p:spPr>
+        <p:txBody>
+          <a:bodyPr wrap="square" lIns="0" tIns="0" rIns="0" bIns="0" rtlCol="0" anchor="t"/>
+          <a:lstStyle/>
+          <a:p>
+            <a:pPr algn="l" marL="342900" indent="-342900">
+              <a:lnSpc>
+                <a:spcPts val="1620"/>
+              </a:lnSpc>
+              <a:spcAft>
+                <a:spcPts val="300"/>
+              </a:spcAft>
+              <a:buSzPct val="100000"/>
+              <a:buChar char="•"/>
+            </a:pPr>
+            <a:r>
+              <a:rPr lang="en-US" sz="1200" b="1" dirty="0">
+                <a:solidFill>
+                  <a:srgbClr val="1C2833"/>
+                </a:solidFill>
+                <a:latin typeface="Arial" pitchFamily="34" charset="0"/>
+                <a:ea typeface="Arial" pitchFamily="34" charset="-122"/>
+                <a:cs typeface="Arial" pitchFamily="34" charset="-120"/>
+              </a:rPr>
+              <a:t>1</a:t>
+            </a:r>
+            <a:pPr algn="l" indent="0" marL="0">
+              <a:lnSpc>
+                <a:spcPts val="1620"/>
+              </a:lnSpc>
+              <a:spcAft>
+                <a:spcPts val="300"/>
+              </a:spcAft>
+              <a:buNone/>
+            </a:pPr>
+            <a:r>
+              <a:rPr lang="en-US" sz="1200" dirty="0">
+                <a:solidFill>
+                  <a:srgbClr val="1C2833"/>
+                </a:solidFill>
+                <a:latin typeface="Arial" pitchFamily="34" charset="0"/>
+                <a:ea typeface="Arial" pitchFamily="34" charset="-122"/>
+                <a:cs typeface="Arial" pitchFamily="34" charset="-120"/>
+              </a:rPr>
+              <a:t> — 100 − 37 · Nikhilam · Pure power-of-ten subtraction</a:t>
+            </a:r>
+            <a:endParaRPr lang="en-US" sz="1200" dirty="0"/>
+          </a:p>
+          <a:p>
+            <a:pPr algn="l" marL="342900" indent="-342900">
+              <a:lnSpc>
+                <a:spcPts val="1620"/>
+              </a:lnSpc>
+              <a:spcAft>
+                <a:spcPts val="300"/>
+              </a:spcAft>
+              <a:buSzPct val="100000"/>
+              <a:buChar char="•"/>
+            </a:pPr>
+            <a:r>
+              <a:rPr lang="en-US" sz="1200" b="1" dirty="0">
+                <a:solidFill>
+                  <a:srgbClr val="1C2833"/>
+                </a:solidFill>
+                <a:latin typeface="Arial" pitchFamily="34" charset="0"/>
+                <a:ea typeface="Arial" pitchFamily="34" charset="-122"/>
+                <a:cs typeface="Arial" pitchFamily="34" charset="-120"/>
+              </a:rPr>
+              <a:t>2</a:t>
+            </a:r>
+            <a:pPr algn="l" indent="0" marL="0">
+              <a:lnSpc>
+                <a:spcPts val="1620"/>
+              </a:lnSpc>
+              <a:spcAft>
+                <a:spcPts val="300"/>
+              </a:spcAft>
+              <a:buNone/>
+            </a:pPr>
+            <a:r>
+              <a:rPr lang="en-US" sz="1200" dirty="0">
+                <a:solidFill>
+                  <a:srgbClr val="1C2833"/>
+                </a:solidFill>
+                <a:latin typeface="Arial" pitchFamily="34" charset="0"/>
+                <a:ea typeface="Arial" pitchFamily="34" charset="-122"/>
+                <a:cs typeface="Arial" pitchFamily="34" charset="-120"/>
+              </a:rPr>
+              <a:t> — 87 − 24 · Standard · Small, no borrow either way</a:t>
+            </a:r>
+            <a:endParaRPr lang="en-US" sz="1200" dirty="0"/>
+          </a:p>
+          <a:p>
+            <a:pPr algn="l" marL="342900" indent="-342900">
+              <a:lnSpc>
+                <a:spcPts val="1620"/>
+              </a:lnSpc>
+              <a:spcAft>
+                <a:spcPts val="300"/>
+              </a:spcAft>
+              <a:buSzPct val="100000"/>
+              <a:buChar char="•"/>
+            </a:pPr>
+            <a:r>
+              <a:rPr lang="en-US" sz="1200" b="1" dirty="0">
+                <a:solidFill>
+                  <a:srgbClr val="1C2833"/>
+                </a:solidFill>
+                <a:latin typeface="Arial" pitchFamily="34" charset="0"/>
+                <a:ea typeface="Arial" pitchFamily="34" charset="-122"/>
+                <a:cs typeface="Arial" pitchFamily="34" charset="-120"/>
+              </a:rPr>
+              <a:t>3</a:t>
+            </a:r>
+            <a:pPr algn="l" indent="0" marL="0">
+              <a:lnSpc>
+                <a:spcPts val="1620"/>
+              </a:lnSpc>
+              <a:spcAft>
+                <a:spcPts val="300"/>
+              </a:spcAft>
+              <a:buNone/>
+            </a:pPr>
+            <a:r>
+              <a:rPr lang="en-US" sz="1200" dirty="0">
+                <a:solidFill>
+                  <a:srgbClr val="1C2833"/>
+                </a:solidFill>
+                <a:latin typeface="Arial" pitchFamily="34" charset="0"/>
+                <a:ea typeface="Arial" pitchFamily="34" charset="-122"/>
+                <a:cs typeface="Arial" pitchFamily="34" charset="-120"/>
+              </a:rPr>
+              <a:t> — 1000 − 463 · Nikhilam · Power-of-ten</a:t>
+            </a:r>
+            <a:endParaRPr lang="en-US" sz="1200" dirty="0"/>
+          </a:p>
+          <a:p>
+            <a:pPr algn="l" marL="342900" indent="-342900">
+              <a:lnSpc>
+                <a:spcPts val="1620"/>
+              </a:lnSpc>
+              <a:spcAft>
+                <a:spcPts val="300"/>
+              </a:spcAft>
+              <a:buSzPct val="100000"/>
+              <a:buChar char="•"/>
+            </a:pPr>
+            <a:r>
+              <a:rPr lang="en-US" sz="1200" b="1" dirty="0">
+                <a:solidFill>
+                  <a:srgbClr val="1C2833"/>
+                </a:solidFill>
+                <a:latin typeface="Arial" pitchFamily="34" charset="0"/>
+                <a:ea typeface="Arial" pitchFamily="34" charset="-122"/>
+                <a:cs typeface="Arial" pitchFamily="34" charset="-120"/>
+              </a:rPr>
+              <a:t>4</a:t>
+            </a:r>
+            <a:pPr algn="l" indent="0" marL="0">
+              <a:lnSpc>
+                <a:spcPts val="1620"/>
+              </a:lnSpc>
+              <a:spcAft>
+                <a:spcPts val="300"/>
+              </a:spcAft>
+              <a:buNone/>
+            </a:pPr>
+            <a:r>
+              <a:rPr lang="en-US" sz="1200" dirty="0">
+                <a:solidFill>
+                  <a:srgbClr val="1C2833"/>
+                </a:solidFill>
+                <a:latin typeface="Arial" pitchFamily="34" charset="0"/>
+                <a:ea typeface="Arial" pitchFamily="34" charset="-122"/>
+                <a:cs typeface="Arial" pitchFamily="34" charset="-120"/>
+              </a:rPr>
+              <a:t> — 532 − 178 · Standard · No clean base nearby</a:t>
+            </a:r>
+            <a:endParaRPr lang="en-US" sz="1200" dirty="0"/>
+          </a:p>
+          <a:p>
+            <a:pPr algn="l" marL="342900" indent="-342900">
+              <a:lnSpc>
+                <a:spcPts val="1620"/>
+              </a:lnSpc>
+              <a:spcAft>
+                <a:spcPts val="300"/>
+              </a:spcAft>
+              <a:buSzPct val="100000"/>
+              <a:buChar char="•"/>
+            </a:pPr>
+            <a:r>
+              <a:rPr lang="en-US" sz="1200" b="1" dirty="0">
+                <a:solidFill>
+                  <a:srgbClr val="1C2833"/>
+                </a:solidFill>
+                <a:latin typeface="Arial" pitchFamily="34" charset="0"/>
+                <a:ea typeface="Arial" pitchFamily="34" charset="-122"/>
+                <a:cs typeface="Arial" pitchFamily="34" charset="-120"/>
+              </a:rPr>
+              <a:t>5</a:t>
+            </a:r>
+            <a:pPr algn="l" indent="0" marL="0">
+              <a:lnSpc>
+                <a:spcPts val="1620"/>
+              </a:lnSpc>
+              <a:spcAft>
+                <a:spcPts val="300"/>
+              </a:spcAft>
+              <a:buNone/>
+            </a:pPr>
+            <a:r>
+              <a:rPr lang="en-US" sz="1200" dirty="0">
+                <a:solidFill>
+                  <a:srgbClr val="1C2833"/>
+                </a:solidFill>
+                <a:latin typeface="Arial" pitchFamily="34" charset="0"/>
+                <a:ea typeface="Arial" pitchFamily="34" charset="-122"/>
+                <a:cs typeface="Arial" pitchFamily="34" charset="-120"/>
+              </a:rPr>
+              <a:t> — 10 000 − 5827 · Nikhilam · Power-of-ten</a:t>
+            </a:r>
+            <a:endParaRPr lang="en-US" sz="1200" dirty="0"/>
+          </a:p>
+          <a:p>
+            <a:pPr algn="l" marL="342900" indent="-342900">
+              <a:lnSpc>
+                <a:spcPts val="1620"/>
+              </a:lnSpc>
+              <a:spcAft>
+                <a:spcPts val="300"/>
+              </a:spcAft>
+              <a:buSzPct val="100000"/>
+              <a:buChar char="•"/>
+            </a:pPr>
+            <a:r>
+              <a:rPr lang="en-US" sz="1200" b="1" dirty="0">
+                <a:solidFill>
+                  <a:srgbClr val="1C2833"/>
+                </a:solidFill>
+                <a:latin typeface="Arial" pitchFamily="34" charset="0"/>
+                <a:ea typeface="Arial" pitchFamily="34" charset="-122"/>
+                <a:cs typeface="Arial" pitchFamily="34" charset="-120"/>
+              </a:rPr>
+              <a:t>6</a:t>
+            </a:r>
+            <a:pPr algn="l" indent="0" marL="0">
+              <a:lnSpc>
+                <a:spcPts val="1620"/>
+              </a:lnSpc>
+              <a:spcAft>
+                <a:spcPts val="300"/>
+              </a:spcAft>
+              <a:buNone/>
+            </a:pPr>
+            <a:r>
+              <a:rPr lang="en-US" sz="1200" dirty="0">
+                <a:solidFill>
+                  <a:srgbClr val="1C2833"/>
+                </a:solidFill>
+                <a:latin typeface="Arial" pitchFamily="34" charset="0"/>
+                <a:ea typeface="Arial" pitchFamily="34" charset="-122"/>
+                <a:cs typeface="Arial" pitchFamily="34" charset="-120"/>
+              </a:rPr>
+              <a:t> — 7000 − 248 · Nikhilam (with adjust) · Round multiple of 1000</a:t>
+            </a:r>
+            <a:endParaRPr lang="en-US" sz="1200" dirty="0"/>
+          </a:p>
+          <a:p>
+            <a:pPr algn="l" marL="342900" indent="-342900">
+              <a:lnSpc>
+                <a:spcPts val="1620"/>
+              </a:lnSpc>
+              <a:spcAft>
+                <a:spcPts val="300"/>
+              </a:spcAft>
+              <a:buSzPct val="100000"/>
+              <a:buChar char="•"/>
+            </a:pPr>
+            <a:r>
+              <a:rPr lang="en-US" sz="1200" b="1" dirty="0">
+                <a:solidFill>
+                  <a:srgbClr val="1C2833"/>
+                </a:solidFill>
+                <a:latin typeface="Arial" pitchFamily="34" charset="0"/>
+                <a:ea typeface="Arial" pitchFamily="34" charset="-122"/>
+                <a:cs typeface="Arial" pitchFamily="34" charset="-120"/>
+              </a:rPr>
+              <a:t>7</a:t>
+            </a:r>
+            <a:pPr algn="l" indent="0" marL="0">
+              <a:lnSpc>
+                <a:spcPts val="1620"/>
+              </a:lnSpc>
+              <a:spcAft>
+                <a:spcPts val="300"/>
+              </a:spcAft>
+              <a:buNone/>
+            </a:pPr>
+            <a:r>
+              <a:rPr lang="en-US" sz="1200" dirty="0">
+                <a:solidFill>
+                  <a:srgbClr val="1C2833"/>
+                </a:solidFill>
+                <a:latin typeface="Arial" pitchFamily="34" charset="0"/>
+                <a:ea typeface="Arial" pitchFamily="34" charset="-122"/>
+                <a:cs typeface="Arial" pitchFamily="34" charset="-120"/>
+              </a:rPr>
+              <a:t> — 9385 − 4716 · Tie / standard · Mid-range subtrahend</a:t>
+            </a:r>
+            <a:endParaRPr lang="en-US" sz="1200" dirty="0"/>
+          </a:p>
+          <a:p>
+            <a:pPr algn="l" marL="342900" indent="-342900">
+              <a:lnSpc>
+                <a:spcPts val="1620"/>
+              </a:lnSpc>
+              <a:spcAft>
+                <a:spcPts val="300"/>
+              </a:spcAft>
+              <a:buSzPct val="100000"/>
+              <a:buChar char="•"/>
+            </a:pPr>
+            <a:r>
+              <a:rPr lang="en-US" sz="1200" b="1" dirty="0">
+                <a:solidFill>
+                  <a:srgbClr val="1C2833"/>
+                </a:solidFill>
+                <a:latin typeface="Arial" pitchFamily="34" charset="0"/>
+                <a:ea typeface="Arial" pitchFamily="34" charset="-122"/>
+                <a:cs typeface="Arial" pitchFamily="34" charset="-120"/>
+              </a:rPr>
+              <a:t>8</a:t>
+            </a:r>
+            <a:pPr algn="l" indent="0" marL="0">
+              <a:lnSpc>
+                <a:spcPts val="1620"/>
+              </a:lnSpc>
+              <a:spcAft>
+                <a:spcPts val="300"/>
+              </a:spcAft>
+              <a:buNone/>
+            </a:pPr>
+            <a:r>
+              <a:rPr lang="en-US" sz="1200" dirty="0">
+                <a:solidFill>
+                  <a:srgbClr val="1C2833"/>
+                </a:solidFill>
+                <a:latin typeface="Arial" pitchFamily="34" charset="0"/>
+                <a:ea typeface="Arial" pitchFamily="34" charset="-122"/>
+                <a:cs typeface="Arial" pitchFamily="34" charset="-120"/>
+              </a:rPr>
+              <a:t> — 50 000 − 12 345 · Nikhilam (with adjust) · Round multiple of 10 000</a:t>
+            </a:r>
+            <a:endParaRPr lang="en-US" sz="1200" dirty="0"/>
+          </a:p>
+          <a:p>
+            <a:pPr algn="l" marL="342900" indent="-342900">
+              <a:lnSpc>
+                <a:spcPts val="1620"/>
+              </a:lnSpc>
+              <a:spcAft>
+                <a:spcPts val="300"/>
+              </a:spcAft>
+              <a:buSzPct val="100000"/>
+              <a:buChar char="•"/>
+            </a:pPr>
+            <a:r>
+              <a:rPr lang="en-US" sz="1200" b="1" dirty="0">
+                <a:solidFill>
+                  <a:srgbClr val="1C2833"/>
+                </a:solidFill>
+                <a:latin typeface="Arial" pitchFamily="34" charset="0"/>
+                <a:ea typeface="Arial" pitchFamily="34" charset="-122"/>
+                <a:cs typeface="Arial" pitchFamily="34" charset="-120"/>
+              </a:rPr>
+              <a:t>9</a:t>
+            </a:r>
+            <a:pPr algn="l" indent="0" marL="0">
+              <a:lnSpc>
+                <a:spcPts val="1620"/>
+              </a:lnSpc>
+              <a:spcAft>
+                <a:spcPts val="300"/>
+              </a:spcAft>
+              <a:buNone/>
+            </a:pPr>
+            <a:r>
+              <a:rPr lang="en-US" sz="1200" dirty="0">
+                <a:solidFill>
+                  <a:srgbClr val="1C2833"/>
+                </a:solidFill>
+                <a:latin typeface="Arial" pitchFamily="34" charset="0"/>
+                <a:ea typeface="Arial" pitchFamily="34" charset="-122"/>
+                <a:cs typeface="Arial" pitchFamily="34" charset="-120"/>
+              </a:rPr>
+              <a:t> — 8243 − 567 · Nikhilam (with adjust) · Subtrahend close to 1000</a:t>
+            </a:r>
+            <a:endParaRPr lang="en-US" sz="1200" dirty="0"/>
+          </a:p>
+          <a:p>
+            <a:pPr algn="l" marL="342900" indent="-342900">
+              <a:lnSpc>
+                <a:spcPts val="1620"/>
+              </a:lnSpc>
+              <a:spcAft>
+                <a:spcPts val="300"/>
+              </a:spcAft>
+              <a:buSzPct val="100000"/>
+              <a:buChar char="•"/>
+            </a:pPr>
+            <a:r>
+              <a:rPr lang="en-US" sz="1200" b="1" dirty="0">
+                <a:solidFill>
+                  <a:srgbClr val="1C2833"/>
+                </a:solidFill>
+                <a:latin typeface="Arial" pitchFamily="34" charset="0"/>
+                <a:ea typeface="Arial" pitchFamily="34" charset="-122"/>
+                <a:cs typeface="Arial" pitchFamily="34" charset="-120"/>
+              </a:rPr>
+              <a:t>10</a:t>
+            </a:r>
+            <a:pPr algn="l" indent="0" marL="0">
+              <a:lnSpc>
+                <a:spcPts val="1620"/>
+              </a:lnSpc>
+              <a:spcAft>
+                <a:spcPts val="300"/>
+              </a:spcAft>
+              <a:buNone/>
+            </a:pPr>
+            <a:r>
+              <a:rPr lang="en-US" sz="1200" dirty="0">
+                <a:solidFill>
+                  <a:srgbClr val="1C2833"/>
+                </a:solidFill>
+                <a:latin typeface="Arial" pitchFamily="34" charset="0"/>
+                <a:ea typeface="Arial" pitchFamily="34" charset="-122"/>
+                <a:cs typeface="Arial" pitchFamily="34" charset="-120"/>
+              </a:rPr>
+              <a:t> — 4321 − 4118 · Standard · Both small, similar magnitudes</a:t>
+            </a:r>
+            <a:endParaRPr lang="en-US" sz="1200" dirty="0"/>
+          </a:p>
+        </p:txBody>
+      </p:sp>
+      <p:sp>
+        <p:nvSpPr>
+          <p:cNvPr id="7" name="Text 5"/>
+          <p:cNvSpPr/>
+          <p:nvPr/>
+        </p:nvSpPr>
+        <p:spPr>
+          <a:xfrm>
+            <a:off x="406301" y="4027289"/>
+            <a:ext cx="8498026" cy="426541"/>
+          </a:xfrm>
+          <a:prstGeom prst="rect">
+            <a:avLst/>
+          </a:prstGeom>
+          <a:noFill/>
+          <a:ln/>
+        </p:spPr>
+        <p:txBody>
+          <a:bodyPr wrap="square" lIns="0" tIns="0" rIns="0" bIns="0" rtlCol="0" anchor="t"/>
+          <a:lstStyle/>
+          <a:p>
+            <a:pPr algn="l" indent="0" marL="0">
+              <a:lnSpc>
+                <a:spcPts val="1680"/>
+              </a:lnSpc>
+              <a:spcBef>
+                <a:spcPts val="300"/>
+              </a:spcBef>
+              <a:spcAft>
+                <a:spcPts val="300"/>
+              </a:spcAft>
+              <a:buNone/>
+            </a:pPr>
+            <a:r>
+              <a:rPr lang="en-US" sz="1200" dirty="0">
+                <a:solidFill>
+                  <a:srgbClr val="1C2833"/>
+                </a:solidFill>
+                <a:latin typeface="Arial" pitchFamily="34" charset="0"/>
+                <a:ea typeface="Arial" pitchFamily="34" charset="-122"/>
+                <a:cs typeface="Arial" pitchFamily="34" charset="-120"/>
+              </a:rPr>
+              <a:t>Students solve each problem </a:t>
+            </a:r>
+            <a:pPr algn="l" indent="0" marL="0">
+              <a:lnSpc>
+                <a:spcPts val="1680"/>
+              </a:lnSpc>
+              <a:spcBef>
+                <a:spcPts val="300"/>
+              </a:spcBef>
+              <a:spcAft>
+                <a:spcPts val="300"/>
+              </a:spcAft>
+              <a:buNone/>
+            </a:pPr>
+            <a:r>
+              <a:rPr lang="en-US" sz="1200" b="1" dirty="0">
+                <a:solidFill>
+                  <a:srgbClr val="1C2833"/>
+                </a:solidFill>
+                <a:latin typeface="Arial" pitchFamily="34" charset="0"/>
+                <a:ea typeface="Arial" pitchFamily="34" charset="-122"/>
+                <a:cs typeface="Arial" pitchFamily="34" charset="-120"/>
+              </a:rPr>
+              <a:t>once</a:t>
+            </a:r>
+            <a:pPr algn="l" indent="0" marL="0">
+              <a:lnSpc>
+                <a:spcPts val="1680"/>
+              </a:lnSpc>
+              <a:spcBef>
+                <a:spcPts val="300"/>
+              </a:spcBef>
+              <a:spcAft>
+                <a:spcPts val="300"/>
+              </a:spcAft>
+              <a:buNone/>
+            </a:pPr>
+            <a:r>
+              <a:rPr lang="en-US" sz="1200" dirty="0">
+                <a:solidFill>
+                  <a:srgbClr val="1C2833"/>
+                </a:solidFill>
+                <a:latin typeface="Arial" pitchFamily="34" charset="0"/>
+                <a:ea typeface="Arial" pitchFamily="34" charset="-122"/>
+                <a:cs typeface="Arial" pitchFamily="34" charset="-120"/>
+              </a:rPr>
+              <a:t> by their chosen method, then again by the other method. Time both. Mark which method was faster.</a:t>
+            </a:r>
+            <a:endParaRPr lang="en-US" sz="1200" dirty="0"/>
+          </a:p>
+        </p:txBody>
+      </p:sp>
+      <p:sp>
+        <p:nvSpPr>
+          <p:cNvPr id="8" name="Text 6"/>
+          <p:cNvSpPr/>
+          <p:nvPr/>
+        </p:nvSpPr>
+        <p:spPr>
+          <a:xfrm>
+            <a:off x="406301" y="4606230"/>
             <a:ext cx="8498026" cy="213271"/>
           </a:xfrm>
           <a:prstGeom prst="rect">

--- a/exports/pptx/lessons/middle-module-09-subtraction-nikhilam/day-09-speed-comparison.pptx
+++ b/exports/pptx/lessons/middle-module-09-subtraction-nikhilam/day-09-speed-comparison.pptx
@@ -18,9 +18,14 @@
     <p:sldId id="266" r:id="rId12"/>
     <p:sldId id="267" r:id="rId13"/>
     <p:sldId id="268" r:id="rId14"/>
+    <p:sldId id="269" r:id="rId15"/>
+    <p:sldId id="270" r:id="rId16"/>
+    <p:sldId id="271" r:id="rId17"/>
+    <p:sldId id="272" r:id="rId18"/>
+    <p:sldId id="273" r:id="rId19"/>
   </p:sldIdLst>
   <p:notesMasterIdLst>
-    <p:notesMasterId r:id="rId15"/>
+    <p:notesMasterId r:id="rId20"/>
   </p:notesMasterIdLst>
   <p:sldSz cx="9144000" cy="5143500"/>
   <p:notesSz cx="5143500" cy="9144000"/>
@@ -890,6 +895,446 @@
             <a:fld id="{F7021451-1387-4CA6-816F-3879F97B5CBC}" type="slidenum">
               <a:rPr lang="en-US"/>
               <a:t>13</a:t>
+            </a:fld>
+            <a:endParaRPr lang="en-US"/>
+          </a:p>
+        </p:txBody>
+      </p:sp>
+    </p:spTree>
+    <p:extLst>
+      <p:ext uri="{BB962C8B-B14F-4D97-AF65-F5344CB8AC3E}">
+        <p14:creationId xmlns:p14="http://schemas.microsoft.com/office/powerpoint/2010/main" val="1024086991"/>
+      </p:ext>
+    </p:extLst>
+  </p:cSld>
+  <p:clrMapOvr>
+    <a:masterClrMapping/>
+  </p:clrMapOvr>
+</p:notes>
+</file>
+
+<file path=ppt/notesSlides/notesSlide14.xml><?xml version="1.0" encoding="utf-8"?>
+<p:notes xmlns:a="http://schemas.openxmlformats.org/drawingml/2006/main" xmlns:r="http://schemas.openxmlformats.org/officeDocument/2006/relationships" xmlns:p="http://schemas.openxmlformats.org/presentationml/2006/main">
+  <p:cSld>
+    <p:spTree>
+      <p:nvGrpSpPr>
+        <p:cNvPr id="1" name=""/>
+        <p:cNvGrpSpPr/>
+        <p:nvPr/>
+      </p:nvGrpSpPr>
+      <p:grpSpPr>
+        <a:xfrm>
+          <a:off x="0" y="0"/>
+          <a:ext cx="0" cy="0"/>
+          <a:chOff x="0" y="0"/>
+          <a:chExt cx="0" cy="0"/>
+        </a:xfrm>
+      </p:grpSpPr>
+      <p:sp>
+        <p:nvSpPr>
+          <p:cNvPr id="2" name="Slide Image Placeholder 1"/>
+          <p:cNvSpPr>
+            <a:spLocks noGrp="1" noRot="1" noChangeAspect="1"/>
+          </p:cNvSpPr>
+          <p:nvPr>
+            <p:ph type="sldImg"/>
+          </p:nvPr>
+        </p:nvSpPr>
+        <p:spPr/>
+      </p:sp>
+      <p:sp>
+        <p:nvSpPr>
+          <p:cNvPr id="3" name="Notes Placeholder 2"/>
+          <p:cNvSpPr>
+            <a:spLocks noGrp="1"/>
+          </p:cNvSpPr>
+          <p:nvPr>
+            <p:ph type="body" idx="1"/>
+          </p:nvPr>
+        </p:nvSpPr>
+        <p:spPr/>
+        <p:txBody>
+          <a:bodyPr/>
+          <a:lstStyle/>
+          <a:p>
+            <a:r>
+              <a:rPr lang="en-US" dirty="0"/>
+              <a:t/>
+            </a:r>
+            <a:endParaRPr lang="en-US" dirty="0"/>
+          </a:p>
+        </p:txBody>
+      </p:sp>
+      <p:sp>
+        <p:nvSpPr>
+          <p:cNvPr id="4" name="Slide Number Placeholder 3"/>
+          <p:cNvSpPr>
+            <a:spLocks noGrp="1"/>
+          </p:cNvSpPr>
+          <p:nvPr>
+            <p:ph type="sldNum" sz="quarter" idx="10"/>
+          </p:nvPr>
+        </p:nvSpPr>
+        <p:spPr/>
+        <p:txBody>
+          <a:bodyPr/>
+          <a:lstStyle/>
+          <a:p>
+            <a:fld id="{F7021451-1387-4CA6-816F-3879F97B5CBC}" type="slidenum">
+              <a:rPr lang="en-US"/>
+              <a:t>14</a:t>
+            </a:fld>
+            <a:endParaRPr lang="en-US"/>
+          </a:p>
+        </p:txBody>
+      </p:sp>
+    </p:spTree>
+    <p:extLst>
+      <p:ext uri="{BB962C8B-B14F-4D97-AF65-F5344CB8AC3E}">
+        <p14:creationId xmlns:p14="http://schemas.microsoft.com/office/powerpoint/2010/main" val="1024086991"/>
+      </p:ext>
+    </p:extLst>
+  </p:cSld>
+  <p:clrMapOvr>
+    <a:masterClrMapping/>
+  </p:clrMapOvr>
+</p:notes>
+</file>
+
+<file path=ppt/notesSlides/notesSlide15.xml><?xml version="1.0" encoding="utf-8"?>
+<p:notes xmlns:a="http://schemas.openxmlformats.org/drawingml/2006/main" xmlns:r="http://schemas.openxmlformats.org/officeDocument/2006/relationships" xmlns:p="http://schemas.openxmlformats.org/presentationml/2006/main">
+  <p:cSld>
+    <p:spTree>
+      <p:nvGrpSpPr>
+        <p:cNvPr id="1" name=""/>
+        <p:cNvGrpSpPr/>
+        <p:nvPr/>
+      </p:nvGrpSpPr>
+      <p:grpSpPr>
+        <a:xfrm>
+          <a:off x="0" y="0"/>
+          <a:ext cx="0" cy="0"/>
+          <a:chOff x="0" y="0"/>
+          <a:chExt cx="0" cy="0"/>
+        </a:xfrm>
+      </p:grpSpPr>
+      <p:sp>
+        <p:nvSpPr>
+          <p:cNvPr id="2" name="Slide Image Placeholder 1"/>
+          <p:cNvSpPr>
+            <a:spLocks noGrp="1" noRot="1" noChangeAspect="1"/>
+          </p:cNvSpPr>
+          <p:nvPr>
+            <p:ph type="sldImg"/>
+          </p:nvPr>
+        </p:nvSpPr>
+        <p:spPr/>
+      </p:sp>
+      <p:sp>
+        <p:nvSpPr>
+          <p:cNvPr id="3" name="Notes Placeholder 2"/>
+          <p:cNvSpPr>
+            <a:spLocks noGrp="1"/>
+          </p:cNvSpPr>
+          <p:nvPr>
+            <p:ph type="body" idx="1"/>
+          </p:nvPr>
+        </p:nvSpPr>
+        <p:spPr/>
+        <p:txBody>
+          <a:bodyPr/>
+          <a:lstStyle/>
+          <a:p>
+            <a:r>
+              <a:rPr lang="en-US" dirty="0"/>
+              <a:t/>
+            </a:r>
+            <a:endParaRPr lang="en-US" dirty="0"/>
+          </a:p>
+        </p:txBody>
+      </p:sp>
+      <p:sp>
+        <p:nvSpPr>
+          <p:cNvPr id="4" name="Slide Number Placeholder 3"/>
+          <p:cNvSpPr>
+            <a:spLocks noGrp="1"/>
+          </p:cNvSpPr>
+          <p:nvPr>
+            <p:ph type="sldNum" sz="quarter" idx="10"/>
+          </p:nvPr>
+        </p:nvSpPr>
+        <p:spPr/>
+        <p:txBody>
+          <a:bodyPr/>
+          <a:lstStyle/>
+          <a:p>
+            <a:fld id="{F7021451-1387-4CA6-816F-3879F97B5CBC}" type="slidenum">
+              <a:rPr lang="en-US"/>
+              <a:t>15</a:t>
+            </a:fld>
+            <a:endParaRPr lang="en-US"/>
+          </a:p>
+        </p:txBody>
+      </p:sp>
+    </p:spTree>
+    <p:extLst>
+      <p:ext uri="{BB962C8B-B14F-4D97-AF65-F5344CB8AC3E}">
+        <p14:creationId xmlns:p14="http://schemas.microsoft.com/office/powerpoint/2010/main" val="1024086991"/>
+      </p:ext>
+    </p:extLst>
+  </p:cSld>
+  <p:clrMapOvr>
+    <a:masterClrMapping/>
+  </p:clrMapOvr>
+</p:notes>
+</file>
+
+<file path=ppt/notesSlides/notesSlide16.xml><?xml version="1.0" encoding="utf-8"?>
+<p:notes xmlns:a="http://schemas.openxmlformats.org/drawingml/2006/main" xmlns:r="http://schemas.openxmlformats.org/officeDocument/2006/relationships" xmlns:p="http://schemas.openxmlformats.org/presentationml/2006/main">
+  <p:cSld>
+    <p:spTree>
+      <p:nvGrpSpPr>
+        <p:cNvPr id="1" name=""/>
+        <p:cNvGrpSpPr/>
+        <p:nvPr/>
+      </p:nvGrpSpPr>
+      <p:grpSpPr>
+        <a:xfrm>
+          <a:off x="0" y="0"/>
+          <a:ext cx="0" cy="0"/>
+          <a:chOff x="0" y="0"/>
+          <a:chExt cx="0" cy="0"/>
+        </a:xfrm>
+      </p:grpSpPr>
+      <p:sp>
+        <p:nvSpPr>
+          <p:cNvPr id="2" name="Slide Image Placeholder 1"/>
+          <p:cNvSpPr>
+            <a:spLocks noGrp="1" noRot="1" noChangeAspect="1"/>
+          </p:cNvSpPr>
+          <p:nvPr>
+            <p:ph type="sldImg"/>
+          </p:nvPr>
+        </p:nvSpPr>
+        <p:spPr/>
+      </p:sp>
+      <p:sp>
+        <p:nvSpPr>
+          <p:cNvPr id="3" name="Notes Placeholder 2"/>
+          <p:cNvSpPr>
+            <a:spLocks noGrp="1"/>
+          </p:cNvSpPr>
+          <p:nvPr>
+            <p:ph type="body" idx="1"/>
+          </p:nvPr>
+        </p:nvSpPr>
+        <p:spPr/>
+        <p:txBody>
+          <a:bodyPr/>
+          <a:lstStyle/>
+          <a:p>
+            <a:r>
+              <a:rPr lang="en-US" dirty="0"/>
+              <a:t/>
+            </a:r>
+            <a:endParaRPr lang="en-US" dirty="0"/>
+          </a:p>
+        </p:txBody>
+      </p:sp>
+      <p:sp>
+        <p:nvSpPr>
+          <p:cNvPr id="4" name="Slide Number Placeholder 3"/>
+          <p:cNvSpPr>
+            <a:spLocks noGrp="1"/>
+          </p:cNvSpPr>
+          <p:nvPr>
+            <p:ph type="sldNum" sz="quarter" idx="10"/>
+          </p:nvPr>
+        </p:nvSpPr>
+        <p:spPr/>
+        <p:txBody>
+          <a:bodyPr/>
+          <a:lstStyle/>
+          <a:p>
+            <a:fld id="{F7021451-1387-4CA6-816F-3879F97B5CBC}" type="slidenum">
+              <a:rPr lang="en-US"/>
+              <a:t>16</a:t>
+            </a:fld>
+            <a:endParaRPr lang="en-US"/>
+          </a:p>
+        </p:txBody>
+      </p:sp>
+    </p:spTree>
+    <p:extLst>
+      <p:ext uri="{BB962C8B-B14F-4D97-AF65-F5344CB8AC3E}">
+        <p14:creationId xmlns:p14="http://schemas.microsoft.com/office/powerpoint/2010/main" val="1024086991"/>
+      </p:ext>
+    </p:extLst>
+  </p:cSld>
+  <p:clrMapOvr>
+    <a:masterClrMapping/>
+  </p:clrMapOvr>
+</p:notes>
+</file>
+
+<file path=ppt/notesSlides/notesSlide17.xml><?xml version="1.0" encoding="utf-8"?>
+<p:notes xmlns:a="http://schemas.openxmlformats.org/drawingml/2006/main" xmlns:r="http://schemas.openxmlformats.org/officeDocument/2006/relationships" xmlns:p="http://schemas.openxmlformats.org/presentationml/2006/main">
+  <p:cSld>
+    <p:spTree>
+      <p:nvGrpSpPr>
+        <p:cNvPr id="1" name=""/>
+        <p:cNvGrpSpPr/>
+        <p:nvPr/>
+      </p:nvGrpSpPr>
+      <p:grpSpPr>
+        <a:xfrm>
+          <a:off x="0" y="0"/>
+          <a:ext cx="0" cy="0"/>
+          <a:chOff x="0" y="0"/>
+          <a:chExt cx="0" cy="0"/>
+        </a:xfrm>
+      </p:grpSpPr>
+      <p:sp>
+        <p:nvSpPr>
+          <p:cNvPr id="2" name="Slide Image Placeholder 1"/>
+          <p:cNvSpPr>
+            <a:spLocks noGrp="1" noRot="1" noChangeAspect="1"/>
+          </p:cNvSpPr>
+          <p:nvPr>
+            <p:ph type="sldImg"/>
+          </p:nvPr>
+        </p:nvSpPr>
+        <p:spPr/>
+      </p:sp>
+      <p:sp>
+        <p:nvSpPr>
+          <p:cNvPr id="3" name="Notes Placeholder 2"/>
+          <p:cNvSpPr>
+            <a:spLocks noGrp="1"/>
+          </p:cNvSpPr>
+          <p:nvPr>
+            <p:ph type="body" idx="1"/>
+          </p:nvPr>
+        </p:nvSpPr>
+        <p:spPr/>
+        <p:txBody>
+          <a:bodyPr/>
+          <a:lstStyle/>
+          <a:p>
+            <a:r>
+              <a:rPr lang="en-US" dirty="0"/>
+              <a:t/>
+            </a:r>
+            <a:endParaRPr lang="en-US" dirty="0"/>
+          </a:p>
+        </p:txBody>
+      </p:sp>
+      <p:sp>
+        <p:nvSpPr>
+          <p:cNvPr id="4" name="Slide Number Placeholder 3"/>
+          <p:cNvSpPr>
+            <a:spLocks noGrp="1"/>
+          </p:cNvSpPr>
+          <p:nvPr>
+            <p:ph type="sldNum" sz="quarter" idx="10"/>
+          </p:nvPr>
+        </p:nvSpPr>
+        <p:spPr/>
+        <p:txBody>
+          <a:bodyPr/>
+          <a:lstStyle/>
+          <a:p>
+            <a:fld id="{F7021451-1387-4CA6-816F-3879F97B5CBC}" type="slidenum">
+              <a:rPr lang="en-US"/>
+              <a:t>17</a:t>
+            </a:fld>
+            <a:endParaRPr lang="en-US"/>
+          </a:p>
+        </p:txBody>
+      </p:sp>
+    </p:spTree>
+    <p:extLst>
+      <p:ext uri="{BB962C8B-B14F-4D97-AF65-F5344CB8AC3E}">
+        <p14:creationId xmlns:p14="http://schemas.microsoft.com/office/powerpoint/2010/main" val="1024086991"/>
+      </p:ext>
+    </p:extLst>
+  </p:cSld>
+  <p:clrMapOvr>
+    <a:masterClrMapping/>
+  </p:clrMapOvr>
+</p:notes>
+</file>
+
+<file path=ppt/notesSlides/notesSlide18.xml><?xml version="1.0" encoding="utf-8"?>
+<p:notes xmlns:a="http://schemas.openxmlformats.org/drawingml/2006/main" xmlns:r="http://schemas.openxmlformats.org/officeDocument/2006/relationships" xmlns:p="http://schemas.openxmlformats.org/presentationml/2006/main">
+  <p:cSld>
+    <p:spTree>
+      <p:nvGrpSpPr>
+        <p:cNvPr id="1" name=""/>
+        <p:cNvGrpSpPr/>
+        <p:nvPr/>
+      </p:nvGrpSpPr>
+      <p:grpSpPr>
+        <a:xfrm>
+          <a:off x="0" y="0"/>
+          <a:ext cx="0" cy="0"/>
+          <a:chOff x="0" y="0"/>
+          <a:chExt cx="0" cy="0"/>
+        </a:xfrm>
+      </p:grpSpPr>
+      <p:sp>
+        <p:nvSpPr>
+          <p:cNvPr id="2" name="Slide Image Placeholder 1"/>
+          <p:cNvSpPr>
+            <a:spLocks noGrp="1" noRot="1" noChangeAspect="1"/>
+          </p:cNvSpPr>
+          <p:nvPr>
+            <p:ph type="sldImg"/>
+          </p:nvPr>
+        </p:nvSpPr>
+        <p:spPr/>
+      </p:sp>
+      <p:sp>
+        <p:nvSpPr>
+          <p:cNvPr id="3" name="Notes Placeholder 2"/>
+          <p:cNvSpPr>
+            <a:spLocks noGrp="1"/>
+          </p:cNvSpPr>
+          <p:nvPr>
+            <p:ph type="body" idx="1"/>
+          </p:nvPr>
+        </p:nvSpPr>
+        <p:spPr/>
+        <p:txBody>
+          <a:bodyPr/>
+          <a:lstStyle/>
+          <a:p>
+            <a:r>
+              <a:rPr lang="en-US" dirty="0"/>
+              <a:t/>
+            </a:r>
+            <a:endParaRPr lang="en-US" dirty="0"/>
+          </a:p>
+        </p:txBody>
+      </p:sp>
+      <p:sp>
+        <p:nvSpPr>
+          <p:cNvPr id="4" name="Slide Number Placeholder 3"/>
+          <p:cNvSpPr>
+            <a:spLocks noGrp="1"/>
+          </p:cNvSpPr>
+          <p:nvPr>
+            <p:ph type="sldNum" sz="quarter" idx="10"/>
+          </p:nvPr>
+        </p:nvSpPr>
+        <p:spPr/>
+        <p:txBody>
+          <a:bodyPr/>
+          <a:lstStyle/>
+          <a:p>
+            <a:fld id="{F7021451-1387-4CA6-816F-3879F97B5CBC}" type="slidenum">
+              <a:rPr lang="en-US"/>
+              <a:t>18</a:t>
             </a:fld>
             <a:endParaRPr lang="en-US"/>
           </a:p>
@@ -2189,102 +2634,6 @@
         </p:nvSpPr>
         <p:spPr>
           <a:xfrm>
-            <a:off x="406301" y="1223963"/>
-            <a:ext cx="8498026" cy="274290"/>
-          </a:xfrm>
-          <a:prstGeom prst="rect">
-            <a:avLst/>
-          </a:prstGeom>
-          <a:noFill/>
-          <a:ln/>
-        </p:spPr>
-        <p:txBody>
-          <a:bodyPr wrap="square" lIns="0" tIns="0" rIns="0" bIns="0" rtlCol="0" anchor="t"/>
-          <a:lstStyle/>
-          <a:p>
-            <a:pPr algn="l" indent="0" marL="0">
-              <a:lnSpc>
-                <a:spcPts val="2160"/>
-              </a:lnSpc>
-              <a:spcBef>
-                <a:spcPts val="600"/>
-              </a:spcBef>
-              <a:spcAft>
-                <a:spcPts val="800"/>
-              </a:spcAft>
-              <a:buNone/>
-            </a:pPr>
-            <a:r>
-              <a:rPr lang="en-US" sz="1800" b="1" dirty="0">
-                <a:solidFill>
-                  <a:srgbClr val="FE4447"/>
-                </a:solidFill>
-                <a:latin typeface="Georgia" pitchFamily="34" charset="0"/>
-                <a:ea typeface="Georgia" pitchFamily="34" charset="-122"/>
-                <a:cs typeface="Georgia" pitchFamily="34" charset="-120"/>
-              </a:rPr>
-              <a:t>Learning objective</a:t>
-            </a:r>
-            <a:endParaRPr lang="en-US" sz="1800" dirty="0"/>
-          </a:p>
-        </p:txBody>
-      </p:sp>
-      <p:sp>
-        <p:nvSpPr>
-          <p:cNvPr id="6" name="Text 4"/>
-          <p:cNvSpPr/>
-          <p:nvPr/>
-        </p:nvSpPr>
-        <p:spPr>
-          <a:xfrm>
-            <a:off x="406301" y="1637854"/>
-            <a:ext cx="8498026" cy="639812"/>
-          </a:xfrm>
-          <a:prstGeom prst="rect">
-            <a:avLst/>
-          </a:prstGeom>
-          <a:noFill/>
-          <a:ln/>
-        </p:spPr>
-        <p:txBody>
-          <a:bodyPr wrap="square" lIns="0" tIns="0" rIns="0" bIns="0" rtlCol="0" anchor="t"/>
-          <a:lstStyle/>
-          <a:p>
-            <a:pPr algn="l" indent="0" marL="0">
-              <a:lnSpc>
-                <a:spcPts val="1680"/>
-              </a:lnSpc>
-              <a:spcBef>
-                <a:spcPts val="300"/>
-              </a:spcBef>
-              <a:spcAft>
-                <a:spcPts val="300"/>
-              </a:spcAft>
-              <a:buNone/>
-            </a:pPr>
-            <a:r>
-              <a:rPr lang="en-US" sz="1200" dirty="0">
-                <a:solidFill>
-                  <a:srgbClr val="1C2833"/>
-                </a:solidFill>
-                <a:latin typeface="Arial" pitchFamily="34" charset="0"/>
-                <a:ea typeface="Arial" pitchFamily="34" charset="-122"/>
-                <a:cs typeface="Arial" pitchFamily="34" charset="-120"/>
-              </a:rPr>
-              <a:t>By the end of this lesson, students will solve a mixed set of subtraction problems using both standard borrowing and Nikhilam, will compare the two methods on each problem, and will articulate a personal heuristic for when to pick which method.</a:t>
-            </a:r>
-            <a:endParaRPr lang="en-US" sz="1200" dirty="0"/>
-          </a:p>
-        </p:txBody>
-      </p:sp>
-      <p:sp>
-        <p:nvSpPr>
-          <p:cNvPr id="7" name="Text 5"/>
-          <p:cNvSpPr/>
-          <p:nvPr/>
-        </p:nvSpPr>
-        <p:spPr>
-          <a:xfrm>
             <a:off x="406301" y="4434929"/>
             <a:ext cx="8498026" cy="213271"/>
           </a:xfrm>
@@ -2429,7 +2778,7 @@
                 <a:ea typeface="Georgia" pitchFamily="34" charset="-122"/>
                 <a:cs typeface="Georgia" pitchFamily="34" charset="-120"/>
               </a:rPr>
-              <a:t>Homework</a:t>
+              <a:t>Discussion (10 min) — When does each win? (cont.)</a:t>
             </a:r>
             <a:endParaRPr lang="en-US" sz="1800" dirty="0"/>
           </a:p>
@@ -2443,8 +2792,8 @@
         </p:nvSpPr>
         <p:spPr>
           <a:xfrm>
-            <a:off x="406301" y="870942"/>
-            <a:ext cx="8498026" cy="426541"/>
+            <a:off x="634901" y="883593"/>
+            <a:ext cx="8102798" cy="769441"/>
           </a:xfrm>
           <a:prstGeom prst="rect">
             <a:avLst/>
@@ -2456,6 +2805,160 @@
           <a:bodyPr wrap="square" lIns="0" tIns="0" rIns="0" bIns="0" rtlCol="0" anchor="t"/>
           <a:lstStyle/>
           <a:p>
+            <a:pPr algn="l" marL="342900" indent="-342900">
+              <a:lnSpc>
+                <a:spcPts val="1620"/>
+              </a:lnSpc>
+              <a:spcAft>
+                <a:spcPts val="300"/>
+              </a:spcAft>
+              <a:buSzPct val="100000"/>
+              <a:buChar char="•"/>
+            </a:pPr>
+            <a:r>
+              <a:rPr lang="en-US" sz="1200" b="1" dirty="0">
+                <a:solidFill>
+                  <a:srgbClr val="1C2833"/>
+                </a:solidFill>
+                <a:latin typeface="Arial" pitchFamily="34" charset="0"/>
+                <a:ea typeface="Arial" pitchFamily="34" charset="-122"/>
+                <a:cs typeface="Arial" pitchFamily="34" charset="-120"/>
+              </a:rPr>
+              <a:t>Nikhilam wins</a:t>
+            </a:r>
+            <a:pPr algn="l" indent="0" marL="0">
+              <a:lnSpc>
+                <a:spcPts val="1620"/>
+              </a:lnSpc>
+              <a:spcAft>
+                <a:spcPts val="300"/>
+              </a:spcAft>
+              <a:buNone/>
+            </a:pPr>
+            <a:r>
+              <a:rPr lang="en-US" sz="1200" dirty="0">
+                <a:solidFill>
+                  <a:srgbClr val="1C2833"/>
+                </a:solidFill>
+                <a:latin typeface="Arial" pitchFamily="34" charset="0"/>
+                <a:ea typeface="Arial" pitchFamily="34" charset="-122"/>
+                <a:cs typeface="Arial" pitchFamily="34" charset="-120"/>
+              </a:rPr>
+              <a:t> when the minuend is a clean power of ten OR the subtrahend is close to a clean power of ten.</a:t>
+            </a:r>
+            <a:endParaRPr lang="en-US" sz="1200" dirty="0"/>
+          </a:p>
+          <a:p>
+            <a:pPr algn="l" marL="342900" indent="-342900">
+              <a:lnSpc>
+                <a:spcPts val="1620"/>
+              </a:lnSpc>
+              <a:spcAft>
+                <a:spcPts val="300"/>
+              </a:spcAft>
+              <a:buSzPct val="100000"/>
+              <a:buChar char="•"/>
+            </a:pPr>
+            <a:r>
+              <a:rPr lang="en-US" sz="1200" b="1" dirty="0">
+                <a:solidFill>
+                  <a:srgbClr val="1C2833"/>
+                </a:solidFill>
+                <a:latin typeface="Arial" pitchFamily="34" charset="0"/>
+                <a:ea typeface="Arial" pitchFamily="34" charset="-122"/>
+                <a:cs typeface="Arial" pitchFamily="34" charset="-120"/>
+              </a:rPr>
+              <a:t>Standard wins</a:t>
+            </a:r>
+            <a:pPr algn="l" indent="0" marL="0">
+              <a:lnSpc>
+                <a:spcPts val="1620"/>
+              </a:lnSpc>
+              <a:spcAft>
+                <a:spcPts val="300"/>
+              </a:spcAft>
+              <a:buNone/>
+            </a:pPr>
+            <a:r>
+              <a:rPr lang="en-US" sz="1200" dirty="0">
+                <a:solidFill>
+                  <a:srgbClr val="1C2833"/>
+                </a:solidFill>
+                <a:latin typeface="Arial" pitchFamily="34" charset="0"/>
+                <a:ea typeface="Arial" pitchFamily="34" charset="-122"/>
+                <a:cs typeface="Arial" pitchFamily="34" charset="-120"/>
+              </a:rPr>
+              <a:t> when both numbers are mid-range and the subtraction requires only one or two borrows.</a:t>
+            </a:r>
+            <a:endParaRPr lang="en-US" sz="1200" dirty="0"/>
+          </a:p>
+          <a:p>
+            <a:pPr algn="l" marL="342900" indent="-342900">
+              <a:lnSpc>
+                <a:spcPts val="1620"/>
+              </a:lnSpc>
+              <a:spcAft>
+                <a:spcPts val="300"/>
+              </a:spcAft>
+              <a:buSzPct val="100000"/>
+              <a:buChar char="•"/>
+            </a:pPr>
+            <a:r>
+              <a:rPr lang="en-US" sz="1200" b="1" dirty="0">
+                <a:solidFill>
+                  <a:srgbClr val="1C2833"/>
+                </a:solidFill>
+                <a:latin typeface="Arial" pitchFamily="34" charset="0"/>
+                <a:ea typeface="Arial" pitchFamily="34" charset="-122"/>
+                <a:cs typeface="Arial" pitchFamily="34" charset="-120"/>
+              </a:rPr>
+              <a:t>Tie</a:t>
+            </a:r>
+            <a:pPr algn="l" indent="0" marL="0">
+              <a:lnSpc>
+                <a:spcPts val="1620"/>
+              </a:lnSpc>
+              <a:spcAft>
+                <a:spcPts val="300"/>
+              </a:spcAft>
+              <a:buNone/>
+            </a:pPr>
+            <a:r>
+              <a:rPr lang="en-US" sz="1200" dirty="0">
+                <a:solidFill>
+                  <a:srgbClr val="1C2833"/>
+                </a:solidFill>
+                <a:latin typeface="Arial" pitchFamily="34" charset="0"/>
+                <a:ea typeface="Arial" pitchFamily="34" charset="-122"/>
+                <a:cs typeface="Arial" pitchFamily="34" charset="-120"/>
+              </a:rPr>
+              <a:t> when the numbers are small.</a:t>
+            </a:r>
+            <a:endParaRPr lang="en-US" sz="1200" dirty="0"/>
+          </a:p>
+        </p:txBody>
+      </p:sp>
+      <p:sp>
+        <p:nvSpPr>
+          <p:cNvPr id="5" name="Text 3"/>
+          <p:cNvSpPr/>
+          <p:nvPr/>
+        </p:nvSpPr>
+        <p:spPr>
+          <a:xfrm>
+            <a:off x="406301" y="1741884"/>
+            <a:ext cx="8498026" cy="213271"/>
+          </a:xfrm>
+          <a:prstGeom prst="rect">
+            <a:avLst/>
+          </a:prstGeom>
+          <a:noFill/>
+          <a:ln/>
+        </p:spPr>
+        <p:txBody>
+          <a:bodyPr wrap="square" lIns="0" tIns="0" rIns="0" bIns="0" rtlCol="0" anchor="t"/>
+          <a:lstStyle/>
+          <a:p>
             <a:pPr algn="l" indent="0" marL="0">
               <a:lnSpc>
                 <a:spcPts val="1680"/>
@@ -2477,7 +2980,7 @@
                 <a:ea typeface="Arial" pitchFamily="34" charset="-122"/>
                 <a:cs typeface="Arial" pitchFamily="34" charset="-120"/>
               </a:rPr>
-              <a:t>– Final project touches. – 5 minutes of sūtra recitation practice — say it 5 times before bed. – Bring all project materials tomorrow.</a:t>
+              <a:t>Write the heuristic on the board. Encourage students to copy it into their workbook.</a:t>
             </a:r>
             <a:endParaRPr lang="en-US" sz="1200" dirty="0"/>
           </a:p>
@@ -2485,7 +2988,7 @@
       </p:sp>
       <p:sp>
         <p:nvSpPr>
-          <p:cNvPr id="5" name="Text 3"/>
+          <p:cNvPr id="6" name="Text 4"/>
           <p:cNvSpPr/>
           <p:nvPr/>
         </p:nvSpPr>
@@ -2635,7 +3138,7 @@
                 <a:ea typeface="Georgia" pitchFamily="34" charset="-122"/>
                 <a:cs typeface="Georgia" pitchFamily="34" charset="-120"/>
               </a:rPr>
-              <a:t>Differentiation</a:t>
+              <a:t>Discussion (10 min) — When does each win? (cont.)</a:t>
             </a:r>
             <a:endParaRPr lang="en-US" sz="1800" dirty="0"/>
           </a:p>
@@ -2649,8 +3152,8 @@
         </p:nvSpPr>
         <p:spPr>
           <a:xfrm>
-            <a:off x="634901" y="883593"/>
-            <a:ext cx="8102798" cy="731341"/>
+            <a:off x="406301" y="870942"/>
+            <a:ext cx="8498026" cy="426541"/>
           </a:xfrm>
           <a:prstGeom prst="rect">
             <a:avLst/>
@@ -2662,31 +3165,13 @@
           <a:bodyPr wrap="square" lIns="0" tIns="0" rIns="0" bIns="0" rtlCol="0" anchor="t"/>
           <a:lstStyle/>
           <a:p>
-            <a:pPr algn="l" marL="342900" indent="-342900">
-              <a:lnSpc>
-                <a:spcPts val="1620"/>
-              </a:lnSpc>
-              <a:spcAft>
-                <a:spcPts val="300"/>
-              </a:spcAft>
-              <a:buSzPct val="100000"/>
-              <a:buChar char="•"/>
-            </a:pPr>
-            <a:r>
-              <a:rPr lang="en-US" sz="1200" b="1" dirty="0">
-                <a:solidFill>
-                  <a:srgbClr val="1C2833"/>
-                </a:solidFill>
-                <a:latin typeface="Arial" pitchFamily="34" charset="0"/>
-                <a:ea typeface="Arial" pitchFamily="34" charset="-122"/>
-                <a:cs typeface="Arial" pitchFamily="34" charset="-120"/>
-              </a:rPr>
-              <a:t>Tier up:</a:t>
-            </a:r>
-            <a:pPr algn="l" indent="0" marL="0">
-              <a:lnSpc>
-                <a:spcPts val="1620"/>
-              </a:lnSpc>
+            <a:pPr algn="l" indent="0" marL="0">
+              <a:lnSpc>
+                <a:spcPts val="1680"/>
+              </a:lnSpc>
+              <a:spcBef>
+                <a:spcPts val="300"/>
+              </a:spcBef>
               <a:spcAft>
                 <a:spcPts val="300"/>
               </a:spcAft>
@@ -2701,51 +3186,30 @@
                 <a:ea typeface="Arial" pitchFamily="34" charset="-122"/>
                 <a:cs typeface="Arial" pitchFamily="34" charset="-120"/>
               </a:rPr>
-              <a:t> Mental challenge — do 10 mixed problems in your head with no paper. Time goal: under 3 minutes.</a:t>
-            </a:r>
-            <a:endParaRPr lang="en-US" sz="1200" dirty="0"/>
-          </a:p>
-          <a:p>
-            <a:pPr algn="l" marL="342900" indent="-342900">
-              <a:lnSpc>
-                <a:spcPts val="1620"/>
-              </a:lnSpc>
-              <a:spcAft>
-                <a:spcPts val="300"/>
-              </a:spcAft>
-              <a:buSzPct val="100000"/>
-              <a:buChar char="•"/>
-            </a:pPr>
-            <a:r>
-              <a:rPr lang="en-US" sz="1200" b="1" dirty="0">
-                <a:solidFill>
-                  <a:srgbClr val="1C2833"/>
-                </a:solidFill>
-                <a:latin typeface="Arial" pitchFamily="34" charset="0"/>
-                <a:ea typeface="Arial" pitchFamily="34" charset="-122"/>
-                <a:cs typeface="Arial" pitchFamily="34" charset="-120"/>
-              </a:rPr>
-              <a:t>Tier down:</a:t>
-            </a:r>
-            <a:pPr algn="l" indent="0" marL="0">
-              <a:lnSpc>
-                <a:spcPts val="1620"/>
-              </a:lnSpc>
-              <a:spcAft>
-                <a:spcPts val="300"/>
-              </a:spcAft>
-              <a:buNone/>
-            </a:pPr>
-            <a:r>
-              <a:rPr lang="en-US" sz="1200" dirty="0">
-                <a:solidFill>
-                  <a:srgbClr val="1C2833"/>
-                </a:solidFill>
-                <a:latin typeface="Arial" pitchFamily="34" charset="0"/>
-                <a:ea typeface="Arial" pitchFamily="34" charset="-122"/>
-                <a:cs typeface="Arial" pitchFamily="34" charset="-120"/>
-              </a:rPr>
-              <a:t> Worksheet only. Don't worry about choosing methods — solve each by Nikhilam where you can, standard otherwise.</a:t>
+              <a:t>Honest note: </a:t>
+            </a:r>
+            <a:pPr algn="l" indent="0" marL="0">
+              <a:lnSpc>
+                <a:spcPts val="1680"/>
+              </a:lnSpc>
+              <a:spcBef>
+                <a:spcPts val="300"/>
+              </a:spcBef>
+              <a:spcAft>
+                <a:spcPts val="300"/>
+              </a:spcAft>
+              <a:buNone/>
+            </a:pPr>
+            <a:r>
+              <a:rPr lang="en-US" sz="1200" i="1" dirty="0">
+                <a:solidFill>
+                  <a:srgbClr val="1C2833"/>
+                </a:solidFill>
+                <a:latin typeface="Arial" pitchFamily="34" charset="0"/>
+                <a:ea typeface="Arial" pitchFamily="34" charset="-122"/>
+                <a:cs typeface="Arial" pitchFamily="34" charset="-120"/>
+              </a:rPr>
+              <a:t>"This is a real piece of mathematical maturity — knowing when to use which tool. Speed comes from knowing the choice, not from forcing one method everywhere."</a:t>
             </a:r>
             <a:endParaRPr lang="en-US" sz="1200" dirty="0"/>
           </a:p>
@@ -2903,7 +3367,7 @@
                 <a:ea typeface="Georgia" pitchFamily="34" charset="-122"/>
                 <a:cs typeface="Georgia" pitchFamily="34" charset="-120"/>
               </a:rPr>
-              <a:t>Teacher notes</a:t>
+              <a:t>Project work (12 min)</a:t>
             </a:r>
             <a:endParaRPr lang="en-US" sz="1800" dirty="0"/>
           </a:p>
@@ -2917,8 +3381,8 @@
         </p:nvSpPr>
         <p:spPr>
           <a:xfrm>
-            <a:off x="406301" y="870942"/>
-            <a:ext cx="8498026" cy="853083"/>
+            <a:off x="634901" y="883593"/>
+            <a:ext cx="8102798" cy="525661"/>
           </a:xfrm>
           <a:prstGeom prst="rect">
             <a:avLst/>
@@ -2930,17 +3394,15 @@
           <a:bodyPr wrap="square" lIns="0" tIns="0" rIns="0" bIns="0" rtlCol="0" anchor="t"/>
           <a:lstStyle/>
           <a:p>
-            <a:pPr algn="l" indent="0" marL="0">
-              <a:lnSpc>
-                <a:spcPts val="1680"/>
-              </a:lnSpc>
-              <a:spcBef>
-                <a:spcPts val="300"/>
-              </a:spcBef>
-              <a:spcAft>
-                <a:spcPts val="300"/>
-              </a:spcAft>
-              <a:buNone/>
+            <a:pPr algn="l" marL="342900" indent="-342900">
+              <a:lnSpc>
+                <a:spcPts val="1620"/>
+              </a:lnSpc>
+              <a:spcAft>
+                <a:spcPts val="300"/>
+              </a:spcAft>
+              <a:buSzPct val="100000"/>
+              <a:buChar char="•"/>
             </a:pPr>
             <a:r>
               <a:rPr lang="en-US" sz="1200" dirty="0">
@@ -2951,42 +3413,20 @@
                 <a:ea typeface="Arial" pitchFamily="34" charset="-122"/>
                 <a:cs typeface="Arial" pitchFamily="34" charset="-120"/>
               </a:rPr>
-              <a:t>– The honest framing of "both methods are tools" matters. Avoid letting students walk away thinking "Nikhilam is always faster." It isn't. It's faster for </a:t>
-            </a:r>
-            <a:pPr algn="l" indent="0" marL="0">
-              <a:lnSpc>
-                <a:spcPts val="1680"/>
-              </a:lnSpc>
-              <a:spcBef>
-                <a:spcPts val="300"/>
-              </a:spcBef>
-              <a:spcAft>
-                <a:spcPts val="300"/>
-              </a:spcAft>
-              <a:buNone/>
-            </a:pPr>
-            <a:r>
-              <a:rPr lang="en-US" sz="1200" i="1" dirty="0">
-                <a:solidFill>
-                  <a:srgbClr val="1C2833"/>
-                </a:solidFill>
-                <a:latin typeface="Arial" pitchFamily="34" charset="0"/>
-                <a:ea typeface="Arial" pitchFamily="34" charset="-122"/>
-                <a:cs typeface="Arial" pitchFamily="34" charset="-120"/>
-              </a:rPr>
-              <a:t>certain shapes</a:t>
-            </a:r>
-            <a:pPr algn="l" indent="0" marL="0">
-              <a:lnSpc>
-                <a:spcPts val="1680"/>
-              </a:lnSpc>
-              <a:spcBef>
-                <a:spcPts val="300"/>
-              </a:spcBef>
-              <a:spcAft>
-                <a:spcPts val="300"/>
-              </a:spcAft>
-              <a:buNone/>
+              <a:t>Last in-class time before the showcase. Pairs work on their project artefact.</a:t>
+            </a:r>
+            <a:endParaRPr lang="en-US" sz="1200" dirty="0"/>
+          </a:p>
+          <a:p>
+            <a:pPr algn="l" marL="342900" indent="-342900">
+              <a:lnSpc>
+                <a:spcPts val="1620"/>
+              </a:lnSpc>
+              <a:spcAft>
+                <a:spcPts val="300"/>
+              </a:spcAft>
+              <a:buSzPct val="100000"/>
+              <a:buChar char="•"/>
             </a:pPr>
             <a:r>
               <a:rPr lang="en-US" sz="1200" dirty="0">
@@ -2997,7 +3437,7 @@
                 <a:ea typeface="Arial" pitchFamily="34" charset="-122"/>
                 <a:cs typeface="Arial" pitchFamily="34" charset="-120"/>
               </a:rPr>
-              <a:t> of problem. – Some students will discover the heuristic naturally. Highlight their wording — let them name the rule. – Project check is critical today. If any pair is behind, give them homework instructions explicitly.</a:t>
+              <a:t>Teacher circulates. Check: does each project have at least one Nikhilam-method example? Does each cite a source?</a:t>
             </a:r>
             <a:endParaRPr lang="en-US" sz="1200" dirty="0"/>
           </a:p>
@@ -3155,7 +3595,7 @@
                 <a:ea typeface="Georgia" pitchFamily="34" charset="-122"/>
                 <a:cs typeface="Georgia" pitchFamily="34" charset="-120"/>
               </a:rPr>
-              <a:t>Citation(s) used in this lesson</a:t>
+              <a:t>Wrap-up (3 min)</a:t>
             </a:r>
             <a:endParaRPr lang="en-US" sz="1800" dirty="0"/>
           </a:p>
@@ -3169,8 +3609,8 @@
         </p:nvSpPr>
         <p:spPr>
           <a:xfrm>
-            <a:off x="406301" y="870942"/>
-            <a:ext cx="8498026" cy="213271"/>
+            <a:off x="634901" y="883593"/>
+            <a:ext cx="8102798" cy="525661"/>
           </a:xfrm>
           <a:prstGeom prst="rect">
             <a:avLst/>
@@ -3182,6 +3622,76 @@
           <a:bodyPr wrap="square" lIns="0" tIns="0" rIns="0" bIns="0" rtlCol="0" anchor="t"/>
           <a:lstStyle/>
           <a:p>
+            <a:pPr algn="l" marL="342900" indent="-342900">
+              <a:lnSpc>
+                <a:spcPts val="1620"/>
+              </a:lnSpc>
+              <a:spcAft>
+                <a:spcPts val="300"/>
+              </a:spcAft>
+              <a:buSzPct val="100000"/>
+              <a:buChar char="•"/>
+            </a:pPr>
+            <a:r>
+              <a:rPr lang="en-US" sz="1200" dirty="0">
+                <a:solidFill>
+                  <a:srgbClr val="1C2833"/>
+                </a:solidFill>
+                <a:latin typeface="Arial" pitchFamily="34" charset="0"/>
+                <a:ea typeface="Arial" pitchFamily="34" charset="-122"/>
+                <a:cs typeface="Arial" pitchFamily="34" charset="-120"/>
+              </a:rPr>
+              <a:t>Tomorrow's plan: 20-min summative quiz, then 3-min project presentations.</a:t>
+            </a:r>
+            <a:endParaRPr lang="en-US" sz="1200" dirty="0"/>
+          </a:p>
+          <a:p>
+            <a:pPr algn="l" marL="342900" indent="-342900">
+              <a:lnSpc>
+                <a:spcPts val="1620"/>
+              </a:lnSpc>
+              <a:spcAft>
+                <a:spcPts val="300"/>
+              </a:spcAft>
+              <a:buSzPct val="100000"/>
+              <a:buChar char="•"/>
+            </a:pPr>
+            <a:r>
+              <a:rPr lang="en-US" sz="1200" dirty="0">
+                <a:solidFill>
+                  <a:srgbClr val="1C2833"/>
+                </a:solidFill>
+                <a:latin typeface="Arial" pitchFamily="34" charset="0"/>
+                <a:ea typeface="Arial" pitchFamily="34" charset="-122"/>
+                <a:cs typeface="Arial" pitchFamily="34" charset="-120"/>
+              </a:rPr>
+              <a:t>Sūtra chant — final practice for tomorrow's recitation.</a:t>
+            </a:r>
+            <a:endParaRPr lang="en-US" sz="1200" dirty="0"/>
+          </a:p>
+        </p:txBody>
+      </p:sp>
+      <p:sp>
+        <p:nvSpPr>
+          <p:cNvPr id="5" name="Text 3"/>
+          <p:cNvSpPr/>
+          <p:nvPr/>
+        </p:nvSpPr>
+        <p:spPr>
+          <a:xfrm>
+            <a:off x="406301" y="4434929"/>
+            <a:ext cx="8498026" cy="213271"/>
+          </a:xfrm>
+          <a:prstGeom prst="rect">
+            <a:avLst/>
+          </a:prstGeom>
+          <a:noFill/>
+          <a:ln/>
+        </p:spPr>
+        <p:txBody>
+          <a:bodyPr wrap="square" lIns="0" tIns="0" rIns="0" bIns="0" rtlCol="0" anchor="t"/>
+          <a:lstStyle/>
+          <a:p>
             <a:pPr algn="l" indent="0" marL="0">
               <a:lnSpc>
                 <a:spcPts val="1680"/>
@@ -3203,8 +3713,524 @@
                 <a:ea typeface="Arial" pitchFamily="34" charset="-122"/>
                 <a:cs typeface="Arial" pitchFamily="34" charset="-120"/>
               </a:rPr>
-              <a:t>– Tirthaji, </a:t>
-            </a:r>
+              <a:t>Middle ·  · IKS Curriculum</a:t>
+            </a:r>
+            <a:endParaRPr lang="en-US" sz="1200" dirty="0"/>
+          </a:p>
+        </p:txBody>
+      </p:sp>
+    </p:spTree>
+  </p:cSld>
+  <p:clrMapOvr>
+    <a:masterClrMapping/>
+  </p:clrMapOvr>
+</p:sld>
+</file>
+
+<file path=ppt/slides/slide14.xml><?xml version="1.0" encoding="utf-8"?>
+<p:sld xmlns:a="http://schemas.openxmlformats.org/drawingml/2006/main" xmlns:r="http://schemas.openxmlformats.org/officeDocument/2006/relationships" xmlns:p="http://schemas.openxmlformats.org/presentationml/2006/main">
+  <p:cSld name="Slide 14">
+    <p:bg>
+      <p:bgPr>
+        <a:solidFill>
+          <a:srgbClr val="FFFFFF"/>
+        </a:solidFill>
+      </p:bgPr>
+    </p:bg>
+    <p:spTree>
+      <p:nvGrpSpPr>
+        <p:cNvPr id="1" name=""/>
+        <p:cNvGrpSpPr/>
+        <p:nvPr/>
+      </p:nvGrpSpPr>
+      <p:grpSpPr>
+        <a:xfrm>
+          <a:off x="0" y="0"/>
+          <a:ext cx="0" cy="0"/>
+          <a:chOff x="0" y="0"/>
+          <a:chExt cx="0" cy="0"/>
+        </a:xfrm>
+      </p:grpSpPr>
+      <p:sp>
+        <p:nvSpPr>
+          <p:cNvPr id="2" name="Text 0"/>
+          <p:cNvSpPr/>
+          <p:nvPr/>
+        </p:nvSpPr>
+        <p:spPr>
+          <a:xfrm>
+            <a:off x="0" y="0"/>
+            <a:ext cx="9144000" cy="101501"/>
+          </a:xfrm>
+          <a:prstGeom prst="rect">
+            <a:avLst/>
+          </a:prstGeom>
+          <a:solidFill>
+            <a:srgbClr val="277884"/>
+          </a:solidFill>
+          <a:ln/>
+        </p:spPr>
+        <p:txBody>
+          <a:bodyPr wrap="square" rtlCol="0" anchor="ctr"/>
+          <a:lstStyle/>
+          <a:p>
+            <a:pPr indent="0" marL="0">
+              <a:buNone/>
+            </a:pPr>
+            <a:endParaRPr lang="en-US" dirty="0"/>
+          </a:p>
+        </p:txBody>
+      </p:sp>
+      <p:sp>
+        <p:nvSpPr>
+          <p:cNvPr id="3" name="Text 1"/>
+          <p:cNvSpPr/>
+          <p:nvPr/>
+        </p:nvSpPr>
+        <p:spPr>
+          <a:xfrm>
+            <a:off x="406301" y="457051"/>
+            <a:ext cx="8498026" cy="274290"/>
+          </a:xfrm>
+          <a:prstGeom prst="rect">
+            <a:avLst/>
+          </a:prstGeom>
+          <a:noFill/>
+          <a:ln/>
+        </p:spPr>
+        <p:txBody>
+          <a:bodyPr wrap="square" lIns="0" tIns="0" rIns="0" bIns="0" rtlCol="0" anchor="t"/>
+          <a:lstStyle/>
+          <a:p>
+            <a:pPr algn="l" indent="0" marL="0">
+              <a:lnSpc>
+                <a:spcPts val="2160"/>
+              </a:lnSpc>
+              <a:spcBef>
+                <a:spcPts val="600"/>
+              </a:spcBef>
+              <a:spcAft>
+                <a:spcPts val="800"/>
+              </a:spcAft>
+              <a:buNone/>
+            </a:pPr>
+            <a:r>
+              <a:rPr lang="en-US" sz="1800" b="1" dirty="0">
+                <a:solidFill>
+                  <a:srgbClr val="FE4447"/>
+                </a:solidFill>
+                <a:latin typeface="Georgia" pitchFamily="34" charset="0"/>
+                <a:ea typeface="Georgia" pitchFamily="34" charset="-122"/>
+                <a:cs typeface="Georgia" pitchFamily="34" charset="-120"/>
+              </a:rPr>
+              <a:t>Student-facing content</a:t>
+            </a:r>
+            <a:endParaRPr lang="en-US" sz="1800" dirty="0"/>
+          </a:p>
+        </p:txBody>
+      </p:sp>
+      <p:sp>
+        <p:nvSpPr>
+          <p:cNvPr id="4" name="Text 2"/>
+          <p:cNvSpPr/>
+          <p:nvPr/>
+        </p:nvSpPr>
+        <p:spPr>
+          <a:xfrm>
+            <a:off x="406301" y="883593"/>
+            <a:ext cx="8331398" cy="1612106"/>
+          </a:xfrm>
+          <a:prstGeom prst="rect">
+            <a:avLst/>
+          </a:prstGeom>
+          <a:solidFill>
+            <a:srgbClr val="F4F8F9"/>
+          </a:solidFill>
+          <a:ln/>
+        </p:spPr>
+        <p:txBody>
+          <a:bodyPr wrap="square" rtlCol="0" anchor="ctr"/>
+          <a:lstStyle/>
+          <a:p>
+            <a:pPr indent="0" marL="0">
+              <a:buNone/>
+            </a:pPr>
+            <a:endParaRPr lang="en-US" dirty="0"/>
+          </a:p>
+        </p:txBody>
+      </p:sp>
+      <p:sp>
+        <p:nvSpPr>
+          <p:cNvPr id="5" name="Shape 3"/>
+          <p:cNvSpPr/>
+          <p:nvPr/>
+        </p:nvSpPr>
+        <p:spPr>
+          <a:xfrm>
+            <a:off x="434876" y="883593"/>
+            <a:ext cx="0" cy="1612106"/>
+          </a:xfrm>
+          <a:prstGeom prst="line">
+            <a:avLst/>
+          </a:prstGeom>
+          <a:noFill/>
+          <a:ln w="57150">
+            <a:solidFill>
+              <a:srgbClr val="FE4447"/>
+            </a:solidFill>
+            <a:prstDash val="solid"/>
+          </a:ln>
+        </p:spPr>
+      </p:sp>
+      <p:sp>
+        <p:nvSpPr>
+          <p:cNvPr id="6" name="Text 4"/>
+          <p:cNvSpPr/>
+          <p:nvPr/>
+        </p:nvSpPr>
+        <p:spPr>
+          <a:xfrm>
+            <a:off x="692051" y="1074093"/>
+            <a:ext cx="7973389" cy="230981"/>
+          </a:xfrm>
+          <a:prstGeom prst="rect">
+            <a:avLst/>
+          </a:prstGeom>
+          <a:noFill/>
+          <a:ln/>
+        </p:spPr>
+        <p:txBody>
+          <a:bodyPr wrap="square" lIns="0" tIns="0" rIns="0" bIns="0" rtlCol="0" anchor="t"/>
+          <a:lstStyle/>
+          <a:p>
+            <a:pPr algn="l" indent="0" marL="0">
+              <a:lnSpc>
+                <a:spcPts val="1820"/>
+              </a:lnSpc>
+              <a:spcBef>
+                <a:spcPts val="300"/>
+              </a:spcBef>
+              <a:spcAft>
+                <a:spcPts val="300"/>
+              </a:spcAft>
+              <a:buNone/>
+            </a:pPr>
+            <a:r>
+              <a:rPr lang="en-US" sz="1300" b="1" i="1" dirty="0">
+                <a:solidFill>
+                  <a:srgbClr val="1C2833"/>
+                </a:solidFill>
+                <a:latin typeface="Georgia" pitchFamily="34" charset="0"/>
+                <a:ea typeface="Georgia" pitchFamily="34" charset="-122"/>
+                <a:cs typeface="Georgia" pitchFamily="34" charset="-120"/>
+              </a:rPr>
+              <a:t>When to use Nikhilam vs. Standard Borrowing</a:t>
+            </a:r>
+            <a:endParaRPr lang="en-US" sz="1300" dirty="0"/>
+          </a:p>
+        </p:txBody>
+      </p:sp>
+      <p:sp>
+        <p:nvSpPr>
+          <p:cNvPr id="7" name="Text 5"/>
+          <p:cNvSpPr/>
+          <p:nvPr/>
+        </p:nvSpPr>
+        <p:spPr>
+          <a:xfrm>
+            <a:off x="692051" y="1343174"/>
+            <a:ext cx="7973389" cy="692944"/>
+          </a:xfrm>
+          <a:prstGeom prst="rect">
+            <a:avLst/>
+          </a:prstGeom>
+          <a:noFill/>
+          <a:ln/>
+        </p:spPr>
+        <p:txBody>
+          <a:bodyPr wrap="square" lIns="0" tIns="0" rIns="0" bIns="0" rtlCol="0" anchor="t"/>
+          <a:lstStyle/>
+          <a:p>
+            <a:pPr algn="l" indent="0" marL="0">
+              <a:lnSpc>
+                <a:spcPts val="1820"/>
+              </a:lnSpc>
+              <a:spcBef>
+                <a:spcPts val="300"/>
+              </a:spcBef>
+              <a:spcAft>
+                <a:spcPts val="300"/>
+              </a:spcAft>
+              <a:buNone/>
+            </a:pPr>
+            <a:r>
+              <a:rPr lang="en-US" sz="1300" dirty="0">
+                <a:solidFill>
+                  <a:srgbClr val="1C2833"/>
+                </a:solidFill>
+                <a:latin typeface="Georgia" pitchFamily="34" charset="0"/>
+                <a:ea typeface="Georgia" pitchFamily="34" charset="-122"/>
+                <a:cs typeface="Georgia" pitchFamily="34" charset="-120"/>
+              </a:rPr>
+              <a:t>| Situation | Faster method | |-----------|---------------| | Subtracting from 100, 1000, 10 000, ... | </a:t>
+            </a:r>
+            <a:pPr algn="l" indent="0" marL="0">
+              <a:lnSpc>
+                <a:spcPts val="1820"/>
+              </a:lnSpc>
+              <a:spcBef>
+                <a:spcPts val="300"/>
+              </a:spcBef>
+              <a:spcAft>
+                <a:spcPts val="300"/>
+              </a:spcAft>
+              <a:buNone/>
+            </a:pPr>
+            <a:r>
+              <a:rPr lang="en-US" sz="1300" b="1" i="1" dirty="0">
+                <a:solidFill>
+                  <a:srgbClr val="1C2833"/>
+                </a:solidFill>
+                <a:latin typeface="Georgia" pitchFamily="34" charset="0"/>
+                <a:ea typeface="Georgia" pitchFamily="34" charset="-122"/>
+                <a:cs typeface="Georgia" pitchFamily="34" charset="-120"/>
+              </a:rPr>
+              <a:t>Nikhilam</a:t>
+            </a:r>
+            <a:pPr algn="l" indent="0" marL="0">
+              <a:lnSpc>
+                <a:spcPts val="1820"/>
+              </a:lnSpc>
+              <a:spcBef>
+                <a:spcPts val="300"/>
+              </a:spcBef>
+              <a:spcAft>
+                <a:spcPts val="300"/>
+              </a:spcAft>
+              <a:buNone/>
+            </a:pPr>
+            <a:r>
+              <a:rPr lang="en-US" sz="1300" dirty="0">
+                <a:solidFill>
+                  <a:srgbClr val="1C2833"/>
+                </a:solidFill>
+                <a:latin typeface="Georgia" pitchFamily="34" charset="0"/>
+                <a:ea typeface="Georgia" pitchFamily="34" charset="-122"/>
+                <a:cs typeface="Georgia" pitchFamily="34" charset="-120"/>
+              </a:rPr>
+              <a:t> | | Subtracting a small number from a round multiple of 100/1000 | </a:t>
+            </a:r>
+            <a:pPr algn="l" indent="0" marL="0">
+              <a:lnSpc>
+                <a:spcPts val="1820"/>
+              </a:lnSpc>
+              <a:spcBef>
+                <a:spcPts val="300"/>
+              </a:spcBef>
+              <a:spcAft>
+                <a:spcPts val="300"/>
+              </a:spcAft>
+              <a:buNone/>
+            </a:pPr>
+            <a:r>
+              <a:rPr lang="en-US" sz="1300" b="1" i="1" dirty="0">
+                <a:solidFill>
+                  <a:srgbClr val="1C2833"/>
+                </a:solidFill>
+                <a:latin typeface="Georgia" pitchFamily="34" charset="0"/>
+                <a:ea typeface="Georgia" pitchFamily="34" charset="-122"/>
+                <a:cs typeface="Georgia" pitchFamily="34" charset="-120"/>
+              </a:rPr>
+              <a:t>Nikhilam with adjust</a:t>
+            </a:r>
+            <a:pPr algn="l" indent="0" marL="0">
+              <a:lnSpc>
+                <a:spcPts val="1820"/>
+              </a:lnSpc>
+              <a:spcBef>
+                <a:spcPts val="300"/>
+              </a:spcBef>
+              <a:spcAft>
+                <a:spcPts val="300"/>
+              </a:spcAft>
+              <a:buNone/>
+            </a:pPr>
+            <a:r>
+              <a:rPr lang="en-US" sz="1300" dirty="0">
+                <a:solidFill>
+                  <a:srgbClr val="1C2833"/>
+                </a:solidFill>
+                <a:latin typeface="Georgia" pitchFamily="34" charset="0"/>
+                <a:ea typeface="Georgia" pitchFamily="34" charset="-122"/>
+                <a:cs typeface="Georgia" pitchFamily="34" charset="-120"/>
+              </a:rPr>
+              <a:t> | | Both numbers in the middle, similar sizes | </a:t>
+            </a:r>
+            <a:pPr algn="l" indent="0" marL="0">
+              <a:lnSpc>
+                <a:spcPts val="1820"/>
+              </a:lnSpc>
+              <a:spcBef>
+                <a:spcPts val="300"/>
+              </a:spcBef>
+              <a:spcAft>
+                <a:spcPts val="300"/>
+              </a:spcAft>
+              <a:buNone/>
+            </a:pPr>
+            <a:r>
+              <a:rPr lang="en-US" sz="1300" b="1" i="1" dirty="0">
+                <a:solidFill>
+                  <a:srgbClr val="1C2833"/>
+                </a:solidFill>
+                <a:latin typeface="Georgia" pitchFamily="34" charset="0"/>
+                <a:ea typeface="Georgia" pitchFamily="34" charset="-122"/>
+                <a:cs typeface="Georgia" pitchFamily="34" charset="-120"/>
+              </a:rPr>
+              <a:t>Standard</a:t>
+            </a:r>
+            <a:pPr algn="l" indent="0" marL="0">
+              <a:lnSpc>
+                <a:spcPts val="1820"/>
+              </a:lnSpc>
+              <a:spcBef>
+                <a:spcPts val="300"/>
+              </a:spcBef>
+              <a:spcAft>
+                <a:spcPts val="300"/>
+              </a:spcAft>
+              <a:buNone/>
+            </a:pPr>
+            <a:r>
+              <a:rPr lang="en-US" sz="1300" dirty="0">
+                <a:solidFill>
+                  <a:srgbClr val="1C2833"/>
+                </a:solidFill>
+                <a:latin typeface="Georgia" pitchFamily="34" charset="0"/>
+                <a:ea typeface="Georgia" pitchFamily="34" charset="-122"/>
+                <a:cs typeface="Georgia" pitchFamily="34" charset="-120"/>
+              </a:rPr>
+              <a:t> | | Both numbers small (under 100) | </a:t>
+            </a:r>
+            <a:pPr algn="l" indent="0" marL="0">
+              <a:lnSpc>
+                <a:spcPts val="1820"/>
+              </a:lnSpc>
+              <a:spcBef>
+                <a:spcPts val="300"/>
+              </a:spcBef>
+              <a:spcAft>
+                <a:spcPts val="300"/>
+              </a:spcAft>
+              <a:buNone/>
+            </a:pPr>
+            <a:r>
+              <a:rPr lang="en-US" sz="1300" b="1" i="1" dirty="0">
+                <a:solidFill>
+                  <a:srgbClr val="1C2833"/>
+                </a:solidFill>
+                <a:latin typeface="Georgia" pitchFamily="34" charset="0"/>
+                <a:ea typeface="Georgia" pitchFamily="34" charset="-122"/>
+                <a:cs typeface="Georgia" pitchFamily="34" charset="-120"/>
+              </a:rPr>
+              <a:t>Either</a:t>
+            </a:r>
+            <a:pPr algn="l" indent="0" marL="0">
+              <a:lnSpc>
+                <a:spcPts val="1820"/>
+              </a:lnSpc>
+              <a:spcBef>
+                <a:spcPts val="300"/>
+              </a:spcBef>
+              <a:spcAft>
+                <a:spcPts val="300"/>
+              </a:spcAft>
+              <a:buNone/>
+            </a:pPr>
+            <a:r>
+              <a:rPr lang="en-US" sz="1300" dirty="0">
+                <a:solidFill>
+                  <a:srgbClr val="1C2833"/>
+                </a:solidFill>
+                <a:latin typeface="Georgia" pitchFamily="34" charset="0"/>
+                <a:ea typeface="Georgia" pitchFamily="34" charset="-122"/>
+                <a:cs typeface="Georgia" pitchFamily="34" charset="-120"/>
+              </a:rPr>
+              <a:t> |</a:t>
+            </a:r>
+            <a:endParaRPr lang="en-US" sz="1300" dirty="0"/>
+          </a:p>
+        </p:txBody>
+      </p:sp>
+      <p:sp>
+        <p:nvSpPr>
+          <p:cNvPr id="8" name="Text 6"/>
+          <p:cNvSpPr/>
+          <p:nvPr/>
+        </p:nvSpPr>
+        <p:spPr>
+          <a:xfrm>
+            <a:off x="692051" y="2074218"/>
+            <a:ext cx="7973389" cy="230981"/>
+          </a:xfrm>
+          <a:prstGeom prst="rect">
+            <a:avLst/>
+          </a:prstGeom>
+          <a:noFill/>
+          <a:ln/>
+        </p:spPr>
+        <p:txBody>
+          <a:bodyPr wrap="square" lIns="0" tIns="0" rIns="0" bIns="0" rtlCol="0" anchor="t"/>
+          <a:lstStyle/>
+          <a:p>
+            <a:pPr algn="l" indent="0" marL="0">
+              <a:lnSpc>
+                <a:spcPts val="1820"/>
+              </a:lnSpc>
+              <a:spcBef>
+                <a:spcPts val="300"/>
+              </a:spcBef>
+              <a:spcAft>
+                <a:spcPts val="300"/>
+              </a:spcAft>
+              <a:buNone/>
+            </a:pPr>
+            <a:r>
+              <a:rPr lang="en-US" sz="1300" i="1" dirty="0">
+                <a:solidFill>
+                  <a:srgbClr val="1C2833"/>
+                </a:solidFill>
+                <a:latin typeface="Georgia" pitchFamily="34" charset="0"/>
+                <a:ea typeface="Georgia" pitchFamily="34" charset="-122"/>
+                <a:cs typeface="Georgia" pitchFamily="34" charset="-120"/>
+              </a:rPr>
+              <a:t>The mature move: know both methods; pick the right one for the problem.</a:t>
+            </a:r>
+            <a:endParaRPr lang="en-US" sz="1300" dirty="0"/>
+          </a:p>
+        </p:txBody>
+      </p:sp>
+      <p:sp>
+        <p:nvSpPr>
+          <p:cNvPr id="9" name="Text 7"/>
+          <p:cNvSpPr/>
+          <p:nvPr/>
+        </p:nvSpPr>
+        <p:spPr>
+          <a:xfrm>
+            <a:off x="406301" y="4434929"/>
+            <a:ext cx="8498026" cy="213271"/>
+          </a:xfrm>
+          <a:prstGeom prst="rect">
+            <a:avLst/>
+          </a:prstGeom>
+          <a:noFill/>
+          <a:ln/>
+        </p:spPr>
+        <p:txBody>
+          <a:bodyPr wrap="square" lIns="0" tIns="0" rIns="0" bIns="0" rtlCol="0" anchor="t"/>
+          <a:lstStyle/>
+          <a:p>
             <a:pPr algn="l" indent="0" marL="0">
               <a:lnSpc>
                 <a:spcPts val="1680"/>
@@ -3218,6 +4244,702 @@
               <a:buNone/>
             </a:pPr>
             <a:r>
+              <a:rPr lang="en-US" sz="1200" dirty="0">
+                <a:solidFill>
+                  <a:srgbClr val="1C2833"/>
+                </a:solidFill>
+                <a:latin typeface="Arial" pitchFamily="34" charset="0"/>
+                <a:ea typeface="Arial" pitchFamily="34" charset="-122"/>
+                <a:cs typeface="Arial" pitchFamily="34" charset="-120"/>
+              </a:rPr>
+              <a:t>Middle ·  · IKS Curriculum</a:t>
+            </a:r>
+            <a:endParaRPr lang="en-US" sz="1200" dirty="0"/>
+          </a:p>
+        </p:txBody>
+      </p:sp>
+    </p:spTree>
+  </p:cSld>
+  <p:clrMapOvr>
+    <a:masterClrMapping/>
+  </p:clrMapOvr>
+</p:sld>
+</file>
+
+<file path=ppt/slides/slide15.xml><?xml version="1.0" encoding="utf-8"?>
+<p:sld xmlns:a="http://schemas.openxmlformats.org/drawingml/2006/main" xmlns:r="http://schemas.openxmlformats.org/officeDocument/2006/relationships" xmlns:p="http://schemas.openxmlformats.org/presentationml/2006/main">
+  <p:cSld name="Slide 15">
+    <p:bg>
+      <p:bgPr>
+        <a:solidFill>
+          <a:srgbClr val="FFFFFF"/>
+        </a:solidFill>
+      </p:bgPr>
+    </p:bg>
+    <p:spTree>
+      <p:nvGrpSpPr>
+        <p:cNvPr id="1" name=""/>
+        <p:cNvGrpSpPr/>
+        <p:nvPr/>
+      </p:nvGrpSpPr>
+      <p:grpSpPr>
+        <a:xfrm>
+          <a:off x="0" y="0"/>
+          <a:ext cx="0" cy="0"/>
+          <a:chOff x="0" y="0"/>
+          <a:chExt cx="0" cy="0"/>
+        </a:xfrm>
+      </p:grpSpPr>
+      <p:sp>
+        <p:nvSpPr>
+          <p:cNvPr id="2" name="Text 0"/>
+          <p:cNvSpPr/>
+          <p:nvPr/>
+        </p:nvSpPr>
+        <p:spPr>
+          <a:xfrm>
+            <a:off x="0" y="0"/>
+            <a:ext cx="9144000" cy="101501"/>
+          </a:xfrm>
+          <a:prstGeom prst="rect">
+            <a:avLst/>
+          </a:prstGeom>
+          <a:solidFill>
+            <a:srgbClr val="277884"/>
+          </a:solidFill>
+          <a:ln/>
+        </p:spPr>
+        <p:txBody>
+          <a:bodyPr wrap="square" rtlCol="0" anchor="ctr"/>
+          <a:lstStyle/>
+          <a:p>
+            <a:pPr indent="0" marL="0">
+              <a:buNone/>
+            </a:pPr>
+            <a:endParaRPr lang="en-US" dirty="0"/>
+          </a:p>
+        </p:txBody>
+      </p:sp>
+      <p:sp>
+        <p:nvSpPr>
+          <p:cNvPr id="3" name="Text 1"/>
+          <p:cNvSpPr/>
+          <p:nvPr/>
+        </p:nvSpPr>
+        <p:spPr>
+          <a:xfrm>
+            <a:off x="406301" y="457051"/>
+            <a:ext cx="8498026" cy="274290"/>
+          </a:xfrm>
+          <a:prstGeom prst="rect">
+            <a:avLst/>
+          </a:prstGeom>
+          <a:noFill/>
+          <a:ln/>
+        </p:spPr>
+        <p:txBody>
+          <a:bodyPr wrap="square" lIns="0" tIns="0" rIns="0" bIns="0" rtlCol="0" anchor="t"/>
+          <a:lstStyle/>
+          <a:p>
+            <a:pPr algn="l" indent="0" marL="0">
+              <a:lnSpc>
+                <a:spcPts val="2160"/>
+              </a:lnSpc>
+              <a:spcBef>
+                <a:spcPts val="600"/>
+              </a:spcBef>
+              <a:spcAft>
+                <a:spcPts val="800"/>
+              </a:spcAft>
+              <a:buNone/>
+            </a:pPr>
+            <a:r>
+              <a:rPr lang="en-US" sz="1800" b="1" dirty="0">
+                <a:solidFill>
+                  <a:srgbClr val="FE4447"/>
+                </a:solidFill>
+                <a:latin typeface="Georgia" pitchFamily="34" charset="0"/>
+                <a:ea typeface="Georgia" pitchFamily="34" charset="-122"/>
+                <a:cs typeface="Georgia" pitchFamily="34" charset="-120"/>
+              </a:rPr>
+              <a:t>Homework</a:t>
+            </a:r>
+            <a:endParaRPr lang="en-US" sz="1800" dirty="0"/>
+          </a:p>
+        </p:txBody>
+      </p:sp>
+      <p:sp>
+        <p:nvSpPr>
+          <p:cNvPr id="4" name="Text 2"/>
+          <p:cNvSpPr/>
+          <p:nvPr/>
+        </p:nvSpPr>
+        <p:spPr>
+          <a:xfrm>
+            <a:off x="634901" y="883593"/>
+            <a:ext cx="8102798" cy="769441"/>
+          </a:xfrm>
+          <a:prstGeom prst="rect">
+            <a:avLst/>
+          </a:prstGeom>
+          <a:noFill/>
+          <a:ln/>
+        </p:spPr>
+        <p:txBody>
+          <a:bodyPr wrap="square" lIns="0" tIns="0" rIns="0" bIns="0" rtlCol="0" anchor="t"/>
+          <a:lstStyle/>
+          <a:p>
+            <a:pPr algn="l" marL="342900" indent="-342900">
+              <a:lnSpc>
+                <a:spcPts val="1620"/>
+              </a:lnSpc>
+              <a:spcAft>
+                <a:spcPts val="300"/>
+              </a:spcAft>
+              <a:buSzPct val="100000"/>
+              <a:buChar char="•"/>
+            </a:pPr>
+            <a:r>
+              <a:rPr lang="en-US" sz="1200" dirty="0">
+                <a:solidFill>
+                  <a:srgbClr val="1C2833"/>
+                </a:solidFill>
+                <a:latin typeface="Arial" pitchFamily="34" charset="0"/>
+                <a:ea typeface="Arial" pitchFamily="34" charset="-122"/>
+                <a:cs typeface="Arial" pitchFamily="34" charset="-120"/>
+              </a:rPr>
+              <a:t>Final project touches.</a:t>
+            </a:r>
+            <a:endParaRPr lang="en-US" sz="1200" dirty="0"/>
+          </a:p>
+          <a:p>
+            <a:pPr algn="l" marL="342900" indent="-342900">
+              <a:lnSpc>
+                <a:spcPts val="1620"/>
+              </a:lnSpc>
+              <a:spcAft>
+                <a:spcPts val="300"/>
+              </a:spcAft>
+              <a:buSzPct val="100000"/>
+              <a:buChar char="•"/>
+            </a:pPr>
+            <a:r>
+              <a:rPr lang="en-US" sz="1200" dirty="0">
+                <a:solidFill>
+                  <a:srgbClr val="1C2833"/>
+                </a:solidFill>
+                <a:latin typeface="Arial" pitchFamily="34" charset="0"/>
+                <a:ea typeface="Arial" pitchFamily="34" charset="-122"/>
+                <a:cs typeface="Arial" pitchFamily="34" charset="-120"/>
+              </a:rPr>
+              <a:t>5 minutes of sūtra recitation practice — say it 5 times before bed.</a:t>
+            </a:r>
+            <a:endParaRPr lang="en-US" sz="1200" dirty="0"/>
+          </a:p>
+          <a:p>
+            <a:pPr algn="l" marL="342900" indent="-342900">
+              <a:lnSpc>
+                <a:spcPts val="1620"/>
+              </a:lnSpc>
+              <a:spcAft>
+                <a:spcPts val="300"/>
+              </a:spcAft>
+              <a:buSzPct val="100000"/>
+              <a:buChar char="•"/>
+            </a:pPr>
+            <a:r>
+              <a:rPr lang="en-US" sz="1200" dirty="0">
+                <a:solidFill>
+                  <a:srgbClr val="1C2833"/>
+                </a:solidFill>
+                <a:latin typeface="Arial" pitchFamily="34" charset="0"/>
+                <a:ea typeface="Arial" pitchFamily="34" charset="-122"/>
+                <a:cs typeface="Arial" pitchFamily="34" charset="-120"/>
+              </a:rPr>
+              <a:t>Bring all project materials tomorrow.</a:t>
+            </a:r>
+            <a:endParaRPr lang="en-US" sz="1200" dirty="0"/>
+          </a:p>
+        </p:txBody>
+      </p:sp>
+      <p:sp>
+        <p:nvSpPr>
+          <p:cNvPr id="5" name="Text 3"/>
+          <p:cNvSpPr/>
+          <p:nvPr/>
+        </p:nvSpPr>
+        <p:spPr>
+          <a:xfrm>
+            <a:off x="406301" y="4434929"/>
+            <a:ext cx="8498026" cy="213271"/>
+          </a:xfrm>
+          <a:prstGeom prst="rect">
+            <a:avLst/>
+          </a:prstGeom>
+          <a:noFill/>
+          <a:ln/>
+        </p:spPr>
+        <p:txBody>
+          <a:bodyPr wrap="square" lIns="0" tIns="0" rIns="0" bIns="0" rtlCol="0" anchor="t"/>
+          <a:lstStyle/>
+          <a:p>
+            <a:pPr algn="l" indent="0" marL="0">
+              <a:lnSpc>
+                <a:spcPts val="1680"/>
+              </a:lnSpc>
+              <a:spcBef>
+                <a:spcPts val="300"/>
+              </a:spcBef>
+              <a:spcAft>
+                <a:spcPts val="300"/>
+              </a:spcAft>
+              <a:buNone/>
+            </a:pPr>
+            <a:r>
+              <a:rPr lang="en-US" sz="1200" dirty="0">
+                <a:solidFill>
+                  <a:srgbClr val="1C2833"/>
+                </a:solidFill>
+                <a:latin typeface="Arial" pitchFamily="34" charset="0"/>
+                <a:ea typeface="Arial" pitchFamily="34" charset="-122"/>
+                <a:cs typeface="Arial" pitchFamily="34" charset="-120"/>
+              </a:rPr>
+              <a:t>Middle ·  · IKS Curriculum</a:t>
+            </a:r>
+            <a:endParaRPr lang="en-US" sz="1200" dirty="0"/>
+          </a:p>
+        </p:txBody>
+      </p:sp>
+    </p:spTree>
+  </p:cSld>
+  <p:clrMapOvr>
+    <a:masterClrMapping/>
+  </p:clrMapOvr>
+</p:sld>
+</file>
+
+<file path=ppt/slides/slide16.xml><?xml version="1.0" encoding="utf-8"?>
+<p:sld xmlns:a="http://schemas.openxmlformats.org/drawingml/2006/main" xmlns:r="http://schemas.openxmlformats.org/officeDocument/2006/relationships" xmlns:p="http://schemas.openxmlformats.org/presentationml/2006/main">
+  <p:cSld name="Slide 16">
+    <p:bg>
+      <p:bgPr>
+        <a:solidFill>
+          <a:srgbClr val="FFFFFF"/>
+        </a:solidFill>
+      </p:bgPr>
+    </p:bg>
+    <p:spTree>
+      <p:nvGrpSpPr>
+        <p:cNvPr id="1" name=""/>
+        <p:cNvGrpSpPr/>
+        <p:nvPr/>
+      </p:nvGrpSpPr>
+      <p:grpSpPr>
+        <a:xfrm>
+          <a:off x="0" y="0"/>
+          <a:ext cx="0" cy="0"/>
+          <a:chOff x="0" y="0"/>
+          <a:chExt cx="0" cy="0"/>
+        </a:xfrm>
+      </p:grpSpPr>
+      <p:sp>
+        <p:nvSpPr>
+          <p:cNvPr id="2" name="Text 0"/>
+          <p:cNvSpPr/>
+          <p:nvPr/>
+        </p:nvSpPr>
+        <p:spPr>
+          <a:xfrm>
+            <a:off x="0" y="0"/>
+            <a:ext cx="9144000" cy="101501"/>
+          </a:xfrm>
+          <a:prstGeom prst="rect">
+            <a:avLst/>
+          </a:prstGeom>
+          <a:solidFill>
+            <a:srgbClr val="277884"/>
+          </a:solidFill>
+          <a:ln/>
+        </p:spPr>
+        <p:txBody>
+          <a:bodyPr wrap="square" rtlCol="0" anchor="ctr"/>
+          <a:lstStyle/>
+          <a:p>
+            <a:pPr indent="0" marL="0">
+              <a:buNone/>
+            </a:pPr>
+            <a:endParaRPr lang="en-US" dirty="0"/>
+          </a:p>
+        </p:txBody>
+      </p:sp>
+      <p:sp>
+        <p:nvSpPr>
+          <p:cNvPr id="3" name="Text 1"/>
+          <p:cNvSpPr/>
+          <p:nvPr/>
+        </p:nvSpPr>
+        <p:spPr>
+          <a:xfrm>
+            <a:off x="406301" y="457051"/>
+            <a:ext cx="8498026" cy="274290"/>
+          </a:xfrm>
+          <a:prstGeom prst="rect">
+            <a:avLst/>
+          </a:prstGeom>
+          <a:noFill/>
+          <a:ln/>
+        </p:spPr>
+        <p:txBody>
+          <a:bodyPr wrap="square" lIns="0" tIns="0" rIns="0" bIns="0" rtlCol="0" anchor="t"/>
+          <a:lstStyle/>
+          <a:p>
+            <a:pPr algn="l" indent="0" marL="0">
+              <a:lnSpc>
+                <a:spcPts val="2160"/>
+              </a:lnSpc>
+              <a:spcBef>
+                <a:spcPts val="600"/>
+              </a:spcBef>
+              <a:spcAft>
+                <a:spcPts val="800"/>
+              </a:spcAft>
+              <a:buNone/>
+            </a:pPr>
+            <a:r>
+              <a:rPr lang="en-US" sz="1800" b="1" dirty="0">
+                <a:solidFill>
+                  <a:srgbClr val="FE4447"/>
+                </a:solidFill>
+                <a:latin typeface="Georgia" pitchFamily="34" charset="0"/>
+                <a:ea typeface="Georgia" pitchFamily="34" charset="-122"/>
+                <a:cs typeface="Georgia" pitchFamily="34" charset="-120"/>
+              </a:rPr>
+              <a:t>Differentiation</a:t>
+            </a:r>
+            <a:endParaRPr lang="en-US" sz="1800" dirty="0"/>
+          </a:p>
+        </p:txBody>
+      </p:sp>
+      <p:sp>
+        <p:nvSpPr>
+          <p:cNvPr id="4" name="Text 2"/>
+          <p:cNvSpPr/>
+          <p:nvPr/>
+        </p:nvSpPr>
+        <p:spPr>
+          <a:xfrm>
+            <a:off x="634901" y="883593"/>
+            <a:ext cx="8102798" cy="731341"/>
+          </a:xfrm>
+          <a:prstGeom prst="rect">
+            <a:avLst/>
+          </a:prstGeom>
+          <a:noFill/>
+          <a:ln/>
+        </p:spPr>
+        <p:txBody>
+          <a:bodyPr wrap="square" lIns="0" tIns="0" rIns="0" bIns="0" rtlCol="0" anchor="t"/>
+          <a:lstStyle/>
+          <a:p>
+            <a:pPr algn="l" marL="342900" indent="-342900">
+              <a:lnSpc>
+                <a:spcPts val="1620"/>
+              </a:lnSpc>
+              <a:spcAft>
+                <a:spcPts val="300"/>
+              </a:spcAft>
+              <a:buSzPct val="100000"/>
+              <a:buChar char="•"/>
+            </a:pPr>
+            <a:r>
+              <a:rPr lang="en-US" sz="1200" b="1" dirty="0">
+                <a:solidFill>
+                  <a:srgbClr val="1C2833"/>
+                </a:solidFill>
+                <a:latin typeface="Arial" pitchFamily="34" charset="0"/>
+                <a:ea typeface="Arial" pitchFamily="34" charset="-122"/>
+                <a:cs typeface="Arial" pitchFamily="34" charset="-120"/>
+              </a:rPr>
+              <a:t>Tier up:</a:t>
+            </a:r>
+            <a:pPr algn="l" indent="0" marL="0">
+              <a:lnSpc>
+                <a:spcPts val="1620"/>
+              </a:lnSpc>
+              <a:spcAft>
+                <a:spcPts val="300"/>
+              </a:spcAft>
+              <a:buNone/>
+            </a:pPr>
+            <a:r>
+              <a:rPr lang="en-US" sz="1200" dirty="0">
+                <a:solidFill>
+                  <a:srgbClr val="1C2833"/>
+                </a:solidFill>
+                <a:latin typeface="Arial" pitchFamily="34" charset="0"/>
+                <a:ea typeface="Arial" pitchFamily="34" charset="-122"/>
+                <a:cs typeface="Arial" pitchFamily="34" charset="-120"/>
+              </a:rPr>
+              <a:t> Mental challenge — do 10 mixed problems in your head with no paper. Time goal: under 3 minutes.</a:t>
+            </a:r>
+            <a:endParaRPr lang="en-US" sz="1200" dirty="0"/>
+          </a:p>
+          <a:p>
+            <a:pPr algn="l" marL="342900" indent="-342900">
+              <a:lnSpc>
+                <a:spcPts val="1620"/>
+              </a:lnSpc>
+              <a:spcAft>
+                <a:spcPts val="300"/>
+              </a:spcAft>
+              <a:buSzPct val="100000"/>
+              <a:buChar char="•"/>
+            </a:pPr>
+            <a:r>
+              <a:rPr lang="en-US" sz="1200" b="1" dirty="0">
+                <a:solidFill>
+                  <a:srgbClr val="1C2833"/>
+                </a:solidFill>
+                <a:latin typeface="Arial" pitchFamily="34" charset="0"/>
+                <a:ea typeface="Arial" pitchFamily="34" charset="-122"/>
+                <a:cs typeface="Arial" pitchFamily="34" charset="-120"/>
+              </a:rPr>
+              <a:t>Tier down:</a:t>
+            </a:r>
+            <a:pPr algn="l" indent="0" marL="0">
+              <a:lnSpc>
+                <a:spcPts val="1620"/>
+              </a:lnSpc>
+              <a:spcAft>
+                <a:spcPts val="300"/>
+              </a:spcAft>
+              <a:buNone/>
+            </a:pPr>
+            <a:r>
+              <a:rPr lang="en-US" sz="1200" dirty="0">
+                <a:solidFill>
+                  <a:srgbClr val="1C2833"/>
+                </a:solidFill>
+                <a:latin typeface="Arial" pitchFamily="34" charset="0"/>
+                <a:ea typeface="Arial" pitchFamily="34" charset="-122"/>
+                <a:cs typeface="Arial" pitchFamily="34" charset="-120"/>
+              </a:rPr>
+              <a:t> Worksheet only. Don't worry about choosing methods — solve each by Nikhilam where you can, standard otherwise.</a:t>
+            </a:r>
+            <a:endParaRPr lang="en-US" sz="1200" dirty="0"/>
+          </a:p>
+        </p:txBody>
+      </p:sp>
+      <p:sp>
+        <p:nvSpPr>
+          <p:cNvPr id="5" name="Text 3"/>
+          <p:cNvSpPr/>
+          <p:nvPr/>
+        </p:nvSpPr>
+        <p:spPr>
+          <a:xfrm>
+            <a:off x="406301" y="4434929"/>
+            <a:ext cx="8498026" cy="213271"/>
+          </a:xfrm>
+          <a:prstGeom prst="rect">
+            <a:avLst/>
+          </a:prstGeom>
+          <a:noFill/>
+          <a:ln/>
+        </p:spPr>
+        <p:txBody>
+          <a:bodyPr wrap="square" lIns="0" tIns="0" rIns="0" bIns="0" rtlCol="0" anchor="t"/>
+          <a:lstStyle/>
+          <a:p>
+            <a:pPr algn="l" indent="0" marL="0">
+              <a:lnSpc>
+                <a:spcPts val="1680"/>
+              </a:lnSpc>
+              <a:spcBef>
+                <a:spcPts val="300"/>
+              </a:spcBef>
+              <a:spcAft>
+                <a:spcPts val="300"/>
+              </a:spcAft>
+              <a:buNone/>
+            </a:pPr>
+            <a:r>
+              <a:rPr lang="en-US" sz="1200" dirty="0">
+                <a:solidFill>
+                  <a:srgbClr val="1C2833"/>
+                </a:solidFill>
+                <a:latin typeface="Arial" pitchFamily="34" charset="0"/>
+                <a:ea typeface="Arial" pitchFamily="34" charset="-122"/>
+                <a:cs typeface="Arial" pitchFamily="34" charset="-120"/>
+              </a:rPr>
+              <a:t>Middle ·  · IKS Curriculum</a:t>
+            </a:r>
+            <a:endParaRPr lang="en-US" sz="1200" dirty="0"/>
+          </a:p>
+        </p:txBody>
+      </p:sp>
+    </p:spTree>
+  </p:cSld>
+  <p:clrMapOvr>
+    <a:masterClrMapping/>
+  </p:clrMapOvr>
+</p:sld>
+</file>
+
+<file path=ppt/slides/slide17.xml><?xml version="1.0" encoding="utf-8"?>
+<p:sld xmlns:a="http://schemas.openxmlformats.org/drawingml/2006/main" xmlns:r="http://schemas.openxmlformats.org/officeDocument/2006/relationships" xmlns:p="http://schemas.openxmlformats.org/presentationml/2006/main">
+  <p:cSld name="Slide 17">
+    <p:bg>
+      <p:bgPr>
+        <a:solidFill>
+          <a:srgbClr val="FFFFFF"/>
+        </a:solidFill>
+      </p:bgPr>
+    </p:bg>
+    <p:spTree>
+      <p:nvGrpSpPr>
+        <p:cNvPr id="1" name=""/>
+        <p:cNvGrpSpPr/>
+        <p:nvPr/>
+      </p:nvGrpSpPr>
+      <p:grpSpPr>
+        <a:xfrm>
+          <a:off x="0" y="0"/>
+          <a:ext cx="0" cy="0"/>
+          <a:chOff x="0" y="0"/>
+          <a:chExt cx="0" cy="0"/>
+        </a:xfrm>
+      </p:grpSpPr>
+      <p:sp>
+        <p:nvSpPr>
+          <p:cNvPr id="2" name="Text 0"/>
+          <p:cNvSpPr/>
+          <p:nvPr/>
+        </p:nvSpPr>
+        <p:spPr>
+          <a:xfrm>
+            <a:off x="0" y="0"/>
+            <a:ext cx="9144000" cy="101501"/>
+          </a:xfrm>
+          <a:prstGeom prst="rect">
+            <a:avLst/>
+          </a:prstGeom>
+          <a:solidFill>
+            <a:srgbClr val="277884"/>
+          </a:solidFill>
+          <a:ln/>
+        </p:spPr>
+        <p:txBody>
+          <a:bodyPr wrap="square" rtlCol="0" anchor="ctr"/>
+          <a:lstStyle/>
+          <a:p>
+            <a:pPr indent="0" marL="0">
+              <a:buNone/>
+            </a:pPr>
+            <a:endParaRPr lang="en-US" dirty="0"/>
+          </a:p>
+        </p:txBody>
+      </p:sp>
+      <p:sp>
+        <p:nvSpPr>
+          <p:cNvPr id="3" name="Text 1"/>
+          <p:cNvSpPr/>
+          <p:nvPr/>
+        </p:nvSpPr>
+        <p:spPr>
+          <a:xfrm>
+            <a:off x="406301" y="457051"/>
+            <a:ext cx="8498026" cy="274290"/>
+          </a:xfrm>
+          <a:prstGeom prst="rect">
+            <a:avLst/>
+          </a:prstGeom>
+          <a:noFill/>
+          <a:ln/>
+        </p:spPr>
+        <p:txBody>
+          <a:bodyPr wrap="square" lIns="0" tIns="0" rIns="0" bIns="0" rtlCol="0" anchor="t"/>
+          <a:lstStyle/>
+          <a:p>
+            <a:pPr algn="l" indent="0" marL="0">
+              <a:lnSpc>
+                <a:spcPts val="2160"/>
+              </a:lnSpc>
+              <a:spcBef>
+                <a:spcPts val="600"/>
+              </a:spcBef>
+              <a:spcAft>
+                <a:spcPts val="800"/>
+              </a:spcAft>
+              <a:buNone/>
+            </a:pPr>
+            <a:r>
+              <a:rPr lang="en-US" sz="1800" b="1" dirty="0">
+                <a:solidFill>
+                  <a:srgbClr val="FE4447"/>
+                </a:solidFill>
+                <a:latin typeface="Georgia" pitchFamily="34" charset="0"/>
+                <a:ea typeface="Georgia" pitchFamily="34" charset="-122"/>
+                <a:cs typeface="Georgia" pitchFamily="34" charset="-120"/>
+              </a:rPr>
+              <a:t>Teacher notes</a:t>
+            </a:r>
+            <a:endParaRPr lang="en-US" sz="1800" dirty="0"/>
+          </a:p>
+        </p:txBody>
+      </p:sp>
+      <p:sp>
+        <p:nvSpPr>
+          <p:cNvPr id="4" name="Text 2"/>
+          <p:cNvSpPr/>
+          <p:nvPr/>
+        </p:nvSpPr>
+        <p:spPr>
+          <a:xfrm>
+            <a:off x="634901" y="883593"/>
+            <a:ext cx="8102798" cy="975122"/>
+          </a:xfrm>
+          <a:prstGeom prst="rect">
+            <a:avLst/>
+          </a:prstGeom>
+          <a:noFill/>
+          <a:ln/>
+        </p:spPr>
+        <p:txBody>
+          <a:bodyPr wrap="square" lIns="0" tIns="0" rIns="0" bIns="0" rtlCol="0" anchor="t"/>
+          <a:lstStyle/>
+          <a:p>
+            <a:pPr algn="l" marL="342900" indent="-342900">
+              <a:lnSpc>
+                <a:spcPts val="1620"/>
+              </a:lnSpc>
+              <a:spcAft>
+                <a:spcPts val="300"/>
+              </a:spcAft>
+              <a:buSzPct val="100000"/>
+              <a:buChar char="•"/>
+            </a:pPr>
+            <a:r>
+              <a:rPr lang="en-US" sz="1200" dirty="0">
+                <a:solidFill>
+                  <a:srgbClr val="1C2833"/>
+                </a:solidFill>
+                <a:latin typeface="Arial" pitchFamily="34" charset="0"/>
+                <a:ea typeface="Arial" pitchFamily="34" charset="-122"/>
+                <a:cs typeface="Arial" pitchFamily="34" charset="-120"/>
+              </a:rPr>
+              <a:t>The honest framing of "both methods are tools" matters. Avoid letting students walk away thinking "Nikhilam is always faster." It isn't. It's faster for </a:t>
+            </a:r>
+            <a:pPr algn="l" indent="0" marL="0">
+              <a:lnSpc>
+                <a:spcPts val="1620"/>
+              </a:lnSpc>
+              <a:spcAft>
+                <a:spcPts val="300"/>
+              </a:spcAft>
+              <a:buNone/>
+            </a:pPr>
+            <a:r>
               <a:rPr lang="en-US" sz="1200" i="1" dirty="0">
                 <a:solidFill>
                   <a:srgbClr val="1C2833"/>
@@ -3226,15 +4948,304 @@
                 <a:ea typeface="Arial" pitchFamily="34" charset="-122"/>
                 <a:cs typeface="Arial" pitchFamily="34" charset="-120"/>
               </a:rPr>
+              <a:t>certain shapes</a:t>
+            </a:r>
+            <a:pPr algn="l" indent="0" marL="0">
+              <a:lnSpc>
+                <a:spcPts val="1620"/>
+              </a:lnSpc>
+              <a:spcAft>
+                <a:spcPts val="300"/>
+              </a:spcAft>
+              <a:buNone/>
+            </a:pPr>
+            <a:r>
+              <a:rPr lang="en-US" sz="1200" dirty="0">
+                <a:solidFill>
+                  <a:srgbClr val="1C2833"/>
+                </a:solidFill>
+                <a:latin typeface="Arial" pitchFamily="34" charset="0"/>
+                <a:ea typeface="Arial" pitchFamily="34" charset="-122"/>
+                <a:cs typeface="Arial" pitchFamily="34" charset="-120"/>
+              </a:rPr>
+              <a:t> of problem.</a:t>
+            </a:r>
+            <a:endParaRPr lang="en-US" sz="1200" dirty="0"/>
+          </a:p>
+          <a:p>
+            <a:pPr algn="l" marL="342900" indent="-342900">
+              <a:lnSpc>
+                <a:spcPts val="1620"/>
+              </a:lnSpc>
+              <a:spcAft>
+                <a:spcPts val="300"/>
+              </a:spcAft>
+              <a:buSzPct val="100000"/>
+              <a:buChar char="•"/>
+            </a:pPr>
+            <a:r>
+              <a:rPr lang="en-US" sz="1200" dirty="0">
+                <a:solidFill>
+                  <a:srgbClr val="1C2833"/>
+                </a:solidFill>
+                <a:latin typeface="Arial" pitchFamily="34" charset="0"/>
+                <a:ea typeface="Arial" pitchFamily="34" charset="-122"/>
+                <a:cs typeface="Arial" pitchFamily="34" charset="-120"/>
+              </a:rPr>
+              <a:t>Some students will discover the heuristic naturally. Highlight their wording — let them name the rule.</a:t>
+            </a:r>
+            <a:endParaRPr lang="en-US" sz="1200" dirty="0"/>
+          </a:p>
+          <a:p>
+            <a:pPr algn="l" marL="342900" indent="-342900">
+              <a:lnSpc>
+                <a:spcPts val="1620"/>
+              </a:lnSpc>
+              <a:spcAft>
+                <a:spcPts val="300"/>
+              </a:spcAft>
+              <a:buSzPct val="100000"/>
+              <a:buChar char="•"/>
+            </a:pPr>
+            <a:r>
+              <a:rPr lang="en-US" sz="1200" dirty="0">
+                <a:solidFill>
+                  <a:srgbClr val="1C2833"/>
+                </a:solidFill>
+                <a:latin typeface="Arial" pitchFamily="34" charset="0"/>
+                <a:ea typeface="Arial" pitchFamily="34" charset="-122"/>
+                <a:cs typeface="Arial" pitchFamily="34" charset="-120"/>
+              </a:rPr>
+              <a:t>Project check is critical today. If any pair is behind, give them homework instructions explicitly.</a:t>
+            </a:r>
+            <a:endParaRPr lang="en-US" sz="1200" dirty="0"/>
+          </a:p>
+        </p:txBody>
+      </p:sp>
+      <p:sp>
+        <p:nvSpPr>
+          <p:cNvPr id="5" name="Text 3"/>
+          <p:cNvSpPr/>
+          <p:nvPr/>
+        </p:nvSpPr>
+        <p:spPr>
+          <a:xfrm>
+            <a:off x="406301" y="4434929"/>
+            <a:ext cx="8498026" cy="213271"/>
+          </a:xfrm>
+          <a:prstGeom prst="rect">
+            <a:avLst/>
+          </a:prstGeom>
+          <a:noFill/>
+          <a:ln/>
+        </p:spPr>
+        <p:txBody>
+          <a:bodyPr wrap="square" lIns="0" tIns="0" rIns="0" bIns="0" rtlCol="0" anchor="t"/>
+          <a:lstStyle/>
+          <a:p>
+            <a:pPr algn="l" indent="0" marL="0">
+              <a:lnSpc>
+                <a:spcPts val="1680"/>
+              </a:lnSpc>
+              <a:spcBef>
+                <a:spcPts val="300"/>
+              </a:spcBef>
+              <a:spcAft>
+                <a:spcPts val="300"/>
+              </a:spcAft>
+              <a:buNone/>
+            </a:pPr>
+            <a:r>
+              <a:rPr lang="en-US" sz="1200" dirty="0">
+                <a:solidFill>
+                  <a:srgbClr val="1C2833"/>
+                </a:solidFill>
+                <a:latin typeface="Arial" pitchFamily="34" charset="0"/>
+                <a:ea typeface="Arial" pitchFamily="34" charset="-122"/>
+                <a:cs typeface="Arial" pitchFamily="34" charset="-120"/>
+              </a:rPr>
+              <a:t>Middle ·  · IKS Curriculum</a:t>
+            </a:r>
+            <a:endParaRPr lang="en-US" sz="1200" dirty="0"/>
+          </a:p>
+        </p:txBody>
+      </p:sp>
+    </p:spTree>
+  </p:cSld>
+  <p:clrMapOvr>
+    <a:masterClrMapping/>
+  </p:clrMapOvr>
+</p:sld>
+</file>
+
+<file path=ppt/slides/slide18.xml><?xml version="1.0" encoding="utf-8"?>
+<p:sld xmlns:a="http://schemas.openxmlformats.org/drawingml/2006/main" xmlns:r="http://schemas.openxmlformats.org/officeDocument/2006/relationships" xmlns:p="http://schemas.openxmlformats.org/presentationml/2006/main">
+  <p:cSld name="Slide 18">
+    <p:bg>
+      <p:bgPr>
+        <a:solidFill>
+          <a:srgbClr val="FFFFFF"/>
+        </a:solidFill>
+      </p:bgPr>
+    </p:bg>
+    <p:spTree>
+      <p:nvGrpSpPr>
+        <p:cNvPr id="1" name=""/>
+        <p:cNvGrpSpPr/>
+        <p:nvPr/>
+      </p:nvGrpSpPr>
+      <p:grpSpPr>
+        <a:xfrm>
+          <a:off x="0" y="0"/>
+          <a:ext cx="0" cy="0"/>
+          <a:chOff x="0" y="0"/>
+          <a:chExt cx="0" cy="0"/>
+        </a:xfrm>
+      </p:grpSpPr>
+      <p:sp>
+        <p:nvSpPr>
+          <p:cNvPr id="2" name="Text 0"/>
+          <p:cNvSpPr/>
+          <p:nvPr/>
+        </p:nvSpPr>
+        <p:spPr>
+          <a:xfrm>
+            <a:off x="0" y="0"/>
+            <a:ext cx="9144000" cy="101501"/>
+          </a:xfrm>
+          <a:prstGeom prst="rect">
+            <a:avLst/>
+          </a:prstGeom>
+          <a:solidFill>
+            <a:srgbClr val="277884"/>
+          </a:solidFill>
+          <a:ln/>
+        </p:spPr>
+        <p:txBody>
+          <a:bodyPr wrap="square" rtlCol="0" anchor="ctr"/>
+          <a:lstStyle/>
+          <a:p>
+            <a:pPr indent="0" marL="0">
+              <a:buNone/>
+            </a:pPr>
+            <a:endParaRPr lang="en-US" dirty="0"/>
+          </a:p>
+        </p:txBody>
+      </p:sp>
+      <p:sp>
+        <p:nvSpPr>
+          <p:cNvPr id="3" name="Text 1"/>
+          <p:cNvSpPr/>
+          <p:nvPr/>
+        </p:nvSpPr>
+        <p:spPr>
+          <a:xfrm>
+            <a:off x="406301" y="457051"/>
+            <a:ext cx="8498026" cy="274290"/>
+          </a:xfrm>
+          <a:prstGeom prst="rect">
+            <a:avLst/>
+          </a:prstGeom>
+          <a:noFill/>
+          <a:ln/>
+        </p:spPr>
+        <p:txBody>
+          <a:bodyPr wrap="square" lIns="0" tIns="0" rIns="0" bIns="0" rtlCol="0" anchor="t"/>
+          <a:lstStyle/>
+          <a:p>
+            <a:pPr algn="l" indent="0" marL="0">
+              <a:lnSpc>
+                <a:spcPts val="2160"/>
+              </a:lnSpc>
+              <a:spcBef>
+                <a:spcPts val="600"/>
+              </a:spcBef>
+              <a:spcAft>
+                <a:spcPts val="800"/>
+              </a:spcAft>
+              <a:buNone/>
+            </a:pPr>
+            <a:r>
+              <a:rPr lang="en-US" sz="1800" b="1" dirty="0">
+                <a:solidFill>
+                  <a:srgbClr val="FE4447"/>
+                </a:solidFill>
+                <a:latin typeface="Georgia" pitchFamily="34" charset="0"/>
+                <a:ea typeface="Georgia" pitchFamily="34" charset="-122"/>
+                <a:cs typeface="Georgia" pitchFamily="34" charset="-120"/>
+              </a:rPr>
+              <a:t>Citation(s) used in this lesson</a:t>
+            </a:r>
+            <a:endParaRPr lang="en-US" sz="1800" dirty="0"/>
+          </a:p>
+        </p:txBody>
+      </p:sp>
+      <p:sp>
+        <p:nvSpPr>
+          <p:cNvPr id="4" name="Text 2"/>
+          <p:cNvSpPr/>
+          <p:nvPr/>
+        </p:nvSpPr>
+        <p:spPr>
+          <a:xfrm>
+            <a:off x="634901" y="883593"/>
+            <a:ext cx="8102798" cy="281880"/>
+          </a:xfrm>
+          <a:prstGeom prst="rect">
+            <a:avLst/>
+          </a:prstGeom>
+          <a:noFill/>
+          <a:ln/>
+        </p:spPr>
+        <p:txBody>
+          <a:bodyPr wrap="square" lIns="0" tIns="0" rIns="0" bIns="0" rtlCol="0" anchor="t"/>
+          <a:lstStyle/>
+          <a:p>
+            <a:pPr algn="l" marL="342900" indent="-342900">
+              <a:lnSpc>
+                <a:spcPts val="1620"/>
+              </a:lnSpc>
+              <a:spcAft>
+                <a:spcPts val="300"/>
+              </a:spcAft>
+              <a:buSzPct val="100000"/>
+              <a:buChar char="•"/>
+            </a:pPr>
+            <a:r>
+              <a:rPr lang="en-US" sz="1200" dirty="0">
+                <a:solidFill>
+                  <a:srgbClr val="1C2833"/>
+                </a:solidFill>
+                <a:latin typeface="Arial" pitchFamily="34" charset="0"/>
+                <a:ea typeface="Arial" pitchFamily="34" charset="-122"/>
+                <a:cs typeface="Arial" pitchFamily="34" charset="-120"/>
+              </a:rPr>
+              <a:t>Tirthaji, </a:t>
+            </a:r>
+            <a:pPr algn="l" indent="0" marL="0">
+              <a:lnSpc>
+                <a:spcPts val="1620"/>
+              </a:lnSpc>
+              <a:spcAft>
+                <a:spcPts val="300"/>
+              </a:spcAft>
+              <a:buNone/>
+            </a:pPr>
+            <a:r>
+              <a:rPr lang="en-US" sz="1200" i="1" dirty="0">
+                <a:solidFill>
+                  <a:srgbClr val="1C2833"/>
+                </a:solidFill>
+                <a:latin typeface="Arial" pitchFamily="34" charset="0"/>
+                <a:ea typeface="Arial" pitchFamily="34" charset="-122"/>
+                <a:cs typeface="Arial" pitchFamily="34" charset="-120"/>
+              </a:rPr>
               <a:t>Vedic Mathematics</a:t>
             </a:r>
             <a:pPr algn="l" indent="0" marL="0">
               <a:lnSpc>
-                <a:spcPts val="1680"/>
-              </a:lnSpc>
-              <a:spcBef>
-                <a:spcPts val="300"/>
-              </a:spcBef>
+                <a:spcPts val="1620"/>
+              </a:lnSpc>
               <a:spcAft>
                 <a:spcPts val="300"/>
               </a:spcAft>
@@ -3407,7 +5418,7 @@
                 <a:ea typeface="Georgia" pitchFamily="34" charset="-122"/>
                 <a:cs typeface="Georgia" pitchFamily="34" charset="-120"/>
               </a:rPr>
-              <a:t>Materials</a:t>
+              <a:t>Learning objective</a:t>
             </a:r>
             <a:endParaRPr lang="en-US" sz="1800" dirty="0"/>
           </a:p>
@@ -3422,7 +5433,7 @@
         <p:spPr>
           <a:xfrm>
             <a:off x="406301" y="870942"/>
-            <a:ext cx="8498026" cy="426541"/>
+            <a:ext cx="8498026" cy="639812"/>
           </a:xfrm>
           <a:prstGeom prst="rect">
             <a:avLst/>
@@ -3455,7 +5466,7 @@
                 <a:ea typeface="Arial" pitchFamily="34" charset="-122"/>
                 <a:cs typeface="Arial" pitchFamily="34" charset="-120"/>
               </a:rPr>
-              <a:t>– Comparison worksheet (10 problems, two-column answer space — one column per method) – Stopwatches – Whiteboard – Final project work-time at the end</a:t>
+              <a:t>By the end of this lesson, students will solve a mixed set of subtraction problems using both standard borrowing and Nikhilam, will compare the two methods on each problem, and will articulate a personal heuristic for when to pick which method.</a:t>
             </a:r>
             <a:endParaRPr lang="en-US" sz="1200" dirty="0"/>
           </a:p>
@@ -3613,7 +5624,7 @@
                 <a:ea typeface="Georgia" pitchFamily="34" charset="-122"/>
                 <a:cs typeface="Georgia" pitchFamily="34" charset="-120"/>
               </a:rPr>
-              <a:t>Lesson flow</a:t>
+              <a:t>Materials</a:t>
             </a:r>
             <a:endParaRPr lang="en-US" sz="1800" dirty="0"/>
           </a:p>
@@ -3622,6 +5633,124 @@
       <p:sp>
         <p:nvSpPr>
           <p:cNvPr id="4" name="Text 2"/>
+          <p:cNvSpPr/>
+          <p:nvPr/>
+        </p:nvSpPr>
+        <p:spPr>
+          <a:xfrm>
+            <a:off x="634901" y="883593"/>
+            <a:ext cx="8102798" cy="1013222"/>
+          </a:xfrm>
+          <a:prstGeom prst="rect">
+            <a:avLst/>
+          </a:prstGeom>
+          <a:noFill/>
+          <a:ln/>
+        </p:spPr>
+        <p:txBody>
+          <a:bodyPr wrap="square" lIns="0" tIns="0" rIns="0" bIns="0" rtlCol="0" anchor="t"/>
+          <a:lstStyle/>
+          <a:p>
+            <a:pPr algn="l" marL="342900" indent="-342900">
+              <a:lnSpc>
+                <a:spcPts val="1620"/>
+              </a:lnSpc>
+              <a:spcAft>
+                <a:spcPts val="300"/>
+              </a:spcAft>
+              <a:buSzPct val="100000"/>
+              <a:buChar char="•"/>
+            </a:pPr>
+            <a:r>
+              <a:rPr lang="en-US" sz="1200" dirty="0">
+                <a:solidFill>
+                  <a:srgbClr val="1C2833"/>
+                </a:solidFill>
+                <a:latin typeface="Arial" pitchFamily="34" charset="0"/>
+                <a:ea typeface="Arial" pitchFamily="34" charset="-122"/>
+                <a:cs typeface="Arial" pitchFamily="34" charset="-120"/>
+              </a:rPr>
+              <a:t>Comparison worksheet (10 problems, two-column answer space — one column per method)</a:t>
+            </a:r>
+            <a:endParaRPr lang="en-US" sz="1200" dirty="0"/>
+          </a:p>
+          <a:p>
+            <a:pPr algn="l" marL="342900" indent="-342900">
+              <a:lnSpc>
+                <a:spcPts val="1620"/>
+              </a:lnSpc>
+              <a:spcAft>
+                <a:spcPts val="300"/>
+              </a:spcAft>
+              <a:buSzPct val="100000"/>
+              <a:buChar char="•"/>
+            </a:pPr>
+            <a:r>
+              <a:rPr lang="en-US" sz="1200" dirty="0">
+                <a:solidFill>
+                  <a:srgbClr val="1C2833"/>
+                </a:solidFill>
+                <a:latin typeface="Arial" pitchFamily="34" charset="0"/>
+                <a:ea typeface="Arial" pitchFamily="34" charset="-122"/>
+                <a:cs typeface="Arial" pitchFamily="34" charset="-120"/>
+              </a:rPr>
+              <a:t>Stopwatches</a:t>
+            </a:r>
+            <a:endParaRPr lang="en-US" sz="1200" dirty="0"/>
+          </a:p>
+          <a:p>
+            <a:pPr algn="l" marL="342900" indent="-342900">
+              <a:lnSpc>
+                <a:spcPts val="1620"/>
+              </a:lnSpc>
+              <a:spcAft>
+                <a:spcPts val="300"/>
+              </a:spcAft>
+              <a:buSzPct val="100000"/>
+              <a:buChar char="•"/>
+            </a:pPr>
+            <a:r>
+              <a:rPr lang="en-US" sz="1200" dirty="0">
+                <a:solidFill>
+                  <a:srgbClr val="1C2833"/>
+                </a:solidFill>
+                <a:latin typeface="Arial" pitchFamily="34" charset="0"/>
+                <a:ea typeface="Arial" pitchFamily="34" charset="-122"/>
+                <a:cs typeface="Arial" pitchFamily="34" charset="-120"/>
+              </a:rPr>
+              <a:t>Whiteboard</a:t>
+            </a:r>
+            <a:endParaRPr lang="en-US" sz="1200" dirty="0"/>
+          </a:p>
+          <a:p>
+            <a:pPr algn="l" marL="342900" indent="-342900">
+              <a:lnSpc>
+                <a:spcPts val="1620"/>
+              </a:lnSpc>
+              <a:spcAft>
+                <a:spcPts val="300"/>
+              </a:spcAft>
+              <a:buSzPct val="100000"/>
+              <a:buChar char="•"/>
+            </a:pPr>
+            <a:r>
+              <a:rPr lang="en-US" sz="1200" dirty="0">
+                <a:solidFill>
+                  <a:srgbClr val="1C2833"/>
+                </a:solidFill>
+                <a:latin typeface="Arial" pitchFamily="34" charset="0"/>
+                <a:ea typeface="Arial" pitchFamily="34" charset="-122"/>
+                <a:cs typeface="Arial" pitchFamily="34" charset="-120"/>
+              </a:rPr>
+              <a:t>Final project work-time at the end</a:t>
+            </a:r>
+            <a:endParaRPr lang="en-US" sz="1200" dirty="0"/>
+          </a:p>
+        </p:txBody>
+      </p:sp>
+      <p:sp>
+        <p:nvSpPr>
+          <p:cNvPr id="5" name="Text 3"/>
           <p:cNvSpPr/>
           <p:nvPr/>
         </p:nvSpPr>
@@ -3771,7 +5900,7 @@
                 <a:ea typeface="Georgia" pitchFamily="34" charset="-122"/>
                 <a:cs typeface="Georgia" pitchFamily="34" charset="-120"/>
               </a:rPr>
-              <a:t>Warm-up (5 min)</a:t>
+              <a:t>Lesson flow</a:t>
             </a:r>
             <a:endParaRPr lang="en-US" sz="1800" dirty="0"/>
           </a:p>
@@ -3780,54 +5909,6 @@
       <p:sp>
         <p:nvSpPr>
           <p:cNvPr id="4" name="Text 2"/>
-          <p:cNvSpPr/>
-          <p:nvPr/>
-        </p:nvSpPr>
-        <p:spPr>
-          <a:xfrm>
-            <a:off x="406301" y="870942"/>
-            <a:ext cx="8498026" cy="213271"/>
-          </a:xfrm>
-          <a:prstGeom prst="rect">
-            <a:avLst/>
-          </a:prstGeom>
-          <a:noFill/>
-          <a:ln/>
-        </p:spPr>
-        <p:txBody>
-          <a:bodyPr wrap="square" lIns="0" tIns="0" rIns="0" bIns="0" rtlCol="0" anchor="t"/>
-          <a:lstStyle/>
-          <a:p>
-            <a:pPr algn="l" indent="0" marL="0">
-              <a:lnSpc>
-                <a:spcPts val="1680"/>
-              </a:lnSpc>
-              <a:spcBef>
-                <a:spcPts val="300"/>
-              </a:spcBef>
-              <a:spcAft>
-                <a:spcPts val="300"/>
-              </a:spcAft>
-              <a:buNone/>
-            </a:pPr>
-            <a:r>
-              <a:rPr lang="en-US" sz="1200" dirty="0">
-                <a:solidFill>
-                  <a:srgbClr val="1C2833"/>
-                </a:solidFill>
-                <a:latin typeface="Arial" pitchFamily="34" charset="0"/>
-                <a:ea typeface="Arial" pitchFamily="34" charset="-122"/>
-                <a:cs typeface="Arial" pitchFamily="34" charset="-120"/>
-              </a:rPr>
-              <a:t>– Sūtra chant. – Quick fire: 4 complements (mixed bases). – Acknowledge: tomorrow is the summative.</a:t>
-            </a:r>
-            <a:endParaRPr lang="en-US" sz="1200" dirty="0"/>
-          </a:p>
-        </p:txBody>
-      </p:sp>
-      <p:sp>
-        <p:nvSpPr>
-          <p:cNvPr id="5" name="Text 3"/>
           <p:cNvSpPr/>
           <p:nvPr/>
         </p:nvSpPr>
@@ -3977,7 +6058,7 @@
                 <a:ea typeface="Georgia" pitchFamily="34" charset="-122"/>
                 <a:cs typeface="Georgia" pitchFamily="34" charset="-120"/>
               </a:rPr>
-              <a:t>Speed test (15 min) — head-to-head</a:t>
+              <a:t>Warm-up (5 min)</a:t>
             </a:r>
             <a:endParaRPr lang="en-US" sz="1800" dirty="0"/>
           </a:p>
@@ -3991,8 +6072,8 @@
         </p:nvSpPr>
         <p:spPr>
           <a:xfrm>
-            <a:off x="406301" y="870942"/>
-            <a:ext cx="8498026" cy="213271"/>
+            <a:off x="634901" y="883593"/>
+            <a:ext cx="8102798" cy="769441"/>
           </a:xfrm>
           <a:prstGeom prst="rect">
             <a:avLst/>
@@ -4004,17 +6085,15 @@
           <a:bodyPr wrap="square" lIns="0" tIns="0" rIns="0" bIns="0" rtlCol="0" anchor="t"/>
           <a:lstStyle/>
           <a:p>
-            <a:pPr algn="l" indent="0" marL="0">
-              <a:lnSpc>
-                <a:spcPts val="1680"/>
-              </a:lnSpc>
-              <a:spcBef>
-                <a:spcPts val="300"/>
-              </a:spcBef>
-              <a:spcAft>
-                <a:spcPts val="300"/>
-              </a:spcAft>
-              <a:buNone/>
+            <a:pPr algn="l" marL="342900" indent="-342900">
+              <a:lnSpc>
+                <a:spcPts val="1620"/>
+              </a:lnSpc>
+              <a:spcAft>
+                <a:spcPts val="300"/>
+              </a:spcAft>
+              <a:buSzPct val="100000"/>
+              <a:buChar char="•"/>
             </a:pPr>
             <a:r>
               <a:rPr lang="en-US" sz="1200" dirty="0">
@@ -4025,7 +6104,55 @@
                 <a:ea typeface="Arial" pitchFamily="34" charset="-122"/>
                 <a:cs typeface="Arial" pitchFamily="34" charset="-120"/>
               </a:rPr>
-              <a:t>Distribute the comparison worksheet. 10 problems, ordered roughly:</a:t>
+              <a:t>Sūtra chant.</a:t>
+            </a:r>
+            <a:endParaRPr lang="en-US" sz="1200" dirty="0"/>
+          </a:p>
+          <a:p>
+            <a:pPr algn="l" marL="342900" indent="-342900">
+              <a:lnSpc>
+                <a:spcPts val="1620"/>
+              </a:lnSpc>
+              <a:spcAft>
+                <a:spcPts val="300"/>
+              </a:spcAft>
+              <a:buSzPct val="100000"/>
+              <a:buChar char="•"/>
+            </a:pPr>
+            <a:r>
+              <a:rPr lang="en-US" sz="1200" dirty="0">
+                <a:solidFill>
+                  <a:srgbClr val="1C2833"/>
+                </a:solidFill>
+                <a:latin typeface="Arial" pitchFamily="34" charset="0"/>
+                <a:ea typeface="Arial" pitchFamily="34" charset="-122"/>
+                <a:cs typeface="Arial" pitchFamily="34" charset="-120"/>
+              </a:rPr>
+              <a:t>Quick fire: 4 complements (mixed bases).</a:t>
+            </a:r>
+            <a:endParaRPr lang="en-US" sz="1200" dirty="0"/>
+          </a:p>
+          <a:p>
+            <a:pPr algn="l" marL="342900" indent="-342900">
+              <a:lnSpc>
+                <a:spcPts val="1620"/>
+              </a:lnSpc>
+              <a:spcAft>
+                <a:spcPts val="300"/>
+              </a:spcAft>
+              <a:buSzPct val="100000"/>
+              <a:buChar char="•"/>
+            </a:pPr>
+            <a:r>
+              <a:rPr lang="en-US" sz="1200" dirty="0">
+                <a:solidFill>
+                  <a:srgbClr val="1C2833"/>
+                </a:solidFill>
+                <a:latin typeface="Arial" pitchFamily="34" charset="0"/>
+                <a:ea typeface="Arial" pitchFamily="34" charset="-122"/>
+                <a:cs typeface="Arial" pitchFamily="34" charset="-120"/>
+              </a:rPr>
+              <a:t>Acknowledge: tomorrow is the summative.</a:t>
             </a:r>
             <a:endParaRPr lang="en-US" sz="1200" dirty="0"/>
           </a:p>
@@ -4039,611 +6166,7 @@
         </p:nvSpPr>
         <p:spPr>
           <a:xfrm>
-            <a:off x="406301" y="1160413"/>
-            <a:ext cx="8498026" cy="213271"/>
-          </a:xfrm>
-          <a:prstGeom prst="rect">
-            <a:avLst/>
-          </a:prstGeom>
-          <a:noFill/>
-          <a:ln/>
-        </p:spPr>
-        <p:txBody>
-          <a:bodyPr wrap="square" lIns="0" tIns="0" rIns="0" bIns="0" rtlCol="0" anchor="t"/>
-          <a:lstStyle/>
-          <a:p>
-            <a:pPr algn="l" indent="0" marL="0">
-              <a:lnSpc>
-                <a:spcPts val="1680"/>
-              </a:lnSpc>
-              <a:spcBef>
-                <a:spcPts val="300"/>
-              </a:spcBef>
-              <a:spcAft>
-                <a:spcPts val="300"/>
-              </a:spcAft>
-              <a:buNone/>
-            </a:pPr>
-            <a:r>
-              <a:rPr lang="en-US" sz="1200" i="1" dirty="0">
-                <a:solidFill>
-                  <a:srgbClr val="1C2833"/>
-                </a:solidFill>
-                <a:latin typeface="Arial" pitchFamily="34" charset="0"/>
-                <a:ea typeface="Arial" pitchFamily="34" charset="-122"/>
-                <a:cs typeface="Arial" pitchFamily="34" charset="-120"/>
-              </a:rPr>
-              <a:t>Each row: # · Problem · Likely faster method · Why.</a:t>
-            </a:r>
-            <a:endParaRPr lang="en-US" sz="1200" dirty="0"/>
-          </a:p>
-        </p:txBody>
-      </p:sp>
-      <p:sp>
-        <p:nvSpPr>
-          <p:cNvPr id="6" name="Text 4"/>
-          <p:cNvSpPr/>
-          <p:nvPr/>
-        </p:nvSpPr>
-        <p:spPr>
-          <a:xfrm>
-            <a:off x="634901" y="1462534"/>
-            <a:ext cx="8102798" cy="2475905"/>
-          </a:xfrm>
-          <a:prstGeom prst="rect">
-            <a:avLst/>
-          </a:prstGeom>
-          <a:noFill/>
-          <a:ln/>
-        </p:spPr>
-        <p:txBody>
-          <a:bodyPr wrap="square" lIns="0" tIns="0" rIns="0" bIns="0" rtlCol="0" anchor="t"/>
-          <a:lstStyle/>
-          <a:p>
-            <a:pPr algn="l" marL="342900" indent="-342900">
-              <a:lnSpc>
-                <a:spcPts val="1620"/>
-              </a:lnSpc>
-              <a:spcAft>
-                <a:spcPts val="300"/>
-              </a:spcAft>
-              <a:buSzPct val="100000"/>
-              <a:buChar char="•"/>
-            </a:pPr>
-            <a:r>
-              <a:rPr lang="en-US" sz="1200" b="1" dirty="0">
-                <a:solidFill>
-                  <a:srgbClr val="1C2833"/>
-                </a:solidFill>
-                <a:latin typeface="Arial" pitchFamily="34" charset="0"/>
-                <a:ea typeface="Arial" pitchFamily="34" charset="-122"/>
-                <a:cs typeface="Arial" pitchFamily="34" charset="-120"/>
-              </a:rPr>
-              <a:t>1</a:t>
-            </a:r>
-            <a:pPr algn="l" indent="0" marL="0">
-              <a:lnSpc>
-                <a:spcPts val="1620"/>
-              </a:lnSpc>
-              <a:spcAft>
-                <a:spcPts val="300"/>
-              </a:spcAft>
-              <a:buNone/>
-            </a:pPr>
-            <a:r>
-              <a:rPr lang="en-US" sz="1200" dirty="0">
-                <a:solidFill>
-                  <a:srgbClr val="1C2833"/>
-                </a:solidFill>
-                <a:latin typeface="Arial" pitchFamily="34" charset="0"/>
-                <a:ea typeface="Arial" pitchFamily="34" charset="-122"/>
-                <a:cs typeface="Arial" pitchFamily="34" charset="-120"/>
-              </a:rPr>
-              <a:t> — 100 − 37 · Nikhilam · Pure power-of-ten subtraction</a:t>
-            </a:r>
-            <a:endParaRPr lang="en-US" sz="1200" dirty="0"/>
-          </a:p>
-          <a:p>
-            <a:pPr algn="l" marL="342900" indent="-342900">
-              <a:lnSpc>
-                <a:spcPts val="1620"/>
-              </a:lnSpc>
-              <a:spcAft>
-                <a:spcPts val="300"/>
-              </a:spcAft>
-              <a:buSzPct val="100000"/>
-              <a:buChar char="•"/>
-            </a:pPr>
-            <a:r>
-              <a:rPr lang="en-US" sz="1200" b="1" dirty="0">
-                <a:solidFill>
-                  <a:srgbClr val="1C2833"/>
-                </a:solidFill>
-                <a:latin typeface="Arial" pitchFamily="34" charset="0"/>
-                <a:ea typeface="Arial" pitchFamily="34" charset="-122"/>
-                <a:cs typeface="Arial" pitchFamily="34" charset="-120"/>
-              </a:rPr>
-              <a:t>2</a:t>
-            </a:r>
-            <a:pPr algn="l" indent="0" marL="0">
-              <a:lnSpc>
-                <a:spcPts val="1620"/>
-              </a:lnSpc>
-              <a:spcAft>
-                <a:spcPts val="300"/>
-              </a:spcAft>
-              <a:buNone/>
-            </a:pPr>
-            <a:r>
-              <a:rPr lang="en-US" sz="1200" dirty="0">
-                <a:solidFill>
-                  <a:srgbClr val="1C2833"/>
-                </a:solidFill>
-                <a:latin typeface="Arial" pitchFamily="34" charset="0"/>
-                <a:ea typeface="Arial" pitchFamily="34" charset="-122"/>
-                <a:cs typeface="Arial" pitchFamily="34" charset="-120"/>
-              </a:rPr>
-              <a:t> — 87 − 24 · Standard · Small, no borrow either way</a:t>
-            </a:r>
-            <a:endParaRPr lang="en-US" sz="1200" dirty="0"/>
-          </a:p>
-          <a:p>
-            <a:pPr algn="l" marL="342900" indent="-342900">
-              <a:lnSpc>
-                <a:spcPts val="1620"/>
-              </a:lnSpc>
-              <a:spcAft>
-                <a:spcPts val="300"/>
-              </a:spcAft>
-              <a:buSzPct val="100000"/>
-              <a:buChar char="•"/>
-            </a:pPr>
-            <a:r>
-              <a:rPr lang="en-US" sz="1200" b="1" dirty="0">
-                <a:solidFill>
-                  <a:srgbClr val="1C2833"/>
-                </a:solidFill>
-                <a:latin typeface="Arial" pitchFamily="34" charset="0"/>
-                <a:ea typeface="Arial" pitchFamily="34" charset="-122"/>
-                <a:cs typeface="Arial" pitchFamily="34" charset="-120"/>
-              </a:rPr>
-              <a:t>3</a:t>
-            </a:r>
-            <a:pPr algn="l" indent="0" marL="0">
-              <a:lnSpc>
-                <a:spcPts val="1620"/>
-              </a:lnSpc>
-              <a:spcAft>
-                <a:spcPts val="300"/>
-              </a:spcAft>
-              <a:buNone/>
-            </a:pPr>
-            <a:r>
-              <a:rPr lang="en-US" sz="1200" dirty="0">
-                <a:solidFill>
-                  <a:srgbClr val="1C2833"/>
-                </a:solidFill>
-                <a:latin typeface="Arial" pitchFamily="34" charset="0"/>
-                <a:ea typeface="Arial" pitchFamily="34" charset="-122"/>
-                <a:cs typeface="Arial" pitchFamily="34" charset="-120"/>
-              </a:rPr>
-              <a:t> — 1000 − 463 · Nikhilam · Power-of-ten</a:t>
-            </a:r>
-            <a:endParaRPr lang="en-US" sz="1200" dirty="0"/>
-          </a:p>
-          <a:p>
-            <a:pPr algn="l" marL="342900" indent="-342900">
-              <a:lnSpc>
-                <a:spcPts val="1620"/>
-              </a:lnSpc>
-              <a:spcAft>
-                <a:spcPts val="300"/>
-              </a:spcAft>
-              <a:buSzPct val="100000"/>
-              <a:buChar char="•"/>
-            </a:pPr>
-            <a:r>
-              <a:rPr lang="en-US" sz="1200" b="1" dirty="0">
-                <a:solidFill>
-                  <a:srgbClr val="1C2833"/>
-                </a:solidFill>
-                <a:latin typeface="Arial" pitchFamily="34" charset="0"/>
-                <a:ea typeface="Arial" pitchFamily="34" charset="-122"/>
-                <a:cs typeface="Arial" pitchFamily="34" charset="-120"/>
-              </a:rPr>
-              <a:t>4</a:t>
-            </a:r>
-            <a:pPr algn="l" indent="0" marL="0">
-              <a:lnSpc>
-                <a:spcPts val="1620"/>
-              </a:lnSpc>
-              <a:spcAft>
-                <a:spcPts val="300"/>
-              </a:spcAft>
-              <a:buNone/>
-            </a:pPr>
-            <a:r>
-              <a:rPr lang="en-US" sz="1200" dirty="0">
-                <a:solidFill>
-                  <a:srgbClr val="1C2833"/>
-                </a:solidFill>
-                <a:latin typeface="Arial" pitchFamily="34" charset="0"/>
-                <a:ea typeface="Arial" pitchFamily="34" charset="-122"/>
-                <a:cs typeface="Arial" pitchFamily="34" charset="-120"/>
-              </a:rPr>
-              <a:t> — 532 − 178 · Standard · No clean base nearby</a:t>
-            </a:r>
-            <a:endParaRPr lang="en-US" sz="1200" dirty="0"/>
-          </a:p>
-          <a:p>
-            <a:pPr algn="l" marL="342900" indent="-342900">
-              <a:lnSpc>
-                <a:spcPts val="1620"/>
-              </a:lnSpc>
-              <a:spcAft>
-                <a:spcPts val="300"/>
-              </a:spcAft>
-              <a:buSzPct val="100000"/>
-              <a:buChar char="•"/>
-            </a:pPr>
-            <a:r>
-              <a:rPr lang="en-US" sz="1200" b="1" dirty="0">
-                <a:solidFill>
-                  <a:srgbClr val="1C2833"/>
-                </a:solidFill>
-                <a:latin typeface="Arial" pitchFamily="34" charset="0"/>
-                <a:ea typeface="Arial" pitchFamily="34" charset="-122"/>
-                <a:cs typeface="Arial" pitchFamily="34" charset="-120"/>
-              </a:rPr>
-              <a:t>5</a:t>
-            </a:r>
-            <a:pPr algn="l" indent="0" marL="0">
-              <a:lnSpc>
-                <a:spcPts val="1620"/>
-              </a:lnSpc>
-              <a:spcAft>
-                <a:spcPts val="300"/>
-              </a:spcAft>
-              <a:buNone/>
-            </a:pPr>
-            <a:r>
-              <a:rPr lang="en-US" sz="1200" dirty="0">
-                <a:solidFill>
-                  <a:srgbClr val="1C2833"/>
-                </a:solidFill>
-                <a:latin typeface="Arial" pitchFamily="34" charset="0"/>
-                <a:ea typeface="Arial" pitchFamily="34" charset="-122"/>
-                <a:cs typeface="Arial" pitchFamily="34" charset="-120"/>
-              </a:rPr>
-              <a:t> — 10 000 − 5827 · Nikhilam · Power-of-ten</a:t>
-            </a:r>
-            <a:endParaRPr lang="en-US" sz="1200" dirty="0"/>
-          </a:p>
-          <a:p>
-            <a:pPr algn="l" marL="342900" indent="-342900">
-              <a:lnSpc>
-                <a:spcPts val="1620"/>
-              </a:lnSpc>
-              <a:spcAft>
-                <a:spcPts val="300"/>
-              </a:spcAft>
-              <a:buSzPct val="100000"/>
-              <a:buChar char="•"/>
-            </a:pPr>
-            <a:r>
-              <a:rPr lang="en-US" sz="1200" b="1" dirty="0">
-                <a:solidFill>
-                  <a:srgbClr val="1C2833"/>
-                </a:solidFill>
-                <a:latin typeface="Arial" pitchFamily="34" charset="0"/>
-                <a:ea typeface="Arial" pitchFamily="34" charset="-122"/>
-                <a:cs typeface="Arial" pitchFamily="34" charset="-120"/>
-              </a:rPr>
-              <a:t>6</a:t>
-            </a:r>
-            <a:pPr algn="l" indent="0" marL="0">
-              <a:lnSpc>
-                <a:spcPts val="1620"/>
-              </a:lnSpc>
-              <a:spcAft>
-                <a:spcPts val="300"/>
-              </a:spcAft>
-              <a:buNone/>
-            </a:pPr>
-            <a:r>
-              <a:rPr lang="en-US" sz="1200" dirty="0">
-                <a:solidFill>
-                  <a:srgbClr val="1C2833"/>
-                </a:solidFill>
-                <a:latin typeface="Arial" pitchFamily="34" charset="0"/>
-                <a:ea typeface="Arial" pitchFamily="34" charset="-122"/>
-                <a:cs typeface="Arial" pitchFamily="34" charset="-120"/>
-              </a:rPr>
-              <a:t> — 7000 − 248 · Nikhilam (with adjust) · Round multiple of 1000</a:t>
-            </a:r>
-            <a:endParaRPr lang="en-US" sz="1200" dirty="0"/>
-          </a:p>
-          <a:p>
-            <a:pPr algn="l" marL="342900" indent="-342900">
-              <a:lnSpc>
-                <a:spcPts val="1620"/>
-              </a:lnSpc>
-              <a:spcAft>
-                <a:spcPts val="300"/>
-              </a:spcAft>
-              <a:buSzPct val="100000"/>
-              <a:buChar char="•"/>
-            </a:pPr>
-            <a:r>
-              <a:rPr lang="en-US" sz="1200" b="1" dirty="0">
-                <a:solidFill>
-                  <a:srgbClr val="1C2833"/>
-                </a:solidFill>
-                <a:latin typeface="Arial" pitchFamily="34" charset="0"/>
-                <a:ea typeface="Arial" pitchFamily="34" charset="-122"/>
-                <a:cs typeface="Arial" pitchFamily="34" charset="-120"/>
-              </a:rPr>
-              <a:t>7</a:t>
-            </a:r>
-            <a:pPr algn="l" indent="0" marL="0">
-              <a:lnSpc>
-                <a:spcPts val="1620"/>
-              </a:lnSpc>
-              <a:spcAft>
-                <a:spcPts val="300"/>
-              </a:spcAft>
-              <a:buNone/>
-            </a:pPr>
-            <a:r>
-              <a:rPr lang="en-US" sz="1200" dirty="0">
-                <a:solidFill>
-                  <a:srgbClr val="1C2833"/>
-                </a:solidFill>
-                <a:latin typeface="Arial" pitchFamily="34" charset="0"/>
-                <a:ea typeface="Arial" pitchFamily="34" charset="-122"/>
-                <a:cs typeface="Arial" pitchFamily="34" charset="-120"/>
-              </a:rPr>
-              <a:t> — 9385 − 4716 · Tie / standard · Mid-range subtrahend</a:t>
-            </a:r>
-            <a:endParaRPr lang="en-US" sz="1200" dirty="0"/>
-          </a:p>
-          <a:p>
-            <a:pPr algn="l" marL="342900" indent="-342900">
-              <a:lnSpc>
-                <a:spcPts val="1620"/>
-              </a:lnSpc>
-              <a:spcAft>
-                <a:spcPts val="300"/>
-              </a:spcAft>
-              <a:buSzPct val="100000"/>
-              <a:buChar char="•"/>
-            </a:pPr>
-            <a:r>
-              <a:rPr lang="en-US" sz="1200" b="1" dirty="0">
-                <a:solidFill>
-                  <a:srgbClr val="1C2833"/>
-                </a:solidFill>
-                <a:latin typeface="Arial" pitchFamily="34" charset="0"/>
-                <a:ea typeface="Arial" pitchFamily="34" charset="-122"/>
-                <a:cs typeface="Arial" pitchFamily="34" charset="-120"/>
-              </a:rPr>
-              <a:t>8</a:t>
-            </a:r>
-            <a:pPr algn="l" indent="0" marL="0">
-              <a:lnSpc>
-                <a:spcPts val="1620"/>
-              </a:lnSpc>
-              <a:spcAft>
-                <a:spcPts val="300"/>
-              </a:spcAft>
-              <a:buNone/>
-            </a:pPr>
-            <a:r>
-              <a:rPr lang="en-US" sz="1200" dirty="0">
-                <a:solidFill>
-                  <a:srgbClr val="1C2833"/>
-                </a:solidFill>
-                <a:latin typeface="Arial" pitchFamily="34" charset="0"/>
-                <a:ea typeface="Arial" pitchFamily="34" charset="-122"/>
-                <a:cs typeface="Arial" pitchFamily="34" charset="-120"/>
-              </a:rPr>
-              <a:t> — 50 000 − 12 345 · Nikhilam (with adjust) · Round multiple of 10 000</a:t>
-            </a:r>
-            <a:endParaRPr lang="en-US" sz="1200" dirty="0"/>
-          </a:p>
-          <a:p>
-            <a:pPr algn="l" marL="342900" indent="-342900">
-              <a:lnSpc>
-                <a:spcPts val="1620"/>
-              </a:lnSpc>
-              <a:spcAft>
-                <a:spcPts val="300"/>
-              </a:spcAft>
-              <a:buSzPct val="100000"/>
-              <a:buChar char="•"/>
-            </a:pPr>
-            <a:r>
-              <a:rPr lang="en-US" sz="1200" b="1" dirty="0">
-                <a:solidFill>
-                  <a:srgbClr val="1C2833"/>
-                </a:solidFill>
-                <a:latin typeface="Arial" pitchFamily="34" charset="0"/>
-                <a:ea typeface="Arial" pitchFamily="34" charset="-122"/>
-                <a:cs typeface="Arial" pitchFamily="34" charset="-120"/>
-              </a:rPr>
-              <a:t>9</a:t>
-            </a:r>
-            <a:pPr algn="l" indent="0" marL="0">
-              <a:lnSpc>
-                <a:spcPts val="1620"/>
-              </a:lnSpc>
-              <a:spcAft>
-                <a:spcPts val="300"/>
-              </a:spcAft>
-              <a:buNone/>
-            </a:pPr>
-            <a:r>
-              <a:rPr lang="en-US" sz="1200" dirty="0">
-                <a:solidFill>
-                  <a:srgbClr val="1C2833"/>
-                </a:solidFill>
-                <a:latin typeface="Arial" pitchFamily="34" charset="0"/>
-                <a:ea typeface="Arial" pitchFamily="34" charset="-122"/>
-                <a:cs typeface="Arial" pitchFamily="34" charset="-120"/>
-              </a:rPr>
-              <a:t> — 8243 − 567 · Nikhilam (with adjust) · Subtrahend close to 1000</a:t>
-            </a:r>
-            <a:endParaRPr lang="en-US" sz="1200" dirty="0"/>
-          </a:p>
-          <a:p>
-            <a:pPr algn="l" marL="342900" indent="-342900">
-              <a:lnSpc>
-                <a:spcPts val="1620"/>
-              </a:lnSpc>
-              <a:spcAft>
-                <a:spcPts val="300"/>
-              </a:spcAft>
-              <a:buSzPct val="100000"/>
-              <a:buChar char="•"/>
-            </a:pPr>
-            <a:r>
-              <a:rPr lang="en-US" sz="1200" b="1" dirty="0">
-                <a:solidFill>
-                  <a:srgbClr val="1C2833"/>
-                </a:solidFill>
-                <a:latin typeface="Arial" pitchFamily="34" charset="0"/>
-                <a:ea typeface="Arial" pitchFamily="34" charset="-122"/>
-                <a:cs typeface="Arial" pitchFamily="34" charset="-120"/>
-              </a:rPr>
-              <a:t>10</a:t>
-            </a:r>
-            <a:pPr algn="l" indent="0" marL="0">
-              <a:lnSpc>
-                <a:spcPts val="1620"/>
-              </a:lnSpc>
-              <a:spcAft>
-                <a:spcPts val="300"/>
-              </a:spcAft>
-              <a:buNone/>
-            </a:pPr>
-            <a:r>
-              <a:rPr lang="en-US" sz="1200" dirty="0">
-                <a:solidFill>
-                  <a:srgbClr val="1C2833"/>
-                </a:solidFill>
-                <a:latin typeface="Arial" pitchFamily="34" charset="0"/>
-                <a:ea typeface="Arial" pitchFamily="34" charset="-122"/>
-                <a:cs typeface="Arial" pitchFamily="34" charset="-120"/>
-              </a:rPr>
-              <a:t> — 4321 − 4118 · Standard · Both small, similar magnitudes</a:t>
-            </a:r>
-            <a:endParaRPr lang="en-US" sz="1200" dirty="0"/>
-          </a:p>
-        </p:txBody>
-      </p:sp>
-      <p:sp>
-        <p:nvSpPr>
-          <p:cNvPr id="7" name="Text 5"/>
-          <p:cNvSpPr/>
-          <p:nvPr/>
-        </p:nvSpPr>
-        <p:spPr>
-          <a:xfrm>
-            <a:off x="406301" y="4027289"/>
-            <a:ext cx="8498026" cy="426541"/>
-          </a:xfrm>
-          <a:prstGeom prst="rect">
-            <a:avLst/>
-          </a:prstGeom>
-          <a:noFill/>
-          <a:ln/>
-        </p:spPr>
-        <p:txBody>
-          <a:bodyPr wrap="square" lIns="0" tIns="0" rIns="0" bIns="0" rtlCol="0" anchor="t"/>
-          <a:lstStyle/>
-          <a:p>
-            <a:pPr algn="l" indent="0" marL="0">
-              <a:lnSpc>
-                <a:spcPts val="1680"/>
-              </a:lnSpc>
-              <a:spcBef>
-                <a:spcPts val="300"/>
-              </a:spcBef>
-              <a:spcAft>
-                <a:spcPts val="300"/>
-              </a:spcAft>
-              <a:buNone/>
-            </a:pPr>
-            <a:r>
-              <a:rPr lang="en-US" sz="1200" dirty="0">
-                <a:solidFill>
-                  <a:srgbClr val="1C2833"/>
-                </a:solidFill>
-                <a:latin typeface="Arial" pitchFamily="34" charset="0"/>
-                <a:ea typeface="Arial" pitchFamily="34" charset="-122"/>
-                <a:cs typeface="Arial" pitchFamily="34" charset="-120"/>
-              </a:rPr>
-              <a:t>Students solve each problem </a:t>
-            </a:r>
-            <a:pPr algn="l" indent="0" marL="0">
-              <a:lnSpc>
-                <a:spcPts val="1680"/>
-              </a:lnSpc>
-              <a:spcBef>
-                <a:spcPts val="300"/>
-              </a:spcBef>
-              <a:spcAft>
-                <a:spcPts val="300"/>
-              </a:spcAft>
-              <a:buNone/>
-            </a:pPr>
-            <a:r>
-              <a:rPr lang="en-US" sz="1200" b="1" dirty="0">
-                <a:solidFill>
-                  <a:srgbClr val="1C2833"/>
-                </a:solidFill>
-                <a:latin typeface="Arial" pitchFamily="34" charset="0"/>
-                <a:ea typeface="Arial" pitchFamily="34" charset="-122"/>
-                <a:cs typeface="Arial" pitchFamily="34" charset="-120"/>
-              </a:rPr>
-              <a:t>once</a:t>
-            </a:r>
-            <a:pPr algn="l" indent="0" marL="0">
-              <a:lnSpc>
-                <a:spcPts val="1680"/>
-              </a:lnSpc>
-              <a:spcBef>
-                <a:spcPts val="300"/>
-              </a:spcBef>
-              <a:spcAft>
-                <a:spcPts val="300"/>
-              </a:spcAft>
-              <a:buNone/>
-            </a:pPr>
-            <a:r>
-              <a:rPr lang="en-US" sz="1200" dirty="0">
-                <a:solidFill>
-                  <a:srgbClr val="1C2833"/>
-                </a:solidFill>
-                <a:latin typeface="Arial" pitchFamily="34" charset="0"/>
-                <a:ea typeface="Arial" pitchFamily="34" charset="-122"/>
-                <a:cs typeface="Arial" pitchFamily="34" charset="-120"/>
-              </a:rPr>
-              <a:t> by their chosen method, then again by the other method. Time both. Mark which method was faster.</a:t>
-            </a:r>
-            <a:endParaRPr lang="en-US" sz="1200" dirty="0"/>
-          </a:p>
-        </p:txBody>
-      </p:sp>
-      <p:sp>
-        <p:nvSpPr>
-          <p:cNvPr id="8" name="Text 6"/>
-          <p:cNvSpPr/>
-          <p:nvPr/>
-        </p:nvSpPr>
-        <p:spPr>
-          <a:xfrm>
-            <a:off x="406301" y="4606230"/>
+            <a:off x="406301" y="4434929"/>
             <a:ext cx="8498026" cy="213271"/>
           </a:xfrm>
           <a:prstGeom prst="rect">
@@ -4787,7 +6310,7 @@
                 <a:ea typeface="Georgia" pitchFamily="34" charset="-122"/>
                 <a:cs typeface="Georgia" pitchFamily="34" charset="-120"/>
               </a:rPr>
-              <a:t>Discussion (10 min) — When does each win?</a:t>
+              <a:t>Speed test (15 min) — head-to-head</a:t>
             </a:r>
             <a:endParaRPr lang="en-US" sz="1800" dirty="0"/>
           </a:p>
@@ -4835,7 +6358,7 @@
                 <a:ea typeface="Arial" pitchFamily="34" charset="-122"/>
                 <a:cs typeface="Arial" pitchFamily="34" charset="-120"/>
               </a:rPr>
-              <a:t>Compile on board: which problems were faster with Nikhilam? Which with standard?</a:t>
+              <a:t>Distribute the comparison worksheet. 10 problems, ordered roughly:</a:t>
             </a:r>
             <a:endParaRPr lang="en-US" sz="1200" dirty="0"/>
           </a:p>
@@ -4875,15 +6398,15 @@
               <a:buNone/>
             </a:pPr>
             <a:r>
-              <a:rPr lang="en-US" sz="1200" dirty="0">
-                <a:solidFill>
-                  <a:srgbClr val="1C2833"/>
-                </a:solidFill>
-                <a:latin typeface="Arial" pitchFamily="34" charset="0"/>
-                <a:ea typeface="Arial" pitchFamily="34" charset="-122"/>
-                <a:cs typeface="Arial" pitchFamily="34" charset="-120"/>
-              </a:rPr>
-              <a:t>Heuristic that students will surface:</a:t>
+              <a:rPr lang="en-US" sz="1200" i="1" dirty="0">
+                <a:solidFill>
+                  <a:srgbClr val="1C2833"/>
+                </a:solidFill>
+                <a:latin typeface="Arial" pitchFamily="34" charset="0"/>
+                <a:ea typeface="Arial" pitchFamily="34" charset="-122"/>
+                <a:cs typeface="Arial" pitchFamily="34" charset="-120"/>
+              </a:rPr>
+              <a:t>Each row: # · Problem · Likely faster method · Why.</a:t>
             </a:r>
             <a:endParaRPr lang="en-US" sz="1200" dirty="0"/>
           </a:p>
@@ -4892,279 +6415,6 @@
       <p:sp>
         <p:nvSpPr>
           <p:cNvPr id="6" name="Text 4"/>
-          <p:cNvSpPr/>
-          <p:nvPr/>
-        </p:nvSpPr>
-        <p:spPr>
-          <a:xfrm>
-            <a:off x="634901" y="1462534"/>
-            <a:ext cx="8102798" cy="769441"/>
-          </a:xfrm>
-          <a:prstGeom prst="rect">
-            <a:avLst/>
-          </a:prstGeom>
-          <a:noFill/>
-          <a:ln/>
-        </p:spPr>
-        <p:txBody>
-          <a:bodyPr wrap="square" lIns="0" tIns="0" rIns="0" bIns="0" rtlCol="0" anchor="t"/>
-          <a:lstStyle/>
-          <a:p>
-            <a:pPr algn="l" marL="342900" indent="-342900">
-              <a:lnSpc>
-                <a:spcPts val="1620"/>
-              </a:lnSpc>
-              <a:spcAft>
-                <a:spcPts val="300"/>
-              </a:spcAft>
-              <a:buSzPct val="100000"/>
-              <a:buChar char="•"/>
-            </a:pPr>
-            <a:r>
-              <a:rPr lang="en-US" sz="1200" b="1" dirty="0">
-                <a:solidFill>
-                  <a:srgbClr val="1C2833"/>
-                </a:solidFill>
-                <a:latin typeface="Arial" pitchFamily="34" charset="0"/>
-                <a:ea typeface="Arial" pitchFamily="34" charset="-122"/>
-                <a:cs typeface="Arial" pitchFamily="34" charset="-120"/>
-              </a:rPr>
-              <a:t>Nikhilam wins</a:t>
-            </a:r>
-            <a:pPr algn="l" indent="0" marL="0">
-              <a:lnSpc>
-                <a:spcPts val="1620"/>
-              </a:lnSpc>
-              <a:spcAft>
-                <a:spcPts val="300"/>
-              </a:spcAft>
-              <a:buNone/>
-            </a:pPr>
-            <a:r>
-              <a:rPr lang="en-US" sz="1200" dirty="0">
-                <a:solidFill>
-                  <a:srgbClr val="1C2833"/>
-                </a:solidFill>
-                <a:latin typeface="Arial" pitchFamily="34" charset="0"/>
-                <a:ea typeface="Arial" pitchFamily="34" charset="-122"/>
-                <a:cs typeface="Arial" pitchFamily="34" charset="-120"/>
-              </a:rPr>
-              <a:t> when the minuend is a clean power of ten OR the subtrahend is close to a clean power of ten.</a:t>
-            </a:r>
-            <a:endParaRPr lang="en-US" sz="1200" dirty="0"/>
-          </a:p>
-          <a:p>
-            <a:pPr algn="l" marL="342900" indent="-342900">
-              <a:lnSpc>
-                <a:spcPts val="1620"/>
-              </a:lnSpc>
-              <a:spcAft>
-                <a:spcPts val="300"/>
-              </a:spcAft>
-              <a:buSzPct val="100000"/>
-              <a:buChar char="•"/>
-            </a:pPr>
-            <a:r>
-              <a:rPr lang="en-US" sz="1200" b="1" dirty="0">
-                <a:solidFill>
-                  <a:srgbClr val="1C2833"/>
-                </a:solidFill>
-                <a:latin typeface="Arial" pitchFamily="34" charset="0"/>
-                <a:ea typeface="Arial" pitchFamily="34" charset="-122"/>
-                <a:cs typeface="Arial" pitchFamily="34" charset="-120"/>
-              </a:rPr>
-              <a:t>Standard wins</a:t>
-            </a:r>
-            <a:pPr algn="l" indent="0" marL="0">
-              <a:lnSpc>
-                <a:spcPts val="1620"/>
-              </a:lnSpc>
-              <a:spcAft>
-                <a:spcPts val="300"/>
-              </a:spcAft>
-              <a:buNone/>
-            </a:pPr>
-            <a:r>
-              <a:rPr lang="en-US" sz="1200" dirty="0">
-                <a:solidFill>
-                  <a:srgbClr val="1C2833"/>
-                </a:solidFill>
-                <a:latin typeface="Arial" pitchFamily="34" charset="0"/>
-                <a:ea typeface="Arial" pitchFamily="34" charset="-122"/>
-                <a:cs typeface="Arial" pitchFamily="34" charset="-120"/>
-              </a:rPr>
-              <a:t> when both numbers are mid-range and the subtraction requires only one or two borrows.</a:t>
-            </a:r>
-            <a:endParaRPr lang="en-US" sz="1200" dirty="0"/>
-          </a:p>
-          <a:p>
-            <a:pPr algn="l" marL="342900" indent="-342900">
-              <a:lnSpc>
-                <a:spcPts val="1620"/>
-              </a:lnSpc>
-              <a:spcAft>
-                <a:spcPts val="300"/>
-              </a:spcAft>
-              <a:buSzPct val="100000"/>
-              <a:buChar char="•"/>
-            </a:pPr>
-            <a:r>
-              <a:rPr lang="en-US" sz="1200" b="1" dirty="0">
-                <a:solidFill>
-                  <a:srgbClr val="1C2833"/>
-                </a:solidFill>
-                <a:latin typeface="Arial" pitchFamily="34" charset="0"/>
-                <a:ea typeface="Arial" pitchFamily="34" charset="-122"/>
-                <a:cs typeface="Arial" pitchFamily="34" charset="-120"/>
-              </a:rPr>
-              <a:t>Tie</a:t>
-            </a:r>
-            <a:pPr algn="l" indent="0" marL="0">
-              <a:lnSpc>
-                <a:spcPts val="1620"/>
-              </a:lnSpc>
-              <a:spcAft>
-                <a:spcPts val="300"/>
-              </a:spcAft>
-              <a:buNone/>
-            </a:pPr>
-            <a:r>
-              <a:rPr lang="en-US" sz="1200" dirty="0">
-                <a:solidFill>
-                  <a:srgbClr val="1C2833"/>
-                </a:solidFill>
-                <a:latin typeface="Arial" pitchFamily="34" charset="0"/>
-                <a:ea typeface="Arial" pitchFamily="34" charset="-122"/>
-                <a:cs typeface="Arial" pitchFamily="34" charset="-120"/>
-              </a:rPr>
-              <a:t> when the numbers are small.</a:t>
-            </a:r>
-            <a:endParaRPr lang="en-US" sz="1200" dirty="0"/>
-          </a:p>
-        </p:txBody>
-      </p:sp>
-      <p:sp>
-        <p:nvSpPr>
-          <p:cNvPr id="7" name="Text 5"/>
-          <p:cNvSpPr/>
-          <p:nvPr/>
-        </p:nvSpPr>
-        <p:spPr>
-          <a:xfrm>
-            <a:off x="406301" y="2320826"/>
-            <a:ext cx="8498026" cy="213271"/>
-          </a:xfrm>
-          <a:prstGeom prst="rect">
-            <a:avLst/>
-          </a:prstGeom>
-          <a:noFill/>
-          <a:ln/>
-        </p:spPr>
-        <p:txBody>
-          <a:bodyPr wrap="square" lIns="0" tIns="0" rIns="0" bIns="0" rtlCol="0" anchor="t"/>
-          <a:lstStyle/>
-          <a:p>
-            <a:pPr algn="l" indent="0" marL="0">
-              <a:lnSpc>
-                <a:spcPts val="1680"/>
-              </a:lnSpc>
-              <a:spcBef>
-                <a:spcPts val="300"/>
-              </a:spcBef>
-              <a:spcAft>
-                <a:spcPts val="300"/>
-              </a:spcAft>
-              <a:buNone/>
-            </a:pPr>
-            <a:r>
-              <a:rPr lang="en-US" sz="1200" dirty="0">
-                <a:solidFill>
-                  <a:srgbClr val="1C2833"/>
-                </a:solidFill>
-                <a:latin typeface="Arial" pitchFamily="34" charset="0"/>
-                <a:ea typeface="Arial" pitchFamily="34" charset="-122"/>
-                <a:cs typeface="Arial" pitchFamily="34" charset="-120"/>
-              </a:rPr>
-              <a:t>Write the heuristic on the board. Encourage students to copy it into their workbook.</a:t>
-            </a:r>
-            <a:endParaRPr lang="en-US" sz="1200" dirty="0"/>
-          </a:p>
-        </p:txBody>
-      </p:sp>
-      <p:sp>
-        <p:nvSpPr>
-          <p:cNvPr id="8" name="Text 6"/>
-          <p:cNvSpPr/>
-          <p:nvPr/>
-        </p:nvSpPr>
-        <p:spPr>
-          <a:xfrm>
-            <a:off x="406301" y="2610296"/>
-            <a:ext cx="8498026" cy="426541"/>
-          </a:xfrm>
-          <a:prstGeom prst="rect">
-            <a:avLst/>
-          </a:prstGeom>
-          <a:noFill/>
-          <a:ln/>
-        </p:spPr>
-        <p:txBody>
-          <a:bodyPr wrap="square" lIns="0" tIns="0" rIns="0" bIns="0" rtlCol="0" anchor="t"/>
-          <a:lstStyle/>
-          <a:p>
-            <a:pPr algn="l" indent="0" marL="0">
-              <a:lnSpc>
-                <a:spcPts val="1680"/>
-              </a:lnSpc>
-              <a:spcBef>
-                <a:spcPts val="300"/>
-              </a:spcBef>
-              <a:spcAft>
-                <a:spcPts val="300"/>
-              </a:spcAft>
-              <a:buNone/>
-            </a:pPr>
-            <a:r>
-              <a:rPr lang="en-US" sz="1200" dirty="0">
-                <a:solidFill>
-                  <a:srgbClr val="1C2833"/>
-                </a:solidFill>
-                <a:latin typeface="Arial" pitchFamily="34" charset="0"/>
-                <a:ea typeface="Arial" pitchFamily="34" charset="-122"/>
-                <a:cs typeface="Arial" pitchFamily="34" charset="-120"/>
-              </a:rPr>
-              <a:t>Honest note: </a:t>
-            </a:r>
-            <a:pPr algn="l" indent="0" marL="0">
-              <a:lnSpc>
-                <a:spcPts val="1680"/>
-              </a:lnSpc>
-              <a:spcBef>
-                <a:spcPts val="300"/>
-              </a:spcBef>
-              <a:spcAft>
-                <a:spcPts val="300"/>
-              </a:spcAft>
-              <a:buNone/>
-            </a:pPr>
-            <a:r>
-              <a:rPr lang="en-US" sz="1200" i="1" dirty="0">
-                <a:solidFill>
-                  <a:srgbClr val="1C2833"/>
-                </a:solidFill>
-                <a:latin typeface="Arial" pitchFamily="34" charset="0"/>
-                <a:ea typeface="Arial" pitchFamily="34" charset="-122"/>
-                <a:cs typeface="Arial" pitchFamily="34" charset="-120"/>
-              </a:rPr>
-              <a:t>"This is a real piece of mathematical maturity — knowing when to use which tool. Speed comes from knowing the choice, not from forcing one method everywhere."</a:t>
-            </a:r>
-            <a:endParaRPr lang="en-US" sz="1200" dirty="0"/>
-          </a:p>
-        </p:txBody>
-      </p:sp>
-      <p:sp>
-        <p:nvSpPr>
-          <p:cNvPr id="9" name="Text 7"/>
           <p:cNvSpPr/>
           <p:nvPr/>
         </p:nvSpPr>
@@ -5314,7 +6564,7 @@
                 <a:ea typeface="Georgia" pitchFamily="34" charset="-122"/>
                 <a:cs typeface="Georgia" pitchFamily="34" charset="-120"/>
               </a:rPr>
-              <a:t>Project work (12 min)</a:t>
+              <a:t>Speed test (15 min) — head-to-head (cont.)</a:t>
             </a:r>
             <a:endParaRPr lang="en-US" sz="1800" dirty="0"/>
           </a:p>
@@ -5328,8 +6578,8 @@
         </p:nvSpPr>
         <p:spPr>
           <a:xfrm>
-            <a:off x="406301" y="870942"/>
-            <a:ext cx="8498026" cy="426541"/>
+            <a:off x="634901" y="883593"/>
+            <a:ext cx="8102798" cy="2475905"/>
           </a:xfrm>
           <a:prstGeom prst="rect">
             <a:avLst/>
@@ -5341,13 +6591,31 @@
           <a:bodyPr wrap="square" lIns="0" tIns="0" rIns="0" bIns="0" rtlCol="0" anchor="t"/>
           <a:lstStyle/>
           <a:p>
-            <a:pPr algn="l" indent="0" marL="0">
-              <a:lnSpc>
-                <a:spcPts val="1680"/>
-              </a:lnSpc>
-              <a:spcBef>
-                <a:spcPts val="300"/>
-              </a:spcBef>
+            <a:pPr algn="l" marL="342900" indent="-342900">
+              <a:lnSpc>
+                <a:spcPts val="1620"/>
+              </a:lnSpc>
+              <a:spcAft>
+                <a:spcPts val="300"/>
+              </a:spcAft>
+              <a:buSzPct val="100000"/>
+              <a:buChar char="•"/>
+            </a:pPr>
+            <a:r>
+              <a:rPr lang="en-US" sz="1200" b="1" dirty="0">
+                <a:solidFill>
+                  <a:srgbClr val="1C2833"/>
+                </a:solidFill>
+                <a:latin typeface="Arial" pitchFamily="34" charset="0"/>
+                <a:ea typeface="Arial" pitchFamily="34" charset="-122"/>
+                <a:cs typeface="Arial" pitchFamily="34" charset="-120"/>
+              </a:rPr>
+              <a:t>1</a:t>
+            </a:r>
+            <a:pPr algn="l" indent="0" marL="0">
+              <a:lnSpc>
+                <a:spcPts val="1620"/>
+              </a:lnSpc>
               <a:spcAft>
                 <a:spcPts val="300"/>
               </a:spcAft>
@@ -5362,7 +6630,403 @@
                 <a:ea typeface="Arial" pitchFamily="34" charset="-122"/>
                 <a:cs typeface="Arial" pitchFamily="34" charset="-120"/>
               </a:rPr>
-              <a:t>– Last in-class time before the showcase. Pairs work on their project artefact. – Teacher circulates. Check: does each project have at least one Nikhilam-method example? Does each cite a source?</a:t>
+              <a:t> — 100 − 37 · Nikhilam · Pure power-of-ten subtraction</a:t>
+            </a:r>
+            <a:endParaRPr lang="en-US" sz="1200" dirty="0"/>
+          </a:p>
+          <a:p>
+            <a:pPr algn="l" marL="342900" indent="-342900">
+              <a:lnSpc>
+                <a:spcPts val="1620"/>
+              </a:lnSpc>
+              <a:spcAft>
+                <a:spcPts val="300"/>
+              </a:spcAft>
+              <a:buSzPct val="100000"/>
+              <a:buChar char="•"/>
+            </a:pPr>
+            <a:r>
+              <a:rPr lang="en-US" sz="1200" b="1" dirty="0">
+                <a:solidFill>
+                  <a:srgbClr val="1C2833"/>
+                </a:solidFill>
+                <a:latin typeface="Arial" pitchFamily="34" charset="0"/>
+                <a:ea typeface="Arial" pitchFamily="34" charset="-122"/>
+                <a:cs typeface="Arial" pitchFamily="34" charset="-120"/>
+              </a:rPr>
+              <a:t>2</a:t>
+            </a:r>
+            <a:pPr algn="l" indent="0" marL="0">
+              <a:lnSpc>
+                <a:spcPts val="1620"/>
+              </a:lnSpc>
+              <a:spcAft>
+                <a:spcPts val="300"/>
+              </a:spcAft>
+              <a:buNone/>
+            </a:pPr>
+            <a:r>
+              <a:rPr lang="en-US" sz="1200" dirty="0">
+                <a:solidFill>
+                  <a:srgbClr val="1C2833"/>
+                </a:solidFill>
+                <a:latin typeface="Arial" pitchFamily="34" charset="0"/>
+                <a:ea typeface="Arial" pitchFamily="34" charset="-122"/>
+                <a:cs typeface="Arial" pitchFamily="34" charset="-120"/>
+              </a:rPr>
+              <a:t> — 87 − 24 · Standard · Small, no borrow either way</a:t>
+            </a:r>
+            <a:endParaRPr lang="en-US" sz="1200" dirty="0"/>
+          </a:p>
+          <a:p>
+            <a:pPr algn="l" marL="342900" indent="-342900">
+              <a:lnSpc>
+                <a:spcPts val="1620"/>
+              </a:lnSpc>
+              <a:spcAft>
+                <a:spcPts val="300"/>
+              </a:spcAft>
+              <a:buSzPct val="100000"/>
+              <a:buChar char="•"/>
+            </a:pPr>
+            <a:r>
+              <a:rPr lang="en-US" sz="1200" b="1" dirty="0">
+                <a:solidFill>
+                  <a:srgbClr val="1C2833"/>
+                </a:solidFill>
+                <a:latin typeface="Arial" pitchFamily="34" charset="0"/>
+                <a:ea typeface="Arial" pitchFamily="34" charset="-122"/>
+                <a:cs typeface="Arial" pitchFamily="34" charset="-120"/>
+              </a:rPr>
+              <a:t>3</a:t>
+            </a:r>
+            <a:pPr algn="l" indent="0" marL="0">
+              <a:lnSpc>
+                <a:spcPts val="1620"/>
+              </a:lnSpc>
+              <a:spcAft>
+                <a:spcPts val="300"/>
+              </a:spcAft>
+              <a:buNone/>
+            </a:pPr>
+            <a:r>
+              <a:rPr lang="en-US" sz="1200" dirty="0">
+                <a:solidFill>
+                  <a:srgbClr val="1C2833"/>
+                </a:solidFill>
+                <a:latin typeface="Arial" pitchFamily="34" charset="0"/>
+                <a:ea typeface="Arial" pitchFamily="34" charset="-122"/>
+                <a:cs typeface="Arial" pitchFamily="34" charset="-120"/>
+              </a:rPr>
+              <a:t> — 1000 − 463 · Nikhilam · Power-of-ten</a:t>
+            </a:r>
+            <a:endParaRPr lang="en-US" sz="1200" dirty="0"/>
+          </a:p>
+          <a:p>
+            <a:pPr algn="l" marL="342900" indent="-342900">
+              <a:lnSpc>
+                <a:spcPts val="1620"/>
+              </a:lnSpc>
+              <a:spcAft>
+                <a:spcPts val="300"/>
+              </a:spcAft>
+              <a:buSzPct val="100000"/>
+              <a:buChar char="•"/>
+            </a:pPr>
+            <a:r>
+              <a:rPr lang="en-US" sz="1200" b="1" dirty="0">
+                <a:solidFill>
+                  <a:srgbClr val="1C2833"/>
+                </a:solidFill>
+                <a:latin typeface="Arial" pitchFamily="34" charset="0"/>
+                <a:ea typeface="Arial" pitchFamily="34" charset="-122"/>
+                <a:cs typeface="Arial" pitchFamily="34" charset="-120"/>
+              </a:rPr>
+              <a:t>4</a:t>
+            </a:r>
+            <a:pPr algn="l" indent="0" marL="0">
+              <a:lnSpc>
+                <a:spcPts val="1620"/>
+              </a:lnSpc>
+              <a:spcAft>
+                <a:spcPts val="300"/>
+              </a:spcAft>
+              <a:buNone/>
+            </a:pPr>
+            <a:r>
+              <a:rPr lang="en-US" sz="1200" dirty="0">
+                <a:solidFill>
+                  <a:srgbClr val="1C2833"/>
+                </a:solidFill>
+                <a:latin typeface="Arial" pitchFamily="34" charset="0"/>
+                <a:ea typeface="Arial" pitchFamily="34" charset="-122"/>
+                <a:cs typeface="Arial" pitchFamily="34" charset="-120"/>
+              </a:rPr>
+              <a:t> — 532 − 178 · Standard · No clean base nearby</a:t>
+            </a:r>
+            <a:endParaRPr lang="en-US" sz="1200" dirty="0"/>
+          </a:p>
+          <a:p>
+            <a:pPr algn="l" marL="342900" indent="-342900">
+              <a:lnSpc>
+                <a:spcPts val="1620"/>
+              </a:lnSpc>
+              <a:spcAft>
+                <a:spcPts val="300"/>
+              </a:spcAft>
+              <a:buSzPct val="100000"/>
+              <a:buChar char="•"/>
+            </a:pPr>
+            <a:r>
+              <a:rPr lang="en-US" sz="1200" b="1" dirty="0">
+                <a:solidFill>
+                  <a:srgbClr val="1C2833"/>
+                </a:solidFill>
+                <a:latin typeface="Arial" pitchFamily="34" charset="0"/>
+                <a:ea typeface="Arial" pitchFamily="34" charset="-122"/>
+                <a:cs typeface="Arial" pitchFamily="34" charset="-120"/>
+              </a:rPr>
+              <a:t>5</a:t>
+            </a:r>
+            <a:pPr algn="l" indent="0" marL="0">
+              <a:lnSpc>
+                <a:spcPts val="1620"/>
+              </a:lnSpc>
+              <a:spcAft>
+                <a:spcPts val="300"/>
+              </a:spcAft>
+              <a:buNone/>
+            </a:pPr>
+            <a:r>
+              <a:rPr lang="en-US" sz="1200" dirty="0">
+                <a:solidFill>
+                  <a:srgbClr val="1C2833"/>
+                </a:solidFill>
+                <a:latin typeface="Arial" pitchFamily="34" charset="0"/>
+                <a:ea typeface="Arial" pitchFamily="34" charset="-122"/>
+                <a:cs typeface="Arial" pitchFamily="34" charset="-120"/>
+              </a:rPr>
+              <a:t> — 10 000 − 5827 · Nikhilam · Power-of-ten</a:t>
+            </a:r>
+            <a:endParaRPr lang="en-US" sz="1200" dirty="0"/>
+          </a:p>
+          <a:p>
+            <a:pPr algn="l" marL="342900" indent="-342900">
+              <a:lnSpc>
+                <a:spcPts val="1620"/>
+              </a:lnSpc>
+              <a:spcAft>
+                <a:spcPts val="300"/>
+              </a:spcAft>
+              <a:buSzPct val="100000"/>
+              <a:buChar char="•"/>
+            </a:pPr>
+            <a:r>
+              <a:rPr lang="en-US" sz="1200" b="1" dirty="0">
+                <a:solidFill>
+                  <a:srgbClr val="1C2833"/>
+                </a:solidFill>
+                <a:latin typeface="Arial" pitchFamily="34" charset="0"/>
+                <a:ea typeface="Arial" pitchFamily="34" charset="-122"/>
+                <a:cs typeface="Arial" pitchFamily="34" charset="-120"/>
+              </a:rPr>
+              <a:t>6</a:t>
+            </a:r>
+            <a:pPr algn="l" indent="0" marL="0">
+              <a:lnSpc>
+                <a:spcPts val="1620"/>
+              </a:lnSpc>
+              <a:spcAft>
+                <a:spcPts val="300"/>
+              </a:spcAft>
+              <a:buNone/>
+            </a:pPr>
+            <a:r>
+              <a:rPr lang="en-US" sz="1200" dirty="0">
+                <a:solidFill>
+                  <a:srgbClr val="1C2833"/>
+                </a:solidFill>
+                <a:latin typeface="Arial" pitchFamily="34" charset="0"/>
+                <a:ea typeface="Arial" pitchFamily="34" charset="-122"/>
+                <a:cs typeface="Arial" pitchFamily="34" charset="-120"/>
+              </a:rPr>
+              <a:t> — 7000 − 248 · Nikhilam (with adjust) · Round multiple of 1000</a:t>
+            </a:r>
+            <a:endParaRPr lang="en-US" sz="1200" dirty="0"/>
+          </a:p>
+          <a:p>
+            <a:pPr algn="l" marL="342900" indent="-342900">
+              <a:lnSpc>
+                <a:spcPts val="1620"/>
+              </a:lnSpc>
+              <a:spcAft>
+                <a:spcPts val="300"/>
+              </a:spcAft>
+              <a:buSzPct val="100000"/>
+              <a:buChar char="•"/>
+            </a:pPr>
+            <a:r>
+              <a:rPr lang="en-US" sz="1200" b="1" dirty="0">
+                <a:solidFill>
+                  <a:srgbClr val="1C2833"/>
+                </a:solidFill>
+                <a:latin typeface="Arial" pitchFamily="34" charset="0"/>
+                <a:ea typeface="Arial" pitchFamily="34" charset="-122"/>
+                <a:cs typeface="Arial" pitchFamily="34" charset="-120"/>
+              </a:rPr>
+              <a:t>7</a:t>
+            </a:r>
+            <a:pPr algn="l" indent="0" marL="0">
+              <a:lnSpc>
+                <a:spcPts val="1620"/>
+              </a:lnSpc>
+              <a:spcAft>
+                <a:spcPts val="300"/>
+              </a:spcAft>
+              <a:buNone/>
+            </a:pPr>
+            <a:r>
+              <a:rPr lang="en-US" sz="1200" dirty="0">
+                <a:solidFill>
+                  <a:srgbClr val="1C2833"/>
+                </a:solidFill>
+                <a:latin typeface="Arial" pitchFamily="34" charset="0"/>
+                <a:ea typeface="Arial" pitchFamily="34" charset="-122"/>
+                <a:cs typeface="Arial" pitchFamily="34" charset="-120"/>
+              </a:rPr>
+              <a:t> — 9385 − 4716 · Tie / standard · Mid-range subtrahend</a:t>
+            </a:r>
+            <a:endParaRPr lang="en-US" sz="1200" dirty="0"/>
+          </a:p>
+          <a:p>
+            <a:pPr algn="l" marL="342900" indent="-342900">
+              <a:lnSpc>
+                <a:spcPts val="1620"/>
+              </a:lnSpc>
+              <a:spcAft>
+                <a:spcPts val="300"/>
+              </a:spcAft>
+              <a:buSzPct val="100000"/>
+              <a:buChar char="•"/>
+            </a:pPr>
+            <a:r>
+              <a:rPr lang="en-US" sz="1200" b="1" dirty="0">
+                <a:solidFill>
+                  <a:srgbClr val="1C2833"/>
+                </a:solidFill>
+                <a:latin typeface="Arial" pitchFamily="34" charset="0"/>
+                <a:ea typeface="Arial" pitchFamily="34" charset="-122"/>
+                <a:cs typeface="Arial" pitchFamily="34" charset="-120"/>
+              </a:rPr>
+              <a:t>8</a:t>
+            </a:r>
+            <a:pPr algn="l" indent="0" marL="0">
+              <a:lnSpc>
+                <a:spcPts val="1620"/>
+              </a:lnSpc>
+              <a:spcAft>
+                <a:spcPts val="300"/>
+              </a:spcAft>
+              <a:buNone/>
+            </a:pPr>
+            <a:r>
+              <a:rPr lang="en-US" sz="1200" dirty="0">
+                <a:solidFill>
+                  <a:srgbClr val="1C2833"/>
+                </a:solidFill>
+                <a:latin typeface="Arial" pitchFamily="34" charset="0"/>
+                <a:ea typeface="Arial" pitchFamily="34" charset="-122"/>
+                <a:cs typeface="Arial" pitchFamily="34" charset="-120"/>
+              </a:rPr>
+              <a:t> — 50 000 − 12 345 · Nikhilam (with adjust) · Round multiple of 10 000</a:t>
+            </a:r>
+            <a:endParaRPr lang="en-US" sz="1200" dirty="0"/>
+          </a:p>
+          <a:p>
+            <a:pPr algn="l" marL="342900" indent="-342900">
+              <a:lnSpc>
+                <a:spcPts val="1620"/>
+              </a:lnSpc>
+              <a:spcAft>
+                <a:spcPts val="300"/>
+              </a:spcAft>
+              <a:buSzPct val="100000"/>
+              <a:buChar char="•"/>
+            </a:pPr>
+            <a:r>
+              <a:rPr lang="en-US" sz="1200" b="1" dirty="0">
+                <a:solidFill>
+                  <a:srgbClr val="1C2833"/>
+                </a:solidFill>
+                <a:latin typeface="Arial" pitchFamily="34" charset="0"/>
+                <a:ea typeface="Arial" pitchFamily="34" charset="-122"/>
+                <a:cs typeface="Arial" pitchFamily="34" charset="-120"/>
+              </a:rPr>
+              <a:t>9</a:t>
+            </a:r>
+            <a:pPr algn="l" indent="0" marL="0">
+              <a:lnSpc>
+                <a:spcPts val="1620"/>
+              </a:lnSpc>
+              <a:spcAft>
+                <a:spcPts val="300"/>
+              </a:spcAft>
+              <a:buNone/>
+            </a:pPr>
+            <a:r>
+              <a:rPr lang="en-US" sz="1200" dirty="0">
+                <a:solidFill>
+                  <a:srgbClr val="1C2833"/>
+                </a:solidFill>
+                <a:latin typeface="Arial" pitchFamily="34" charset="0"/>
+                <a:ea typeface="Arial" pitchFamily="34" charset="-122"/>
+                <a:cs typeface="Arial" pitchFamily="34" charset="-120"/>
+              </a:rPr>
+              <a:t> — 8243 − 567 · Nikhilam (with adjust) · Subtrahend close to 1000</a:t>
+            </a:r>
+            <a:endParaRPr lang="en-US" sz="1200" dirty="0"/>
+          </a:p>
+          <a:p>
+            <a:pPr algn="l" marL="342900" indent="-342900">
+              <a:lnSpc>
+                <a:spcPts val="1620"/>
+              </a:lnSpc>
+              <a:spcAft>
+                <a:spcPts val="300"/>
+              </a:spcAft>
+              <a:buSzPct val="100000"/>
+              <a:buChar char="•"/>
+            </a:pPr>
+            <a:r>
+              <a:rPr lang="en-US" sz="1200" b="1" dirty="0">
+                <a:solidFill>
+                  <a:srgbClr val="1C2833"/>
+                </a:solidFill>
+                <a:latin typeface="Arial" pitchFamily="34" charset="0"/>
+                <a:ea typeface="Arial" pitchFamily="34" charset="-122"/>
+                <a:cs typeface="Arial" pitchFamily="34" charset="-120"/>
+              </a:rPr>
+              <a:t>10</a:t>
+            </a:r>
+            <a:pPr algn="l" indent="0" marL="0">
+              <a:lnSpc>
+                <a:spcPts val="1620"/>
+              </a:lnSpc>
+              <a:spcAft>
+                <a:spcPts val="300"/>
+              </a:spcAft>
+              <a:buNone/>
+            </a:pPr>
+            <a:r>
+              <a:rPr lang="en-US" sz="1200" dirty="0">
+                <a:solidFill>
+                  <a:srgbClr val="1C2833"/>
+                </a:solidFill>
+                <a:latin typeface="Arial" pitchFamily="34" charset="0"/>
+                <a:ea typeface="Arial" pitchFamily="34" charset="-122"/>
+                <a:cs typeface="Arial" pitchFamily="34" charset="-120"/>
+              </a:rPr>
+              <a:t> — 4321 − 4118 · Standard · Both small, similar magnitudes</a:t>
             </a:r>
             <a:endParaRPr lang="en-US" sz="1200" dirty="0"/>
           </a:p>
@@ -5520,7 +7184,7 @@
                 <a:ea typeface="Georgia" pitchFamily="34" charset="-122"/>
                 <a:cs typeface="Georgia" pitchFamily="34" charset="-120"/>
               </a:rPr>
-              <a:t>Wrap-up (3 min)</a:t>
+              <a:t>Speed test (15 min) — head-to-head (cont.)</a:t>
             </a:r>
             <a:endParaRPr lang="en-US" sz="1800" dirty="0"/>
           </a:p>
@@ -5568,7 +7232,53 @@
                 <a:ea typeface="Arial" pitchFamily="34" charset="-122"/>
                 <a:cs typeface="Arial" pitchFamily="34" charset="-120"/>
               </a:rPr>
-              <a:t>– Tomorrow's plan: 20-min summative quiz, then 3-min project presentations. – Sūtra chant — final practice for tomorrow's recitation.</a:t>
+              <a:t>Students solve each problem </a:t>
+            </a:r>
+            <a:pPr algn="l" indent="0" marL="0">
+              <a:lnSpc>
+                <a:spcPts val="1680"/>
+              </a:lnSpc>
+              <a:spcBef>
+                <a:spcPts val="300"/>
+              </a:spcBef>
+              <a:spcAft>
+                <a:spcPts val="300"/>
+              </a:spcAft>
+              <a:buNone/>
+            </a:pPr>
+            <a:r>
+              <a:rPr lang="en-US" sz="1200" b="1" dirty="0">
+                <a:solidFill>
+                  <a:srgbClr val="1C2833"/>
+                </a:solidFill>
+                <a:latin typeface="Arial" pitchFamily="34" charset="0"/>
+                <a:ea typeface="Arial" pitchFamily="34" charset="-122"/>
+                <a:cs typeface="Arial" pitchFamily="34" charset="-120"/>
+              </a:rPr>
+              <a:t>once</a:t>
+            </a:r>
+            <a:pPr algn="l" indent="0" marL="0">
+              <a:lnSpc>
+                <a:spcPts val="1680"/>
+              </a:lnSpc>
+              <a:spcBef>
+                <a:spcPts val="300"/>
+              </a:spcBef>
+              <a:spcAft>
+                <a:spcPts val="300"/>
+              </a:spcAft>
+              <a:buNone/>
+            </a:pPr>
+            <a:r>
+              <a:rPr lang="en-US" sz="1200" dirty="0">
+                <a:solidFill>
+                  <a:srgbClr val="1C2833"/>
+                </a:solidFill>
+                <a:latin typeface="Arial" pitchFamily="34" charset="0"/>
+                <a:ea typeface="Arial" pitchFamily="34" charset="-122"/>
+                <a:cs typeface="Arial" pitchFamily="34" charset="-120"/>
+              </a:rPr>
+              <a:t> by their chosen method, then again by the other method. Time both. Mark which method was faster.</a:t>
             </a:r>
             <a:endParaRPr lang="en-US" sz="1200" dirty="0"/>
           </a:p>
@@ -5726,7 +7436,7 @@
                 <a:ea typeface="Georgia" pitchFamily="34" charset="-122"/>
                 <a:cs typeface="Georgia" pitchFamily="34" charset="-120"/>
               </a:rPr>
-              <a:t>Student-facing content</a:t>
+              <a:t>Discussion (10 min) — When does each win?</a:t>
             </a:r>
             <a:endParaRPr lang="en-US" sz="1800" dirty="0"/>
           </a:p>
@@ -5740,61 +7450,56 @@
         </p:nvSpPr>
         <p:spPr>
           <a:xfrm>
-            <a:off x="406301" y="883593"/>
-            <a:ext cx="8331398" cy="1612106"/>
-          </a:xfrm>
-          <a:prstGeom prst="rect">
-            <a:avLst/>
-          </a:prstGeom>
-          <a:solidFill>
-            <a:srgbClr val="F4F8F9"/>
-          </a:solidFill>
+            <a:off x="406301" y="870942"/>
+            <a:ext cx="8498026" cy="213271"/>
+          </a:xfrm>
+          <a:prstGeom prst="rect">
+            <a:avLst/>
+          </a:prstGeom>
+          <a:noFill/>
           <a:ln/>
         </p:spPr>
         <p:txBody>
-          <a:bodyPr wrap="square" rtlCol="0" anchor="ctr"/>
-          <a:lstStyle/>
-          <a:p>
-            <a:pPr indent="0" marL="0">
-              <a:buNone/>
-            </a:pPr>
-            <a:endParaRPr lang="en-US" dirty="0"/>
-          </a:p>
-        </p:txBody>
-      </p:sp>
-      <p:sp>
-        <p:nvSpPr>
-          <p:cNvPr id="5" name="Shape 3"/>
+          <a:bodyPr wrap="square" lIns="0" tIns="0" rIns="0" bIns="0" rtlCol="0" anchor="t"/>
+          <a:lstStyle/>
+          <a:p>
+            <a:pPr algn="l" indent="0" marL="0">
+              <a:lnSpc>
+                <a:spcPts val="1680"/>
+              </a:lnSpc>
+              <a:spcBef>
+                <a:spcPts val="300"/>
+              </a:spcBef>
+              <a:spcAft>
+                <a:spcPts val="300"/>
+              </a:spcAft>
+              <a:buNone/>
+            </a:pPr>
+            <a:r>
+              <a:rPr lang="en-US" sz="1200" dirty="0">
+                <a:solidFill>
+                  <a:srgbClr val="1C2833"/>
+                </a:solidFill>
+                <a:latin typeface="Arial" pitchFamily="34" charset="0"/>
+                <a:ea typeface="Arial" pitchFamily="34" charset="-122"/>
+                <a:cs typeface="Arial" pitchFamily="34" charset="-120"/>
+              </a:rPr>
+              <a:t>Compile on board: which problems were faster with Nikhilam? Which with standard?</a:t>
+            </a:r>
+            <a:endParaRPr lang="en-US" sz="1200" dirty="0"/>
+          </a:p>
+        </p:txBody>
+      </p:sp>
+      <p:sp>
+        <p:nvSpPr>
+          <p:cNvPr id="5" name="Text 3"/>
           <p:cNvSpPr/>
           <p:nvPr/>
         </p:nvSpPr>
         <p:spPr>
           <a:xfrm>
-            <a:off x="434876" y="883593"/>
-            <a:ext cx="0" cy="1612106"/>
-          </a:xfrm>
-          <a:prstGeom prst="line">
-            <a:avLst/>
-          </a:prstGeom>
-          <a:noFill/>
-          <a:ln w="57150">
-            <a:solidFill>
-              <a:srgbClr val="FE4447"/>
-            </a:solidFill>
-            <a:prstDash val="solid"/>
-          </a:ln>
-        </p:spPr>
-      </p:sp>
-      <p:sp>
-        <p:nvSpPr>
-          <p:cNvPr id="6" name="Text 4"/>
-          <p:cNvSpPr/>
-          <p:nvPr/>
-        </p:nvSpPr>
-        <p:spPr>
-          <a:xfrm>
-            <a:off x="692051" y="1074093"/>
-            <a:ext cx="7973389" cy="230981"/>
+            <a:off x="406301" y="1160413"/>
+            <a:ext cx="8498026" cy="213271"/>
           </a:xfrm>
           <a:prstGeom prst="rect">
             <a:avLst/>
@@ -5808,7 +7513,7 @@
           <a:p>
             <a:pPr algn="l" indent="0" marL="0">
               <a:lnSpc>
-                <a:spcPts val="1820"/>
+                <a:spcPts val="1680"/>
               </a:lnSpc>
               <a:spcBef>
                 <a:spcPts val="300"/>
@@ -5819,303 +7524,23 @@
               <a:buNone/>
             </a:pPr>
             <a:r>
-              <a:rPr lang="en-US" sz="1300" b="1" i="1" dirty="0">
-                <a:solidFill>
-                  <a:srgbClr val="1C2833"/>
-                </a:solidFill>
-                <a:latin typeface="Georgia" pitchFamily="34" charset="0"/>
-                <a:ea typeface="Georgia" pitchFamily="34" charset="-122"/>
-                <a:cs typeface="Georgia" pitchFamily="34" charset="-120"/>
-              </a:rPr>
-              <a:t>When to use Nikhilam vs. Standard Borrowing</a:t>
-            </a:r>
-            <a:endParaRPr lang="en-US" sz="1300" dirty="0"/>
-          </a:p>
-        </p:txBody>
-      </p:sp>
-      <p:sp>
-        <p:nvSpPr>
-          <p:cNvPr id="7" name="Text 5"/>
-          <p:cNvSpPr/>
-          <p:nvPr/>
-        </p:nvSpPr>
-        <p:spPr>
-          <a:xfrm>
-            <a:off x="692051" y="1343174"/>
-            <a:ext cx="7973389" cy="692944"/>
-          </a:xfrm>
-          <a:prstGeom prst="rect">
-            <a:avLst/>
-          </a:prstGeom>
-          <a:noFill/>
-          <a:ln/>
-        </p:spPr>
-        <p:txBody>
-          <a:bodyPr wrap="square" lIns="0" tIns="0" rIns="0" bIns="0" rtlCol="0" anchor="t"/>
-          <a:lstStyle/>
-          <a:p>
-            <a:pPr algn="l" indent="0" marL="0">
-              <a:lnSpc>
-                <a:spcPts val="1820"/>
-              </a:lnSpc>
-              <a:spcBef>
-                <a:spcPts val="300"/>
-              </a:spcBef>
-              <a:spcAft>
-                <a:spcPts val="300"/>
-              </a:spcAft>
-              <a:buNone/>
-            </a:pPr>
-            <a:r>
-              <a:rPr lang="en-US" sz="1300" dirty="0">
-                <a:solidFill>
-                  <a:srgbClr val="1C2833"/>
-                </a:solidFill>
-                <a:latin typeface="Georgia" pitchFamily="34" charset="0"/>
-                <a:ea typeface="Georgia" pitchFamily="34" charset="-122"/>
-                <a:cs typeface="Georgia" pitchFamily="34" charset="-120"/>
-              </a:rPr>
-              <a:t>| Situation | Faster method | |-----------|---------------| | Subtracting from 100, 1000, 10 000, ... | </a:t>
-            </a:r>
-            <a:pPr algn="l" indent="0" marL="0">
-              <a:lnSpc>
-                <a:spcPts val="1820"/>
-              </a:lnSpc>
-              <a:spcBef>
-                <a:spcPts val="300"/>
-              </a:spcBef>
-              <a:spcAft>
-                <a:spcPts val="300"/>
-              </a:spcAft>
-              <a:buNone/>
-            </a:pPr>
-            <a:r>
-              <a:rPr lang="en-US" sz="1300" b="1" i="1" dirty="0">
-                <a:solidFill>
-                  <a:srgbClr val="1C2833"/>
-                </a:solidFill>
-                <a:latin typeface="Georgia" pitchFamily="34" charset="0"/>
-                <a:ea typeface="Georgia" pitchFamily="34" charset="-122"/>
-                <a:cs typeface="Georgia" pitchFamily="34" charset="-120"/>
-              </a:rPr>
-              <a:t>Nikhilam</a:t>
-            </a:r>
-            <a:pPr algn="l" indent="0" marL="0">
-              <a:lnSpc>
-                <a:spcPts val="1820"/>
-              </a:lnSpc>
-              <a:spcBef>
-                <a:spcPts val="300"/>
-              </a:spcBef>
-              <a:spcAft>
-                <a:spcPts val="300"/>
-              </a:spcAft>
-              <a:buNone/>
-            </a:pPr>
-            <a:r>
-              <a:rPr lang="en-US" sz="1300" dirty="0">
-                <a:solidFill>
-                  <a:srgbClr val="1C2833"/>
-                </a:solidFill>
-                <a:latin typeface="Georgia" pitchFamily="34" charset="0"/>
-                <a:ea typeface="Georgia" pitchFamily="34" charset="-122"/>
-                <a:cs typeface="Georgia" pitchFamily="34" charset="-120"/>
-              </a:rPr>
-              <a:t> | | Subtracting a small number from a round multiple of 100/1000 | </a:t>
-            </a:r>
-            <a:pPr algn="l" indent="0" marL="0">
-              <a:lnSpc>
-                <a:spcPts val="1820"/>
-              </a:lnSpc>
-              <a:spcBef>
-                <a:spcPts val="300"/>
-              </a:spcBef>
-              <a:spcAft>
-                <a:spcPts val="300"/>
-              </a:spcAft>
-              <a:buNone/>
-            </a:pPr>
-            <a:r>
-              <a:rPr lang="en-US" sz="1300" b="1" i="1" dirty="0">
-                <a:solidFill>
-                  <a:srgbClr val="1C2833"/>
-                </a:solidFill>
-                <a:latin typeface="Georgia" pitchFamily="34" charset="0"/>
-                <a:ea typeface="Georgia" pitchFamily="34" charset="-122"/>
-                <a:cs typeface="Georgia" pitchFamily="34" charset="-120"/>
-              </a:rPr>
-              <a:t>Nikhilam with adjust</a:t>
-            </a:r>
-            <a:pPr algn="l" indent="0" marL="0">
-              <a:lnSpc>
-                <a:spcPts val="1820"/>
-              </a:lnSpc>
-              <a:spcBef>
-                <a:spcPts val="300"/>
-              </a:spcBef>
-              <a:spcAft>
-                <a:spcPts val="300"/>
-              </a:spcAft>
-              <a:buNone/>
-            </a:pPr>
-            <a:r>
-              <a:rPr lang="en-US" sz="1300" dirty="0">
-                <a:solidFill>
-                  <a:srgbClr val="1C2833"/>
-                </a:solidFill>
-                <a:latin typeface="Georgia" pitchFamily="34" charset="0"/>
-                <a:ea typeface="Georgia" pitchFamily="34" charset="-122"/>
-                <a:cs typeface="Georgia" pitchFamily="34" charset="-120"/>
-              </a:rPr>
-              <a:t> | | Both numbers in the middle, similar sizes | </a:t>
-            </a:r>
-            <a:pPr algn="l" indent="0" marL="0">
-              <a:lnSpc>
-                <a:spcPts val="1820"/>
-              </a:lnSpc>
-              <a:spcBef>
-                <a:spcPts val="300"/>
-              </a:spcBef>
-              <a:spcAft>
-                <a:spcPts val="300"/>
-              </a:spcAft>
-              <a:buNone/>
-            </a:pPr>
-            <a:r>
-              <a:rPr lang="en-US" sz="1300" b="1" i="1" dirty="0">
-                <a:solidFill>
-                  <a:srgbClr val="1C2833"/>
-                </a:solidFill>
-                <a:latin typeface="Georgia" pitchFamily="34" charset="0"/>
-                <a:ea typeface="Georgia" pitchFamily="34" charset="-122"/>
-                <a:cs typeface="Georgia" pitchFamily="34" charset="-120"/>
-              </a:rPr>
-              <a:t>Standard</a:t>
-            </a:r>
-            <a:pPr algn="l" indent="0" marL="0">
-              <a:lnSpc>
-                <a:spcPts val="1820"/>
-              </a:lnSpc>
-              <a:spcBef>
-                <a:spcPts val="300"/>
-              </a:spcBef>
-              <a:spcAft>
-                <a:spcPts val="300"/>
-              </a:spcAft>
-              <a:buNone/>
-            </a:pPr>
-            <a:r>
-              <a:rPr lang="en-US" sz="1300" dirty="0">
-                <a:solidFill>
-                  <a:srgbClr val="1C2833"/>
-                </a:solidFill>
-                <a:latin typeface="Georgia" pitchFamily="34" charset="0"/>
-                <a:ea typeface="Georgia" pitchFamily="34" charset="-122"/>
-                <a:cs typeface="Georgia" pitchFamily="34" charset="-120"/>
-              </a:rPr>
-              <a:t> | | Both numbers small (under 100) | </a:t>
-            </a:r>
-            <a:pPr algn="l" indent="0" marL="0">
-              <a:lnSpc>
-                <a:spcPts val="1820"/>
-              </a:lnSpc>
-              <a:spcBef>
-                <a:spcPts val="300"/>
-              </a:spcBef>
-              <a:spcAft>
-                <a:spcPts val="300"/>
-              </a:spcAft>
-              <a:buNone/>
-            </a:pPr>
-            <a:r>
-              <a:rPr lang="en-US" sz="1300" b="1" i="1" dirty="0">
-                <a:solidFill>
-                  <a:srgbClr val="1C2833"/>
-                </a:solidFill>
-                <a:latin typeface="Georgia" pitchFamily="34" charset="0"/>
-                <a:ea typeface="Georgia" pitchFamily="34" charset="-122"/>
-                <a:cs typeface="Georgia" pitchFamily="34" charset="-120"/>
-              </a:rPr>
-              <a:t>Either</a:t>
-            </a:r>
-            <a:pPr algn="l" indent="0" marL="0">
-              <a:lnSpc>
-                <a:spcPts val="1820"/>
-              </a:lnSpc>
-              <a:spcBef>
-                <a:spcPts val="300"/>
-              </a:spcBef>
-              <a:spcAft>
-                <a:spcPts val="300"/>
-              </a:spcAft>
-              <a:buNone/>
-            </a:pPr>
-            <a:r>
-              <a:rPr lang="en-US" sz="1300" dirty="0">
-                <a:solidFill>
-                  <a:srgbClr val="1C2833"/>
-                </a:solidFill>
-                <a:latin typeface="Georgia" pitchFamily="34" charset="0"/>
-                <a:ea typeface="Georgia" pitchFamily="34" charset="-122"/>
-                <a:cs typeface="Georgia" pitchFamily="34" charset="-120"/>
-              </a:rPr>
-              <a:t> |</a:t>
-            </a:r>
-            <a:endParaRPr lang="en-US" sz="1300" dirty="0"/>
-          </a:p>
-        </p:txBody>
-      </p:sp>
-      <p:sp>
-        <p:nvSpPr>
-          <p:cNvPr id="8" name="Text 6"/>
-          <p:cNvSpPr/>
-          <p:nvPr/>
-        </p:nvSpPr>
-        <p:spPr>
-          <a:xfrm>
-            <a:off x="692051" y="2074218"/>
-            <a:ext cx="7973389" cy="230981"/>
-          </a:xfrm>
-          <a:prstGeom prst="rect">
-            <a:avLst/>
-          </a:prstGeom>
-          <a:noFill/>
-          <a:ln/>
-        </p:spPr>
-        <p:txBody>
-          <a:bodyPr wrap="square" lIns="0" tIns="0" rIns="0" bIns="0" rtlCol="0" anchor="t"/>
-          <a:lstStyle/>
-          <a:p>
-            <a:pPr algn="l" indent="0" marL="0">
-              <a:lnSpc>
-                <a:spcPts val="1820"/>
-              </a:lnSpc>
-              <a:spcBef>
-                <a:spcPts val="300"/>
-              </a:spcBef>
-              <a:spcAft>
-                <a:spcPts val="300"/>
-              </a:spcAft>
-              <a:buNone/>
-            </a:pPr>
-            <a:r>
-              <a:rPr lang="en-US" sz="1300" i="1" dirty="0">
-                <a:solidFill>
-                  <a:srgbClr val="1C2833"/>
-                </a:solidFill>
-                <a:latin typeface="Georgia" pitchFamily="34" charset="0"/>
-                <a:ea typeface="Georgia" pitchFamily="34" charset="-122"/>
-                <a:cs typeface="Georgia" pitchFamily="34" charset="-120"/>
-              </a:rPr>
-              <a:t>The mature move: know both methods; pick the right one for the problem.</a:t>
-            </a:r>
-            <a:endParaRPr lang="en-US" sz="1300" dirty="0"/>
-          </a:p>
-        </p:txBody>
-      </p:sp>
-      <p:sp>
-        <p:nvSpPr>
-          <p:cNvPr id="9" name="Text 7"/>
+              <a:rPr lang="en-US" sz="1200" dirty="0">
+                <a:solidFill>
+                  <a:srgbClr val="1C2833"/>
+                </a:solidFill>
+                <a:latin typeface="Arial" pitchFamily="34" charset="0"/>
+                <a:ea typeface="Arial" pitchFamily="34" charset="-122"/>
+                <a:cs typeface="Arial" pitchFamily="34" charset="-120"/>
+              </a:rPr>
+              <a:t>Heuristic that students will surface:</a:t>
+            </a:r>
+            <a:endParaRPr lang="en-US" sz="1200" dirty="0"/>
+          </a:p>
+        </p:txBody>
+      </p:sp>
+      <p:sp>
+        <p:nvSpPr>
+          <p:cNvPr id="6" name="Text 4"/>
           <p:cNvSpPr/>
           <p:nvPr/>
         </p:nvSpPr>
